--- a/output/中钢协_上海长三角产业研学考察计划与合作框架.pptx
+++ b/output/中钢协_上海长三角产业研学考察计划与合作框架.pptx
@@ -17,6 +17,10 @@
     <p:sldId id="265" r:id="rId16"/>
     <p:sldId id="266" r:id="rId17"/>
     <p:sldId id="267" r:id="rId18"/>
+    <p:sldId id="268" r:id="rId19"/>
+    <p:sldId id="269" r:id="rId20"/>
+    <p:sldId id="270" r:id="rId21"/>
+    <p:sldId id="271" r:id="rId22"/>
   </p:sldIdLst>
   <p:sldSz cx="12191695" cy="6858000" type="screen4x3"/>
   <p:notesSz cx="6858000" cy="9144000"/>
@@ -3195,7 +3199,7 @@
         </p:nvSpPr>
         <p:spPr>
           <a:xfrm>
-            <a:off x="914400" y="1737360"/>
+            <a:off x="914400" y="1600200"/>
             <a:ext cx="10332720" cy="640080"/>
           </a:xfrm>
           <a:prstGeom prst="rect">
@@ -3226,7 +3230,7 @@
                 <a:ea typeface="微软雅黑"/>
                 <a:cs typeface="微软雅黑"/>
               </a:rPr>
-              <a:t>钢铁 × 地产 × 产业园区</a:t>
+              <a:t>钢铁 × 不动产 × 产业园区</a:t>
             </a:r>
           </a:p>
         </p:txBody>
@@ -3239,7 +3243,7 @@
         </p:nvSpPr>
         <p:spPr>
           <a:xfrm>
-            <a:off x="914400" y="2514600"/>
+            <a:off x="914400" y="2377440"/>
             <a:ext cx="10332720" cy="548640"/>
           </a:xfrm>
           <a:prstGeom prst="rect">
@@ -3262,7 +3266,7 @@
               </a:spcAft>
             </a:pPr>
             <a:r>
-              <a:rPr sz="2200" b="1">
+              <a:rPr sz="2100" b="1">
                 <a:solidFill>
                   <a:srgbClr val="E88A1A"/>
                 </a:solidFill>
@@ -3270,7 +3274,7 @@
                 <a:ea typeface="微软雅黑"/>
                 <a:cs typeface="微软雅黑"/>
               </a:rPr>
-              <a:t>上海 / 长三角产业研学考察计划 与 合作框架</a:t>
+              <a:t>上海 / 长三角产业研学考察计划 与 联合主办合作框架</a:t>
             </a:r>
           </a:p>
         </p:txBody>
@@ -3283,7 +3287,7 @@
         </p:nvSpPr>
         <p:spPr>
           <a:xfrm>
-            <a:off x="914400" y="3566160"/>
+            <a:off x="914400" y="3429000"/>
             <a:ext cx="10332720" cy="1280160"/>
           </a:xfrm>
           <a:prstGeom prst="rect">
@@ -3327,15 +3331,15 @@
               </a:spcAft>
             </a:pPr>
             <a:r>
-              <a:rPr sz="1400" b="0">
-                <a:solidFill>
-                  <a:srgbClr val="C9D6E3"/>
+              <a:rPr sz="1500" b="1">
+                <a:solidFill>
+                  <a:srgbClr val="FFFFFF"/>
                 </a:solidFill>
                 <a:latin typeface="微软雅黑"/>
                 <a:ea typeface="微软雅黑"/>
                 <a:cs typeface="微软雅黑"/>
               </a:rPr>
-              <a:t>标杆项目 · 标杆园区 · 智能制造 · 科技企业 · 供需闭门撮合</a:t>
+              <a:t>总会对总会 · 商务对商务 · 对等交流</a:t>
             </a:r>
           </a:p>
         </p:txBody>
@@ -3348,8 +3352,8 @@
         </p:nvSpPr>
         <p:spPr>
           <a:xfrm>
-            <a:off x="914400" y="5669280"/>
-            <a:ext cx="10332720" cy="822960"/>
+            <a:off x="914400" y="5486400"/>
+            <a:ext cx="10332720" cy="1005840"/>
           </a:xfrm>
           <a:prstGeom prst="rect">
             <a:avLst/>
@@ -3361,6 +3365,27 @@
             <a:spAutoFit/>
           </a:bodyPr>
           <a:lstStyle/>
+          <a:p>
+            <a:pPr algn="ctr">
+              <a:lnSpc>
+                <a:spcPct val="108000"/>
+              </a:lnSpc>
+              <a:spcAft>
+                <a:spcPts val="600"/>
+              </a:spcAft>
+            </a:pPr>
+            <a:r>
+              <a:rPr sz="1300" b="1">
+                <a:solidFill>
+                  <a:srgbClr val="FFFFFF"/>
+                </a:solidFill>
+                <a:latin typeface="微软雅黑"/>
+                <a:ea typeface="微软雅黑"/>
+                <a:cs typeface="微软雅黑"/>
+              </a:rPr>
+              <a:t>联合主办：复旦大学住房政策研究中心 · 上海市科技企业联合会 · 上海市杨浦区科技企业联合会</a:t>
+            </a:r>
+          </a:p>
           <a:p>
             <a:pPr algn="ctr">
               <a:lnSpc>
@@ -3371,15 +3396,15 @@
               </a:spcAft>
             </a:pPr>
             <a:r>
-              <a:rPr sz="1300" b="1">
-                <a:solidFill>
-                  <a:srgbClr val="FFFFFF"/>
+              <a:rPr sz="1300" b="0">
+                <a:solidFill>
+                  <a:srgbClr val="C9D6E3"/>
                 </a:solidFill>
                 <a:latin typeface="微软雅黑"/>
                 <a:ea typeface="微软雅黑"/>
                 <a:cs typeface="微软雅黑"/>
               </a:rPr>
-              <a:t>中钢协流通分会 · 复旦大学住房政策研究中心（房地产研究中心） · 上海市杨浦区科技企业联合会</a:t>
+              <a:t>战略合作（总会对总会）：中国钢铁工业协会</a:t>
             </a:r>
           </a:p>
         </p:txBody>
@@ -3499,7 +3524,7 @@
         <p:spPr>
           <a:xfrm>
             <a:off x="457200" y="109728"/>
-            <a:ext cx="2743200" cy="365760"/>
+            <a:ext cx="5486400" cy="365760"/>
           </a:xfrm>
           <a:prstGeom prst="rect">
             <a:avLst/>
@@ -3529,7 +3554,7 @@
                 <a:ea typeface="微软雅黑"/>
                 <a:cs typeface="微软雅黑"/>
               </a:rPr>
-              <a:t>红线</a:t>
+              <a:t>对价方案</a:t>
             </a:r>
           </a:p>
         </p:txBody>
@@ -3573,7 +3598,7 @@
                 <a:ea typeface="微软雅黑"/>
                 <a:cs typeface="微软雅黑"/>
               </a:rPr>
-              <a:t>盈利底线与分配原则</a:t>
+              <a:t>合作模式与商业对价方案（三选一或组合）</a:t>
             </a:r>
           </a:p>
           <a:p>
@@ -3594,7 +3619,7 @@
                 <a:ea typeface="微软雅黑"/>
                 <a:cs typeface="微软雅黑"/>
               </a:rPr>
-              <a:t>我方无会员制收入，不以亏损为合作前提；分配向我方投入倾斜</a:t>
+              <a:t>明确：仅直接运营成本独立核算，平台赋能层面必须有对价回流</a:t>
             </a:r>
           </a:p>
         </p:txBody>
@@ -3608,7 +3633,7 @@
         <p:spPr>
           <a:xfrm>
             <a:off x="457200" y="1371600"/>
-            <a:ext cx="11247120" cy="1234440"/>
+            <a:ext cx="3657600" cy="4572000"/>
           </a:xfrm>
           <a:prstGeom prst="rect">
             <a:avLst/>
@@ -3654,13 +3679,13 @@
         <p:spPr>
           <a:xfrm>
             <a:off x="457200" y="1371600"/>
-            <a:ext cx="128016" cy="1234440"/>
+            <a:ext cx="3657600" cy="960120"/>
           </a:xfrm>
           <a:prstGeom prst="rect">
             <a:avLst/>
           </a:prstGeom>
           <a:solidFill>
-            <a:srgbClr val="E88A1A"/>
+            <a:srgbClr val="2E6DA4"/>
           </a:solidFill>
           <a:ln>
             <a:noFill/>
@@ -3697,8 +3722,8 @@
         </p:nvSpPr>
         <p:spPr>
           <a:xfrm>
-            <a:off x="731520" y="1481328"/>
-            <a:ext cx="10789920" cy="1051560"/>
+            <a:off x="585216" y="1463040"/>
+            <a:ext cx="3401568" cy="868680"/>
           </a:xfrm>
           <a:prstGeom prst="rect">
             <a:avLst/>
@@ -3710,27 +3735,6 @@
             <a:spAutoFit/>
           </a:bodyPr>
           <a:lstStyle/>
-          <a:p>
-            <a:pPr algn="l">
-              <a:lnSpc>
-                <a:spcPct val="108000"/>
-              </a:lnSpc>
-              <a:spcAft>
-                <a:spcPts val="500"/>
-              </a:spcAft>
-            </a:pPr>
-            <a:r>
-              <a:rPr sz="1500" b="1">
-                <a:solidFill>
-                  <a:srgbClr val="142B45"/>
-                </a:solidFill>
-                <a:latin typeface="微软雅黑"/>
-                <a:ea typeface="微软雅黑"/>
-                <a:cs typeface="微软雅黑"/>
-              </a:rPr>
-              <a:t>底线：不以亏损为合作前提</a:t>
-            </a:r>
-          </a:p>
           <a:p>
             <a:pPr algn="l">
               <a:lnSpc>
@@ -3741,29 +3745,136 @@
               </a:spcAft>
             </a:pPr>
             <a:r>
-              <a:rPr sz="1250" b="0">
-                <a:solidFill>
-                  <a:srgbClr val="222A33"/>
+              <a:rPr sz="1250" b="1">
+                <a:solidFill>
+                  <a:srgbClr val="FFFFFF"/>
                 </a:solidFill>
                 <a:latin typeface="微软雅黑"/>
                 <a:ea typeface="微软雅黑"/>
                 <a:cs typeface="微软雅黑"/>
               </a:rPr>
-              <a:t>对方为会员制、有会费现金流；我方无会员制收入。组织成本（考察用车、工作餐、会务、专家、场地）须有明确分担或覆盖机制，我方不以亏损为合作前提。</a:t>
-            </a:r>
-          </a:p>
-        </p:txBody>
-      </p:sp>
-      <p:sp>
-        <p:nvSpPr>
-          <p:cNvPr id="9" name="Rectangle 8"/>
+              <a:t>方案 A · 品牌授权与平台赋能费（一次性买断制）</a:t>
+            </a:r>
+          </a:p>
+        </p:txBody>
+      </p:sp>
+      <p:sp>
+        <p:nvSpPr>
+          <p:cNvPr id="9" name="TextBox 8"/>
+          <p:cNvSpPr txBox="1"/>
+          <p:nvPr/>
+        </p:nvSpPr>
+        <p:spPr>
+          <a:xfrm>
+            <a:off x="603504" y="2468880"/>
+            <a:ext cx="3364992" cy="3337560"/>
+          </a:xfrm>
+          <a:prstGeom prst="rect">
+            <a:avLst/>
+          </a:prstGeom>
+          <a:noFill/>
+        </p:spPr>
+        <p:txBody>
+          <a:bodyPr wrap="square" anchor="t" lIns="50800" rIns="50800" tIns="25400" bIns="25400">
+            <a:spAutoFit/>
+          </a:bodyPr>
+          <a:lstStyle/>
+          <a:p>
+            <a:pPr algn="l">
+              <a:lnSpc>
+                <a:spcPct val="108000"/>
+              </a:lnSpc>
+              <a:spcAft>
+                <a:spcPts val="800"/>
+              </a:spcAft>
+            </a:pPr>
+            <a:r>
+              <a:rPr sz="1100" b="1">
+                <a:solidFill>
+                  <a:srgbClr val="5A636E"/>
+                </a:solidFill>
+                <a:latin typeface="微软雅黑"/>
+                <a:ea typeface="微软雅黑"/>
+                <a:cs typeface="微软雅黑"/>
+              </a:rPr>
+              <a:t>适用：对方希望完全主导后续转化、独享长尾收益</a:t>
+            </a:r>
+          </a:p>
+          <a:p>
+            <a:pPr algn="l">
+              <a:lnSpc>
+                <a:spcPct val="108000"/>
+              </a:lnSpc>
+              <a:spcAft>
+                <a:spcPts val="800"/>
+              </a:spcAft>
+            </a:pPr>
+            <a:r>
+              <a:rPr sz="1100" b="0">
+                <a:solidFill>
+                  <a:srgbClr val="222A33"/>
+                </a:solidFill>
+                <a:latin typeface="微软雅黑"/>
+                <a:ea typeface="微软雅黑"/>
+                <a:cs typeface="微软雅黑"/>
+              </a:rPr>
+              <a:t>• 单场品牌与资源服务费 3万–8万；或打包两天半 6万–15万（六位数级）</a:t>
+            </a:r>
+          </a:p>
+          <a:p>
+            <a:pPr algn="l">
+              <a:lnSpc>
+                <a:spcPct val="108000"/>
+              </a:lnSpc>
+              <a:spcAft>
+                <a:spcPts val="800"/>
+              </a:spcAft>
+            </a:pPr>
+            <a:r>
+              <a:rPr sz="1100" b="0">
+                <a:solidFill>
+                  <a:srgbClr val="222A33"/>
+                </a:solidFill>
+                <a:latin typeface="微软雅黑"/>
+                <a:ea typeface="微软雅黑"/>
+                <a:cs typeface="微软雅黑"/>
+              </a:rPr>
+              <a:t>• 含品牌在宣传物料 / 发文 / 现场呈现中的排他性使用权</a:t>
+            </a:r>
+          </a:p>
+          <a:p>
+            <a:pPr algn="l">
+              <a:lnSpc>
+                <a:spcPct val="108000"/>
+              </a:lnSpc>
+              <a:spcAft>
+                <a:spcPts val="800"/>
+              </a:spcAft>
+            </a:pPr>
+            <a:r>
+              <a:rPr sz="1100" b="0">
+                <a:solidFill>
+                  <a:srgbClr val="222A33"/>
+                </a:solidFill>
+                <a:latin typeface="微软雅黑"/>
+                <a:ea typeface="微软雅黑"/>
+                <a:cs typeface="微软雅黑"/>
+              </a:rPr>
+              <a:t>• 含核心嘉宾及精准企业群体的邀约成本</a:t>
+            </a:r>
+          </a:p>
+        </p:txBody>
+      </p:sp>
+      <p:sp>
+        <p:nvSpPr>
+          <p:cNvPr id="10" name="Rectangle 9"/>
           <p:cNvSpPr/>
           <p:nvPr/>
         </p:nvSpPr>
         <p:spPr>
           <a:xfrm>
-            <a:off x="457200" y="2788920"/>
-            <a:ext cx="11247120" cy="1234440"/>
+            <a:off x="4251960" y="1371600"/>
+            <a:ext cx="3657600" cy="4572000"/>
           </a:xfrm>
           <a:prstGeom prst="rect">
             <a:avLst/>
@@ -3802,14 +3913,14 @@
       </p:sp>
       <p:sp>
         <p:nvSpPr>
-          <p:cNvPr id="10" name="Rectangle 9"/>
+          <p:cNvPr id="11" name="Rectangle 10"/>
           <p:cNvSpPr/>
           <p:nvPr/>
         </p:nvSpPr>
         <p:spPr>
           <a:xfrm>
-            <a:off x="457200" y="2788920"/>
-            <a:ext cx="128016" cy="1234440"/>
+            <a:off x="4251960" y="1371600"/>
+            <a:ext cx="3657600" cy="960120"/>
           </a:xfrm>
           <a:prstGeom prst="rect">
             <a:avLst/>
@@ -3846,14 +3957,14 @@
       </p:sp>
       <p:sp>
         <p:nvSpPr>
-          <p:cNvPr id="11" name="TextBox 10"/>
+          <p:cNvPr id="12" name="TextBox 11"/>
           <p:cNvSpPr txBox="1"/>
           <p:nvPr/>
         </p:nvSpPr>
         <p:spPr>
           <a:xfrm>
-            <a:off x="731520" y="2898648"/>
-            <a:ext cx="10789920" cy="1051560"/>
+            <a:off x="4379976" y="1463040"/>
+            <a:ext cx="3401568" cy="868680"/>
           </a:xfrm>
           <a:prstGeom prst="rect">
             <a:avLst/>
@@ -3865,27 +3976,6 @@
             <a:spAutoFit/>
           </a:bodyPr>
           <a:lstStyle/>
-          <a:p>
-            <a:pPr algn="l">
-              <a:lnSpc>
-                <a:spcPct val="108000"/>
-              </a:lnSpc>
-              <a:spcAft>
-                <a:spcPts val="500"/>
-              </a:spcAft>
-            </a:pPr>
-            <a:r>
-              <a:rPr sz="1500" b="1">
-                <a:solidFill>
-                  <a:srgbClr val="142B45"/>
-                </a:solidFill>
-                <a:latin typeface="微软雅黑"/>
-                <a:ea typeface="微软雅黑"/>
-                <a:cs typeface="微软雅黑"/>
-              </a:rPr>
-              <a:t>倾斜：向我方投入适当倾斜</a:t>
-            </a:r>
-          </a:p>
           <a:p>
             <a:pPr algn="l">
               <a:lnSpc>
@@ -3896,29 +3986,136 @@
               </a:spcAft>
             </a:pPr>
             <a:r>
-              <a:rPr sz="1250" b="0">
-                <a:solidFill>
-                  <a:srgbClr val="222A33"/>
+              <a:rPr sz="1250" b="1">
+                <a:solidFill>
+                  <a:srgbClr val="FFFFFF"/>
                 </a:solidFill>
                 <a:latin typeface="微软雅黑"/>
                 <a:ea typeface="微软雅黑"/>
                 <a:cs typeface="微软雅黑"/>
               </a:rPr>
-              <a:t>未来盈利分配应充分考虑我方投入的人力、财力与专业资源（复旦品牌、专业方案、政府与园区资源），在利润分配上向我方适当倾斜。</a:t>
-            </a:r>
-          </a:p>
-        </p:txBody>
-      </p:sp>
-      <p:sp>
-        <p:nvSpPr>
-          <p:cNvPr id="12" name="Rectangle 11"/>
+              <a:t>方案 B · 增量收益与会员转化分成（深度绑定保底制）</a:t>
+            </a:r>
+          </a:p>
+        </p:txBody>
+      </p:sp>
+      <p:sp>
+        <p:nvSpPr>
+          <p:cNvPr id="13" name="TextBox 12"/>
+          <p:cNvSpPr txBox="1"/>
+          <p:nvPr/>
+        </p:nvSpPr>
+        <p:spPr>
+          <a:xfrm>
+            <a:off x="4398264" y="2468880"/>
+            <a:ext cx="3364992" cy="3337560"/>
+          </a:xfrm>
+          <a:prstGeom prst="rect">
+            <a:avLst/>
+          </a:prstGeom>
+          <a:noFill/>
+        </p:spPr>
+        <p:txBody>
+          <a:bodyPr wrap="square" anchor="t" lIns="50800" rIns="50800" tIns="25400" bIns="25400">
+            <a:spAutoFit/>
+          </a:bodyPr>
+          <a:lstStyle/>
+          <a:p>
+            <a:pPr algn="l">
+              <a:lnSpc>
+                <a:spcPct val="108000"/>
+              </a:lnSpc>
+              <a:spcAft>
+                <a:spcPts val="800"/>
+              </a:spcAft>
+            </a:pPr>
+            <a:r>
+              <a:rPr sz="1100" b="1">
+                <a:solidFill>
+                  <a:srgbClr val="5A636E"/>
+                </a:solidFill>
+                <a:latin typeface="微软雅黑"/>
+                <a:ea typeface="微软雅黑"/>
+                <a:cs typeface="微软雅黑"/>
+              </a:rPr>
+              <a:t>适用：对方预算有限、愿共担风险共享增量</a:t>
+            </a:r>
+          </a:p>
+          <a:p>
+            <a:pPr algn="l">
+              <a:lnSpc>
+                <a:spcPct val="108000"/>
+              </a:lnSpc>
+              <a:spcAft>
+                <a:spcPts val="800"/>
+              </a:spcAft>
+            </a:pPr>
+            <a:r>
+              <a:rPr sz="1100" b="0">
+                <a:solidFill>
+                  <a:srgbClr val="222A33"/>
+                </a:solidFill>
+                <a:latin typeface="微软雅黑"/>
+                <a:ea typeface="微软雅黑"/>
+                <a:cs typeface="微软雅黑"/>
+              </a:rPr>
+              <a:t>• 前端收益分享：以联合主办名义收取的外部赞助费、席位费，我方抽取 30%–40% 渠道分成</a:t>
+            </a:r>
+          </a:p>
+          <a:p>
+            <a:pPr algn="l">
+              <a:lnSpc>
+                <a:spcPct val="108000"/>
+              </a:lnSpc>
+              <a:spcAft>
+                <a:spcPts val="800"/>
+              </a:spcAft>
+            </a:pPr>
+            <a:r>
+              <a:rPr sz="1100" b="0">
+                <a:solidFill>
+                  <a:srgbClr val="222A33"/>
+                </a:solidFill>
+                <a:latin typeface="微软雅黑"/>
+                <a:ea typeface="微软雅黑"/>
+                <a:cs typeface="微软雅黑"/>
+              </a:rPr>
+              <a:t>• 人头费：500–1500 元 / 人（可与前端分成叠加）</a:t>
+            </a:r>
+          </a:p>
+          <a:p>
+            <a:pPr algn="l">
+              <a:lnSpc>
+                <a:spcPct val="108000"/>
+              </a:lnSpc>
+              <a:spcAft>
+                <a:spcPts val="800"/>
+              </a:spcAft>
+            </a:pPr>
+            <a:r>
+              <a:rPr sz="1100" b="0">
+                <a:solidFill>
+                  <a:srgbClr val="222A33"/>
+                </a:solidFill>
+                <a:latin typeface="微软雅黑"/>
+                <a:ea typeface="微软雅黑"/>
+                <a:cs typeface="微软雅黑"/>
+              </a:rPr>
+              <a:t>• 后端资产保护（重点）：经本次游学首次接触并最终转化入会 / 购买其付费咨询·服务的企业，其首年会员费 / 服务费我方享 30%–50% 分佣</a:t>
+            </a:r>
+          </a:p>
+        </p:txBody>
+      </p:sp>
+      <p:sp>
+        <p:nvSpPr>
+          <p:cNvPr id="14" name="Rectangle 13"/>
           <p:cNvSpPr/>
           <p:nvPr/>
         </p:nvSpPr>
         <p:spPr>
           <a:xfrm>
-            <a:off x="457200" y="4206240"/>
-            <a:ext cx="11247120" cy="1234440"/>
+            <a:off x="8046720" y="1371600"/>
+            <a:ext cx="3657600" cy="4572000"/>
           </a:xfrm>
           <a:prstGeom prst="rect">
             <a:avLst/>
@@ -3957,20 +4154,20 @@
       </p:sp>
       <p:sp>
         <p:nvSpPr>
-          <p:cNvPr id="13" name="Rectangle 12"/>
+          <p:cNvPr id="15" name="Rectangle 14"/>
           <p:cNvSpPr/>
           <p:nvPr/>
         </p:nvSpPr>
         <p:spPr>
           <a:xfrm>
-            <a:off x="457200" y="4206240"/>
-            <a:ext cx="128016" cy="1234440"/>
+            <a:off x="8046720" y="1371600"/>
+            <a:ext cx="3657600" cy="960120"/>
           </a:xfrm>
           <a:prstGeom prst="rect">
             <a:avLst/>
           </a:prstGeom>
           <a:solidFill>
-            <a:srgbClr val="E88A1A"/>
+            <a:srgbClr val="2E7D53"/>
           </a:solidFill>
           <a:ln>
             <a:noFill/>
@@ -4001,14 +4198,14 @@
       </p:sp>
       <p:sp>
         <p:nvSpPr>
-          <p:cNvPr id="14" name="TextBox 13"/>
+          <p:cNvPr id="16" name="TextBox 15"/>
           <p:cNvSpPr txBox="1"/>
           <p:nvPr/>
         </p:nvSpPr>
         <p:spPr>
           <a:xfrm>
-            <a:off x="731520" y="4315968"/>
-            <a:ext cx="10789920" cy="1051560"/>
+            <a:off x="8174736" y="1463040"/>
+            <a:ext cx="3401568" cy="868680"/>
           </a:xfrm>
           <a:prstGeom prst="rect">
             <a:avLst/>
@@ -4020,27 +4217,6 @@
             <a:spAutoFit/>
           </a:bodyPr>
           <a:lstStyle/>
-          <a:p>
-            <a:pPr algn="l">
-              <a:lnSpc>
-                <a:spcPct val="108000"/>
-              </a:lnSpc>
-              <a:spcAft>
-                <a:spcPts val="500"/>
-              </a:spcAft>
-            </a:pPr>
-            <a:r>
-              <a:rPr sz="1500" b="1">
-                <a:solidFill>
-                  <a:srgbClr val="142B45"/>
-                </a:solidFill>
-                <a:latin typeface="微软雅黑"/>
-                <a:ea typeface="微软雅黑"/>
-                <a:cs typeface="微软雅黑"/>
-              </a:rPr>
-              <a:t>建议分配（可协商）</a:t>
-            </a:r>
-          </a:p>
           <a:p>
             <a:pPr algn="l">
               <a:lnSpc>
@@ -4051,22 +4227,108 @@
               </a:spcAft>
             </a:pPr>
             <a:r>
-              <a:rPr sz="1250" b="0">
-                <a:solidFill>
-                  <a:srgbClr val="222A33"/>
+              <a:rPr sz="1250" b="1">
+                <a:solidFill>
+                  <a:srgbClr val="FFFFFF"/>
                 </a:solidFill>
                 <a:latin typeface="微软雅黑"/>
                 <a:ea typeface="微软雅黑"/>
                 <a:cs typeface="微软雅黑"/>
               </a:rPr>
-              <a:t>撮合 / 项目收益：主办方（复旦 + 杨浦）主导，中钢协取渠道分成；各自向自有客户的报名费归各自所有。需求入口、撮合规则与收费权不外放。</a:t>
-            </a:r>
-          </a:p>
-        </p:txBody>
-      </p:sp>
-      <p:sp>
-        <p:nvSpPr>
-          <p:cNvPr id="15" name="TextBox 14"/>
+              <a:t>方案 C · 产业撮合 FA（居间）模式（长期利益制）</a:t>
+            </a:r>
+          </a:p>
+        </p:txBody>
+      </p:sp>
+      <p:sp>
+        <p:nvSpPr>
+          <p:cNvPr id="17" name="TextBox 16"/>
+          <p:cNvSpPr txBox="1"/>
+          <p:nvPr/>
+        </p:nvSpPr>
+        <p:spPr>
+          <a:xfrm>
+            <a:off x="8193024" y="2468880"/>
+            <a:ext cx="3364992" cy="3337560"/>
+          </a:xfrm>
+          <a:prstGeom prst="rect">
+            <a:avLst/>
+          </a:prstGeom>
+          <a:noFill/>
+        </p:spPr>
+        <p:txBody>
+          <a:bodyPr wrap="square" anchor="t" lIns="50800" rIns="50800" tIns="25400" bIns="25400">
+            <a:spAutoFit/>
+          </a:bodyPr>
+          <a:lstStyle/>
+          <a:p>
+            <a:pPr algn="l">
+              <a:lnSpc>
+                <a:spcPct val="108000"/>
+              </a:lnSpc>
+              <a:spcAft>
+                <a:spcPts val="800"/>
+              </a:spcAft>
+            </a:pPr>
+            <a:r>
+              <a:rPr sz="1100" b="1">
+                <a:solidFill>
+                  <a:srgbClr val="5A636E"/>
+                </a:solidFill>
+                <a:latin typeface="微软雅黑"/>
+                <a:ea typeface="微软雅黑"/>
+                <a:cs typeface="微软雅黑"/>
+              </a:rPr>
+              <a:t>适用：活动直接指向大宗采购或深度供应链合作</a:t>
+            </a:r>
+          </a:p>
+          <a:p>
+            <a:pPr algn="l">
+              <a:lnSpc>
+                <a:spcPct val="108000"/>
+              </a:lnSpc>
+              <a:spcAft>
+                <a:spcPts val="800"/>
+              </a:spcAft>
+            </a:pPr>
+            <a:r>
+              <a:rPr sz="1100" b="0">
+                <a:solidFill>
+                  <a:srgbClr val="222A33"/>
+                </a:solidFill>
+                <a:latin typeface="微软雅黑"/>
+                <a:ea typeface="微软雅黑"/>
+                <a:cs typeface="微软雅黑"/>
+              </a:rPr>
+              <a:t>• 游学期间品牌及人力按成本价核算或予以免除，但须提前签署《资源对接与居间服务框架协议》</a:t>
+            </a:r>
+          </a:p>
+          <a:p>
+            <a:pPr algn="l">
+              <a:lnSpc>
+                <a:spcPct val="108000"/>
+              </a:lnSpc>
+              <a:spcAft>
+                <a:spcPts val="800"/>
+              </a:spcAft>
+            </a:pPr>
+            <a:r>
+              <a:rPr sz="1100" b="0">
+                <a:solidFill>
+                  <a:srgbClr val="222A33"/>
+                </a:solidFill>
+                <a:latin typeface="微软雅黑"/>
+                <a:ea typeface="微软雅黑"/>
+                <a:cs typeface="微软雅黑"/>
+              </a:rPr>
+              <a:t>• 本次活动及活动后一年内，由我方首配撮合达成的实质性采购订单 / 战略投资 / 技术合作，按行业标准提取居间佣金（建议成交额 1%–3%）</a:t>
+            </a:r>
+          </a:p>
+        </p:txBody>
+      </p:sp>
+      <p:sp>
+        <p:nvSpPr>
+          <p:cNvPr id="18" name="TextBox 17"/>
           <p:cNvSpPr txBox="1"/>
           <p:nvPr/>
         </p:nvSpPr>
@@ -4103,14 +4365,14 @@
                 <a:ea typeface="微软雅黑"/>
                 <a:cs typeface="微软雅黑"/>
               </a:rPr>
-              <a:t>钢铁 × 地产 × 产业园区 · 跨产业撮合与游学转化平台</a:t>
-            </a:r>
-          </a:p>
-        </p:txBody>
-      </p:sp>
-      <p:sp>
-        <p:nvSpPr>
-          <p:cNvPr id="16" name="TextBox 15"/>
+              <a:t>钢铁 × 不动产 × 产业园区 · 跨产业撮合与游学转化平台</a:t>
+            </a:r>
+          </a:p>
+        </p:txBody>
+      </p:sp>
+      <p:sp>
+        <p:nvSpPr>
+          <p:cNvPr id="19" name="TextBox 18"/>
           <p:cNvSpPr txBox="1"/>
           <p:nvPr/>
         </p:nvSpPr>
@@ -4267,7 +4529,7 @@
         <p:spPr>
           <a:xfrm>
             <a:off x="457200" y="109728"/>
-            <a:ext cx="2743200" cy="365760"/>
+            <a:ext cx="5486400" cy="365760"/>
           </a:xfrm>
           <a:prstGeom prst="rect">
             <a:avLst/>
@@ -4297,7 +4559,7 @@
                 <a:ea typeface="微软雅黑"/>
                 <a:cs typeface="微软雅黑"/>
               </a:rPr>
-              <a:t>变现与目标</a:t>
+              <a:t>分成落位</a:t>
             </a:r>
           </a:p>
         </p:txBody>
@@ -4341,32 +4603,9 @@
                 <a:ea typeface="微软雅黑"/>
                 <a:cs typeface="微软雅黑"/>
               </a:rPr>
-              <a:t>收费结构（初期让利） 与 目标里程碑</a:t>
-            </a:r>
-          </a:p>
-        </p:txBody>
-      </p:sp>
-      <p:sp>
-        <p:nvSpPr>
-          <p:cNvPr id="6" name="TextBox 5"/>
-          <p:cNvSpPr txBox="1"/>
-          <p:nvPr/>
-        </p:nvSpPr>
-        <p:spPr>
-          <a:xfrm>
-            <a:off x="457200" y="1280160"/>
-            <a:ext cx="5486400" cy="365760"/>
-          </a:xfrm>
-          <a:prstGeom prst="rect">
-            <a:avLst/>
-          </a:prstGeom>
-          <a:noFill/>
-        </p:spPr>
-        <p:txBody>
-          <a:bodyPr wrap="square" anchor="t" lIns="50800" rIns="50800" tIns="25400" bIns="25400">
-            <a:spAutoFit/>
-          </a:bodyPr>
-          <a:lstStyle/>
+              <a:t>分成落位（明确 · 可执行 · 可追溯）</a:t>
+            </a:r>
+          </a:p>
           <a:p>
             <a:pPr algn="l">
               <a:lnSpc>
@@ -4377,30 +4616,30 @@
               </a:spcAft>
             </a:pPr>
             <a:r>
-              <a:rPr sz="1400" b="1">
-                <a:solidFill>
-                  <a:srgbClr val="142B45"/>
+              <a:rPr sz="1300" b="0">
+                <a:solidFill>
+                  <a:srgbClr val="C9D6E3"/>
                 </a:solidFill>
                 <a:latin typeface="微软雅黑"/>
                 <a:ea typeface="微软雅黑"/>
                 <a:cs typeface="微软雅黑"/>
               </a:rPr>
-              <a:t>收费结构（承接原报价逻辑）</a:t>
+              <a:t>改前期模糊：每类收益都有计费方式、比例与结算凭证</a:t>
             </a:r>
           </a:p>
         </p:txBody>
       </p:sp>
       <p:graphicFrame>
         <p:nvGraphicFramePr>
-          <p:cNvPr id="7" name="Table 6"/>
+          <p:cNvPr id="6" name="Table 5"/>
           <p:cNvGraphicFramePr>
             <a:graphicFrameLocks noGrp="1"/>
           </p:cNvGraphicFramePr>
           <p:nvPr/>
         </p:nvGraphicFramePr>
         <p:xfrm>
-          <a:off x="457200" y="1737360"/>
-          <a:ext cx="5577840" cy="2286000"/>
+          <a:off x="457200" y="1371600"/>
+          <a:ext cx="11247120" cy="3840480"/>
         </p:xfrm>
         <a:graphic>
           <a:graphicData uri="http://schemas.openxmlformats.org/drawingml/2006/table">
@@ -4409,17 +4648,19 @@
                 <a:tableStyleId>{5C22544A-7EE6-4342-B048-85BDC9FD1C3A}</a:tableStyleId>
               </a:tblPr>
               <a:tblGrid>
-                <a:gridCol w="1920240"/>
-                <a:gridCol w="3657600"/>
+                <a:gridCol w="2468880"/>
+                <a:gridCol w="2103120"/>
+                <a:gridCol w="3566160"/>
+                <a:gridCol w="3108960"/>
               </a:tblGrid>
-              <a:tr h="457200">
+              <a:tr h="640080">
                 <a:tc>
                   <a:txBody>
                     <a:bodyPr/>
                     <a:lstStyle/>
                     <a:p>
                       <a:r>
-                        <a:rPr sz="1100" b="1">
+                        <a:rPr sz="1200" b="1">
                           <a:solidFill>
                             <a:srgbClr val="FFFFFF"/>
                           </a:solidFill>
@@ -4427,7 +4668,7 @@
                           <a:ea typeface="微软雅黑"/>
                           <a:cs typeface="微软雅黑"/>
                         </a:rPr>
-                        <a:t>项目</a:t>
+                        <a:t>收益类型</a:t>
                       </a:r>
                     </a:p>
                   </a:txBody>
@@ -4443,7 +4684,7 @@
                     <a:lstStyle/>
                     <a:p>
                       <a:r>
-                        <a:rPr sz="1100" b="1">
+                        <a:rPr sz="1200" b="1">
                           <a:solidFill>
                             <a:srgbClr val="FFFFFF"/>
                           </a:solidFill>
@@ -4451,7 +4692,55 @@
                           <a:ea typeface="微软雅黑"/>
                           <a:cs typeface="微软雅黑"/>
                         </a:rPr>
-                        <a:t>说明</a:t>
+                        <a:t>计费方式</a:t>
+                      </a:r>
+                    </a:p>
+                  </a:txBody>
+                  <a:tcPr anchor="ctr">
+                    <a:solidFill>
+                      <a:srgbClr val="142B45"/>
+                    </a:solidFill>
+                  </a:tcPr>
+                </a:tc>
+                <a:tc>
+                  <a:txBody>
+                    <a:bodyPr/>
+                    <a:lstStyle/>
+                    <a:p>
+                      <a:r>
+                        <a:rPr sz="1200" b="1">
+                          <a:solidFill>
+                            <a:srgbClr val="FFFFFF"/>
+                          </a:solidFill>
+                          <a:latin typeface="微软雅黑"/>
+                          <a:ea typeface="微软雅黑"/>
+                          <a:cs typeface="微软雅黑"/>
+                        </a:rPr>
+                        <a:t>我方对价 / 分成</a:t>
+                      </a:r>
+                    </a:p>
+                  </a:txBody>
+                  <a:tcPr anchor="ctr">
+                    <a:solidFill>
+                      <a:srgbClr val="142B45"/>
+                    </a:solidFill>
+                  </a:tcPr>
+                </a:tc>
+                <a:tc>
+                  <a:txBody>
+                    <a:bodyPr/>
+                    <a:lstStyle/>
+                    <a:p>
+                      <a:r>
+                        <a:rPr sz="1200" b="1">
+                          <a:solidFill>
+                            <a:srgbClr val="FFFFFF"/>
+                          </a:solidFill>
+                          <a:latin typeface="微软雅黑"/>
+                          <a:ea typeface="微软雅黑"/>
+                          <a:cs typeface="微软雅黑"/>
+                        </a:rPr>
+                        <a:t>结算与凭证</a:t>
                       </a:r>
                     </a:p>
                   </a:txBody>
@@ -4462,22 +4751,22 @@
                   </a:tcPr>
                 </a:tc>
               </a:tr>
-              <a:tr h="457200">
+              <a:tr h="640080">
                 <a:tc>
                   <a:txBody>
                     <a:bodyPr/>
                     <a:lstStyle/>
                     <a:p>
                       <a:r>
-                        <a:rPr sz="1000" b="1">
+                        <a:rPr sz="1100" b="1">
                           <a:solidFill>
-                            <a:srgbClr val="2E6DA4"/>
+                            <a:srgbClr val="142B45"/>
                           </a:solidFill>
                           <a:latin typeface="微软雅黑"/>
                           <a:ea typeface="微软雅黑"/>
                           <a:cs typeface="微软雅黑"/>
                         </a:rPr>
-                        <a:t>基础游学套餐</a:t>
+                        <a:t>品牌与资源服务费</a:t>
                       </a:r>
                     </a:p>
                   </a:txBody>
@@ -4493,7 +4782,7 @@
                     <a:lstStyle/>
                     <a:p>
                       <a:r>
-                        <a:rPr sz="1000" b="0">
+                        <a:rPr sz="1100" b="0">
                           <a:solidFill>
                             <a:srgbClr val="222A33"/>
                           </a:solidFill>
@@ -4501,7 +4790,55 @@
                           <a:ea typeface="微软雅黑"/>
                           <a:cs typeface="微软雅黑"/>
                         </a:rPr>
-                        <a:t>阶段一成本价 / 减免；阶段二 9,800–16,800 元/人（分层报名，筛选机制）</a:t>
+                        <a:t>单场 / 打包固定</a:t>
+                      </a:r>
+                    </a:p>
+                  </a:txBody>
+                  <a:tcPr anchor="ctr">
+                    <a:solidFill>
+                      <a:srgbClr val="FFFFFF"/>
+                    </a:solidFill>
+                  </a:tcPr>
+                </a:tc>
+                <a:tc>
+                  <a:txBody>
+                    <a:bodyPr/>
+                    <a:lstStyle/>
+                    <a:p>
+                      <a:r>
+                        <a:rPr sz="1100" b="1">
+                          <a:solidFill>
+                            <a:srgbClr val="E88A1A"/>
+                          </a:solidFill>
+                          <a:latin typeface="微软雅黑"/>
+                          <a:ea typeface="微软雅黑"/>
+                          <a:cs typeface="微软雅黑"/>
+                        </a:rPr>
+                        <a:t>3–8万 / 场；6–15万 / 打包（预付）</a:t>
+                      </a:r>
+                    </a:p>
+                  </a:txBody>
+                  <a:tcPr anchor="ctr">
+                    <a:solidFill>
+                      <a:srgbClr val="FFFFFF"/>
+                    </a:solidFill>
+                  </a:tcPr>
+                </a:tc>
+                <a:tc>
+                  <a:txBody>
+                    <a:bodyPr/>
+                    <a:lstStyle/>
+                    <a:p>
+                      <a:r>
+                        <a:rPr sz="1100" b="0">
+                          <a:solidFill>
+                            <a:srgbClr val="5A636E"/>
+                          </a:solidFill>
+                          <a:latin typeface="微软雅黑"/>
+                          <a:ea typeface="微软雅黑"/>
+                          <a:cs typeface="微软雅黑"/>
+                        </a:rPr>
+                        <a:t>活动前预付，正规主体开票</a:t>
                       </a:r>
                     </a:p>
                   </a:txBody>
@@ -4512,22 +4849,22 @@
                   </a:tcPr>
                 </a:tc>
               </a:tr>
-              <a:tr h="457200">
+              <a:tr h="640080">
                 <a:tc>
                   <a:txBody>
                     <a:bodyPr/>
                     <a:lstStyle/>
                     <a:p>
                       <a:r>
-                        <a:rPr sz="1000" b="1">
+                        <a:rPr sz="1100" b="1">
                           <a:solidFill>
-                            <a:srgbClr val="2E6DA4"/>
+                            <a:srgbClr val="142B45"/>
                           </a:solidFill>
                           <a:latin typeface="微软雅黑"/>
                           <a:ea typeface="微软雅黑"/>
                           <a:cs typeface="微软雅黑"/>
                         </a:rPr>
-                        <a:t>产业撮合服务费</a:t>
+                        <a:t>报名 / 席位 / 赞助费</a:t>
                       </a:r>
                     </a:p>
                   </a:txBody>
@@ -4543,7 +4880,7 @@
                     <a:lstStyle/>
                     <a:p>
                       <a:r>
-                        <a:rPr sz="1000" b="0">
+                        <a:rPr sz="1100" b="0">
                           <a:solidFill>
                             <a:srgbClr val="222A33"/>
                           </a:solidFill>
@@ -4551,7 +4888,55 @@
                           <a:ea typeface="微软雅黑"/>
                           <a:cs typeface="微软雅黑"/>
                         </a:rPr>
-                        <a:t>5 万–30 万 / 项目，或 成交金额的 1%–3%</a:t>
+                        <a:t>前端分成</a:t>
+                      </a:r>
+                    </a:p>
+                  </a:txBody>
+                  <a:tcPr anchor="ctr">
+                    <a:solidFill>
+                      <a:srgbClr val="EEF3F8"/>
+                    </a:solidFill>
+                  </a:tcPr>
+                </a:tc>
+                <a:tc>
+                  <a:txBody>
+                    <a:bodyPr/>
+                    <a:lstStyle/>
+                    <a:p>
+                      <a:r>
+                        <a:rPr sz="1100" b="1">
+                          <a:solidFill>
+                            <a:srgbClr val="E88A1A"/>
+                          </a:solidFill>
+                          <a:latin typeface="微软雅黑"/>
+                          <a:ea typeface="微软雅黑"/>
+                          <a:cs typeface="微软雅黑"/>
+                        </a:rPr>
+                        <a:t>30% – 40%</a:t>
+                      </a:r>
+                    </a:p>
+                  </a:txBody>
+                  <a:tcPr anchor="ctr">
+                    <a:solidFill>
+                      <a:srgbClr val="EEF3F8"/>
+                    </a:solidFill>
+                  </a:tcPr>
+                </a:tc>
+                <a:tc>
+                  <a:txBody>
+                    <a:bodyPr/>
+                    <a:lstStyle/>
+                    <a:p>
+                      <a:r>
+                        <a:rPr sz="1100" b="0">
+                          <a:solidFill>
+                            <a:srgbClr val="5A636E"/>
+                          </a:solidFill>
+                          <a:latin typeface="微软雅黑"/>
+                          <a:ea typeface="微软雅黑"/>
+                          <a:cs typeface="微软雅黑"/>
+                        </a:rPr>
+                        <a:t>按场结算，凭报名与收款流水核对</a:t>
                       </a:r>
                     </a:p>
                   </a:txBody>
@@ -4562,22 +4947,22 @@
                   </a:tcPr>
                 </a:tc>
               </a:tr>
-              <a:tr h="457200">
+              <a:tr h="640080">
                 <a:tc>
                   <a:txBody>
                     <a:bodyPr/>
                     <a:lstStyle/>
                     <a:p>
                       <a:r>
-                        <a:rPr sz="1000" b="1">
+                        <a:rPr sz="1100" b="1">
                           <a:solidFill>
-                            <a:srgbClr val="2E6DA4"/>
+                            <a:srgbClr val="142B45"/>
                           </a:solidFill>
                           <a:latin typeface="微软雅黑"/>
                           <a:ea typeface="微软雅黑"/>
                           <a:cs typeface="微软雅黑"/>
                         </a:rPr>
-                        <a:t>企业年度会员</a:t>
+                        <a:t>参会人头费</a:t>
                       </a:r>
                     </a:p>
                   </a:txBody>
@@ -4593,7 +4978,7 @@
                     <a:lstStyle/>
                     <a:p>
                       <a:r>
-                        <a:rPr sz="1000" b="0">
+                        <a:rPr sz="1100" b="0">
                           <a:solidFill>
                             <a:srgbClr val="222A33"/>
                           </a:solidFill>
@@ -4601,7 +4986,55 @@
                           <a:ea typeface="微软雅黑"/>
                           <a:cs typeface="微软雅黑"/>
                         </a:rPr>
-                        <a:t>10 万 / 30 万 每年（对方会员制为主，我方以项目 / 服务费为核心）</a:t>
+                        <a:t>按实际参会人数</a:t>
+                      </a:r>
+                    </a:p>
+                  </a:txBody>
+                  <a:tcPr anchor="ctr">
+                    <a:solidFill>
+                      <a:srgbClr val="FFFFFF"/>
+                    </a:solidFill>
+                  </a:tcPr>
+                </a:tc>
+                <a:tc>
+                  <a:txBody>
+                    <a:bodyPr/>
+                    <a:lstStyle/>
+                    <a:p>
+                      <a:r>
+                        <a:rPr sz="1100" b="1">
+                          <a:solidFill>
+                            <a:srgbClr val="E88A1A"/>
+                          </a:solidFill>
+                          <a:latin typeface="微软雅黑"/>
+                          <a:ea typeface="微软雅黑"/>
+                          <a:cs typeface="微软雅黑"/>
+                        </a:rPr>
+                        <a:t>500 – 1500 元 / 人</a:t>
+                      </a:r>
+                    </a:p>
+                  </a:txBody>
+                  <a:tcPr anchor="ctr">
+                    <a:solidFill>
+                      <a:srgbClr val="FFFFFF"/>
+                    </a:solidFill>
+                  </a:tcPr>
+                </a:tc>
+                <a:tc>
+                  <a:txBody>
+                    <a:bodyPr/>
+                    <a:lstStyle/>
+                    <a:p>
+                      <a:r>
+                        <a:rPr sz="1100" b="0">
+                          <a:solidFill>
+                            <a:srgbClr val="5A636E"/>
+                          </a:solidFill>
+                          <a:latin typeface="微软雅黑"/>
+                          <a:ea typeface="微软雅黑"/>
+                          <a:cs typeface="微软雅黑"/>
+                        </a:rPr>
+                        <a:t>按场结算</a:t>
                       </a:r>
                     </a:p>
                   </a:txBody>
@@ -4612,22 +5045,22 @@
                   </a:tcPr>
                 </a:tc>
               </a:tr>
-              <a:tr h="457200">
+              <a:tr h="640080">
                 <a:tc>
                   <a:txBody>
                     <a:bodyPr/>
                     <a:lstStyle/>
                     <a:p>
                       <a:r>
-                        <a:rPr sz="1000" b="1">
+                        <a:rPr sz="1100" b="1">
                           <a:solidFill>
-                            <a:srgbClr val="2E6DA4"/>
+                            <a:srgbClr val="142B45"/>
                           </a:solidFill>
                           <a:latin typeface="微软雅黑"/>
                           <a:ea typeface="微软雅黑"/>
                           <a:cs typeface="微软雅黑"/>
                         </a:rPr>
-                        <a:t>高阶专项项目</a:t>
+                        <a:t>会员转化分佣</a:t>
                       </a:r>
                     </a:p>
                   </a:txBody>
@@ -4643,7 +5076,7 @@
                     <a:lstStyle/>
                     <a:p>
                       <a:r>
-                        <a:rPr sz="1000" b="0">
+                        <a:rPr sz="1100" b="0">
                           <a:solidFill>
                             <a:srgbClr val="222A33"/>
                           </a:solidFill>
@@ -4651,7 +5084,55 @@
                           <a:ea typeface="微软雅黑"/>
                           <a:cs typeface="微软雅黑"/>
                         </a:rPr>
-                        <a:t>项目咨询费 + 成交分成（利润放大器）</a:t>
+                        <a:t>后端分成</a:t>
+                      </a:r>
+                    </a:p>
+                  </a:txBody>
+                  <a:tcPr anchor="ctr">
+                    <a:solidFill>
+                      <a:srgbClr val="EEF3F8"/>
+                    </a:solidFill>
+                  </a:tcPr>
+                </a:tc>
+                <a:tc>
+                  <a:txBody>
+                    <a:bodyPr/>
+                    <a:lstStyle/>
+                    <a:p>
+                      <a:r>
+                        <a:rPr sz="1100" b="1">
+                          <a:solidFill>
+                            <a:srgbClr val="E88A1A"/>
+                          </a:solidFill>
+                          <a:latin typeface="微软雅黑"/>
+                          <a:ea typeface="微软雅黑"/>
+                          <a:cs typeface="微软雅黑"/>
+                        </a:rPr>
+                        <a:t>首年会费 / 服务费 30% – 50%</a:t>
+                      </a:r>
+                    </a:p>
+                  </a:txBody>
+                  <a:tcPr anchor="ctr">
+                    <a:solidFill>
+                      <a:srgbClr val="EEF3F8"/>
+                    </a:solidFill>
+                  </a:tcPr>
+                </a:tc>
+                <a:tc>
+                  <a:txBody>
+                    <a:bodyPr/>
+                    <a:lstStyle/>
+                    <a:p>
+                      <a:r>
+                        <a:rPr sz="1100" b="0">
+                          <a:solidFill>
+                            <a:srgbClr val="5A636E"/>
+                          </a:solidFill>
+                          <a:latin typeface="微软雅黑"/>
+                          <a:ea typeface="微软雅黑"/>
+                          <a:cs typeface="微软雅黑"/>
+                        </a:rPr>
+                        <a:t>以名单共管库确认，转化后按季结算</a:t>
                       </a:r>
                     </a:p>
                   </a:txBody>
@@ -4662,20 +5143,118 @@
                   </a:tcPr>
                 </a:tc>
               </a:tr>
+              <a:tr h="640080">
+                <a:tc>
+                  <a:txBody>
+                    <a:bodyPr/>
+                    <a:lstStyle/>
+                    <a:p>
+                      <a:r>
+                        <a:rPr sz="1100" b="1">
+                          <a:solidFill>
+                            <a:srgbClr val="142B45"/>
+                          </a:solidFill>
+                          <a:latin typeface="微软雅黑"/>
+                          <a:ea typeface="微软雅黑"/>
+                          <a:cs typeface="微软雅黑"/>
+                        </a:rPr>
+                        <a:t>产业撮合居间佣金</a:t>
+                      </a:r>
+                    </a:p>
+                  </a:txBody>
+                  <a:tcPr anchor="ctr">
+                    <a:solidFill>
+                      <a:srgbClr val="FFFFFF"/>
+                    </a:solidFill>
+                  </a:tcPr>
+                </a:tc>
+                <a:tc>
+                  <a:txBody>
+                    <a:bodyPr/>
+                    <a:lstStyle/>
+                    <a:p>
+                      <a:r>
+                        <a:rPr sz="1100" b="0">
+                          <a:solidFill>
+                            <a:srgbClr val="222A33"/>
+                          </a:solidFill>
+                          <a:latin typeface="微软雅黑"/>
+                          <a:ea typeface="微软雅黑"/>
+                          <a:cs typeface="微软雅黑"/>
+                        </a:rPr>
+                        <a:t>按成交额比例</a:t>
+                      </a:r>
+                    </a:p>
+                  </a:txBody>
+                  <a:tcPr anchor="ctr">
+                    <a:solidFill>
+                      <a:srgbClr val="FFFFFF"/>
+                    </a:solidFill>
+                  </a:tcPr>
+                </a:tc>
+                <a:tc>
+                  <a:txBody>
+                    <a:bodyPr/>
+                    <a:lstStyle/>
+                    <a:p>
+                      <a:r>
+                        <a:rPr sz="1100" b="1">
+                          <a:solidFill>
+                            <a:srgbClr val="E88A1A"/>
+                          </a:solidFill>
+                          <a:latin typeface="微软雅黑"/>
+                          <a:ea typeface="微软雅黑"/>
+                          <a:cs typeface="微软雅黑"/>
+                        </a:rPr>
+                        <a:t>1% – 3%（活动后 1 年内首配撮合）</a:t>
+                      </a:r>
+                    </a:p>
+                  </a:txBody>
+                  <a:tcPr anchor="ctr">
+                    <a:solidFill>
+                      <a:srgbClr val="FFFFFF"/>
+                    </a:solidFill>
+                  </a:tcPr>
+                </a:tc>
+                <a:tc>
+                  <a:txBody>
+                    <a:bodyPr/>
+                    <a:lstStyle/>
+                    <a:p>
+                      <a:r>
+                        <a:rPr sz="1100" b="0">
+                          <a:solidFill>
+                            <a:srgbClr val="5A636E"/>
+                          </a:solidFill>
+                          <a:latin typeface="微软雅黑"/>
+                          <a:ea typeface="微软雅黑"/>
+                          <a:cs typeface="微软雅黑"/>
+                        </a:rPr>
+                        <a:t>签居间协议，成交后结算</a:t>
+                      </a:r>
+                    </a:p>
+                  </a:txBody>
+                  <a:tcPr anchor="ctr">
+                    <a:solidFill>
+                      <a:srgbClr val="FFFFFF"/>
+                    </a:solidFill>
+                  </a:tcPr>
+                </a:tc>
+              </a:tr>
             </a:tbl>
           </a:graphicData>
         </a:graphic>
       </p:graphicFrame>
       <p:sp>
         <p:nvSpPr>
-          <p:cNvPr id="8" name="TextBox 7"/>
+          <p:cNvPr id="7" name="TextBox 6"/>
           <p:cNvSpPr txBox="1"/>
           <p:nvPr/>
         </p:nvSpPr>
         <p:spPr>
           <a:xfrm>
-            <a:off x="6309360" y="1280160"/>
-            <a:ext cx="5486400" cy="365760"/>
+            <a:off x="457200" y="5394960"/>
+            <a:ext cx="11247120" cy="822960"/>
           </a:xfrm>
           <a:prstGeom prst="rect">
             <a:avLst/>
@@ -4697,119 +5276,29 @@
               </a:spcAft>
             </a:pPr>
             <a:r>
-              <a:rPr sz="1400" b="1">
-                <a:solidFill>
-                  <a:srgbClr val="142B45"/>
+              <a:rPr sz="1150" b="0">
+                <a:solidFill>
+                  <a:srgbClr val="222A33"/>
                 </a:solidFill>
                 <a:latin typeface="微软雅黑"/>
                 <a:ea typeface="微软雅黑"/>
                 <a:cs typeface="微软雅黑"/>
               </a:rPr>
-              <a:t>目标里程碑</a:t>
-            </a:r>
-          </a:p>
-        </p:txBody>
-      </p:sp>
-      <p:sp>
-        <p:nvSpPr>
-          <p:cNvPr id="9" name="Rectangle 8"/>
-          <p:cNvSpPr/>
-          <p:nvPr/>
-        </p:nvSpPr>
-        <p:spPr>
-          <a:xfrm>
-            <a:off x="6309360" y="1783080"/>
-            <a:ext cx="5394960" cy="914400"/>
-          </a:xfrm>
-          <a:prstGeom prst="rect">
-            <a:avLst/>
-          </a:prstGeom>
-          <a:solidFill>
-            <a:srgbClr val="EEF3F8"/>
-          </a:solidFill>
-          <a:ln w="12700">
-            <a:solidFill>
-              <a:srgbClr val="D5DEE8"/>
-            </a:solidFill>
-          </a:ln>
-          <a:effectLst/>
-        </p:spPr>
-        <p:style>
-          <a:lnRef idx="1">
-            <a:schemeClr val="accent1"/>
-          </a:lnRef>
-          <a:fillRef idx="3">
-            <a:schemeClr val="accent1"/>
-          </a:fillRef>
-          <a:effectRef idx="2">
-            <a:schemeClr val="accent1"/>
-          </a:effectRef>
-          <a:fontRef idx="minor">
-            <a:schemeClr val="lt1"/>
-          </a:fontRef>
-        </p:style>
-        <p:txBody>
-          <a:bodyPr rtlCol="0" anchor="ctr"/>
-          <a:lstStyle/>
-          <a:p>
-            <a:pPr algn="ctr"/>
-          </a:p>
-        </p:txBody>
-      </p:sp>
-      <p:sp>
-        <p:nvSpPr>
-          <p:cNvPr id="10" name="Rectangle 9"/>
-          <p:cNvSpPr/>
-          <p:nvPr/>
-        </p:nvSpPr>
-        <p:spPr>
-          <a:xfrm>
-            <a:off x="6309360" y="1783080"/>
-            <a:ext cx="1280160" cy="914400"/>
-          </a:xfrm>
-          <a:prstGeom prst="rect">
-            <a:avLst/>
-          </a:prstGeom>
-          <a:solidFill>
-            <a:srgbClr val="1F4E79"/>
-          </a:solidFill>
-          <a:ln>
-            <a:noFill/>
-          </a:ln>
-          <a:effectLst/>
-        </p:spPr>
-        <p:style>
-          <a:lnRef idx="1">
-            <a:schemeClr val="accent1"/>
-          </a:lnRef>
-          <a:fillRef idx="3">
-            <a:schemeClr val="accent1"/>
-          </a:fillRef>
-          <a:effectRef idx="2">
-            <a:schemeClr val="accent1"/>
-          </a:effectRef>
-          <a:fontRef idx="minor">
-            <a:schemeClr val="lt1"/>
-          </a:fontRef>
-        </p:style>
-        <p:txBody>
-          <a:bodyPr rtlCol="0" anchor="ctr"/>
-          <a:lstStyle/>
-          <a:p>
-            <a:pPr algn="ctr"/>
-          </a:p>
-        </p:txBody>
-      </p:sp>
-      <p:sp>
-        <p:nvSpPr>
-          <p:cNvPr id="11" name="TextBox 10"/>
+              <a:t>说明：会务与接待等直接运营成本可各自独立核算；以上品牌 / 前端 / 后端 / 居间四类对价须约定于《联合主办合作框架与对价清单》，并以名单共管库作为分佣与追溯依据。</a:t>
+            </a:r>
+          </a:p>
+        </p:txBody>
+      </p:sp>
+      <p:sp>
+        <p:nvSpPr>
+          <p:cNvPr id="8" name="TextBox 7"/>
           <p:cNvSpPr txBox="1"/>
           <p:nvPr/>
         </p:nvSpPr>
         <p:spPr>
           <a:xfrm>
-            <a:off x="6355080" y="2039112"/>
-            <a:ext cx="1234440" cy="457200"/>
+            <a:off x="457200" y="6446520"/>
+            <a:ext cx="8229600" cy="320040"/>
           </a:xfrm>
           <a:prstGeom prst="rect">
             <a:avLst/>
@@ -4818,50 +5307,6 @@
         </p:spPr>
         <p:txBody>
           <a:bodyPr wrap="square" anchor="t" lIns="50800" rIns="50800" tIns="25400" bIns="25400">
-            <a:spAutoFit/>
-          </a:bodyPr>
-          <a:lstStyle/>
-          <a:p>
-            <a:pPr algn="ctr">
-              <a:lnSpc>
-                <a:spcPct val="108000"/>
-              </a:lnSpc>
-              <a:spcAft>
-                <a:spcPts val="400"/>
-              </a:spcAft>
-            </a:pPr>
-            <a:r>
-              <a:rPr sz="1300" b="1">
-                <a:solidFill>
-                  <a:srgbClr val="FFFFFF"/>
-                </a:solidFill>
-                <a:latin typeface="微软雅黑"/>
-                <a:ea typeface="微软雅黑"/>
-                <a:cs typeface="微软雅黑"/>
-              </a:rPr>
-              <a:t>8–9 月</a:t>
-            </a:r>
-          </a:p>
-        </p:txBody>
-      </p:sp>
-      <p:sp>
-        <p:nvSpPr>
-          <p:cNvPr id="12" name="TextBox 11"/>
-          <p:cNvSpPr txBox="1"/>
-          <p:nvPr/>
-        </p:nvSpPr>
-        <p:spPr>
-          <a:xfrm>
-            <a:off x="7726679" y="1911096"/>
-            <a:ext cx="3886200" cy="731520"/>
-          </a:xfrm>
-          <a:prstGeom prst="rect">
-            <a:avLst/>
-          </a:prstGeom>
-          <a:noFill/>
-        </p:spPr>
-        <p:txBody>
-          <a:bodyPr wrap="square" anchor="ctr" lIns="50800" rIns="50800" tIns="25400" bIns="25400">
             <a:spAutoFit/>
           </a:bodyPr>
           <a:lstStyle/>
@@ -4875,422 +5320,22 @@
               </a:spcAft>
             </a:pPr>
             <a:r>
-              <a:rPr sz="1150" b="0">
-                <a:solidFill>
-                  <a:srgbClr val="222A33"/>
+              <a:rPr sz="900" b="0">
+                <a:solidFill>
+                  <a:srgbClr val="5A636E"/>
                 </a:solidFill>
                 <a:latin typeface="微软雅黑"/>
                 <a:ea typeface="微软雅黑"/>
                 <a:cs typeface="微软雅黑"/>
               </a:rPr>
-              <a:t>完成前两期共建，沉淀 ≥2 个标杆案例，建立项目池</a:t>
-            </a:r>
-          </a:p>
-        </p:txBody>
-      </p:sp>
-      <p:sp>
-        <p:nvSpPr>
-          <p:cNvPr id="13" name="Rectangle 12"/>
-          <p:cNvSpPr/>
-          <p:nvPr/>
-        </p:nvSpPr>
-        <p:spPr>
-          <a:xfrm>
-            <a:off x="6309360" y="2880360"/>
-            <a:ext cx="5394960" cy="914400"/>
-          </a:xfrm>
-          <a:prstGeom prst="rect">
-            <a:avLst/>
-          </a:prstGeom>
-          <a:solidFill>
-            <a:srgbClr val="EEF3F8"/>
-          </a:solidFill>
-          <a:ln w="12700">
-            <a:solidFill>
-              <a:srgbClr val="D5DEE8"/>
-            </a:solidFill>
-          </a:ln>
-          <a:effectLst/>
-        </p:spPr>
-        <p:style>
-          <a:lnRef idx="1">
-            <a:schemeClr val="accent1"/>
-          </a:lnRef>
-          <a:fillRef idx="3">
-            <a:schemeClr val="accent1"/>
-          </a:fillRef>
-          <a:effectRef idx="2">
-            <a:schemeClr val="accent1"/>
-          </a:effectRef>
-          <a:fontRef idx="minor">
-            <a:schemeClr val="lt1"/>
-          </a:fontRef>
-        </p:style>
-        <p:txBody>
-          <a:bodyPr rtlCol="0" anchor="ctr"/>
-          <a:lstStyle/>
-          <a:p>
-            <a:pPr algn="ctr"/>
-          </a:p>
-        </p:txBody>
-      </p:sp>
-      <p:sp>
-        <p:nvSpPr>
-          <p:cNvPr id="14" name="Rectangle 13"/>
-          <p:cNvSpPr/>
-          <p:nvPr/>
-        </p:nvSpPr>
-        <p:spPr>
-          <a:xfrm>
-            <a:off x="6309360" y="2880360"/>
-            <a:ext cx="1280160" cy="914400"/>
-          </a:xfrm>
-          <a:prstGeom prst="rect">
-            <a:avLst/>
-          </a:prstGeom>
-          <a:solidFill>
-            <a:srgbClr val="1F4E79"/>
-          </a:solidFill>
-          <a:ln>
-            <a:noFill/>
-          </a:ln>
-          <a:effectLst/>
-        </p:spPr>
-        <p:style>
-          <a:lnRef idx="1">
-            <a:schemeClr val="accent1"/>
-          </a:lnRef>
-          <a:fillRef idx="3">
-            <a:schemeClr val="accent1"/>
-          </a:fillRef>
-          <a:effectRef idx="2">
-            <a:schemeClr val="accent1"/>
-          </a:effectRef>
-          <a:fontRef idx="minor">
-            <a:schemeClr val="lt1"/>
-          </a:fontRef>
-        </p:style>
-        <p:txBody>
-          <a:bodyPr rtlCol="0" anchor="ctr"/>
-          <a:lstStyle/>
-          <a:p>
-            <a:pPr algn="ctr"/>
-          </a:p>
-        </p:txBody>
-      </p:sp>
-      <p:sp>
-        <p:nvSpPr>
-          <p:cNvPr id="15" name="TextBox 14"/>
-          <p:cNvSpPr txBox="1"/>
-          <p:nvPr/>
-        </p:nvSpPr>
-        <p:spPr>
-          <a:xfrm>
-            <a:off x="6355080" y="3136392"/>
-            <a:ext cx="1234440" cy="457200"/>
-          </a:xfrm>
-          <a:prstGeom prst="rect">
-            <a:avLst/>
-          </a:prstGeom>
-          <a:noFill/>
-        </p:spPr>
-        <p:txBody>
-          <a:bodyPr wrap="square" anchor="t" lIns="50800" rIns="50800" tIns="25400" bIns="25400">
-            <a:spAutoFit/>
-          </a:bodyPr>
-          <a:lstStyle/>
-          <a:p>
-            <a:pPr algn="ctr">
-              <a:lnSpc>
-                <a:spcPct val="108000"/>
-              </a:lnSpc>
-              <a:spcAft>
-                <a:spcPts val="400"/>
-              </a:spcAft>
-            </a:pPr>
-            <a:r>
-              <a:rPr sz="1300" b="1">
-                <a:solidFill>
-                  <a:srgbClr val="FFFFFF"/>
-                </a:solidFill>
-                <a:latin typeface="微软雅黑"/>
-                <a:ea typeface="微软雅黑"/>
-                <a:cs typeface="微软雅黑"/>
-              </a:rPr>
-              <a:t>10–11 月</a:t>
-            </a:r>
-          </a:p>
-        </p:txBody>
-      </p:sp>
-      <p:sp>
-        <p:nvSpPr>
-          <p:cNvPr id="16" name="TextBox 15"/>
-          <p:cNvSpPr txBox="1"/>
-          <p:nvPr/>
-        </p:nvSpPr>
-        <p:spPr>
-          <a:xfrm>
-            <a:off x="7726679" y="3008376"/>
-            <a:ext cx="3886200" cy="731520"/>
-          </a:xfrm>
-          <a:prstGeom prst="rect">
-            <a:avLst/>
-          </a:prstGeom>
-          <a:noFill/>
-        </p:spPr>
-        <p:txBody>
-          <a:bodyPr wrap="square" anchor="ctr" lIns="50800" rIns="50800" tIns="25400" bIns="25400">
-            <a:spAutoFit/>
-          </a:bodyPr>
-          <a:lstStyle/>
-          <a:p>
-            <a:pPr algn="l">
-              <a:lnSpc>
-                <a:spcPct val="108000"/>
-              </a:lnSpc>
-              <a:spcAft>
-                <a:spcPts val="400"/>
-              </a:spcAft>
-            </a:pPr>
-            <a:r>
-              <a:rPr sz="1150" b="0">
-                <a:solidFill>
-                  <a:srgbClr val="222A33"/>
-                </a:solidFill>
-                <a:latin typeface="微软雅黑"/>
-                <a:ea typeface="微软雅黑"/>
-                <a:cs typeface="微软雅黑"/>
-              </a:rPr>
-              <a:t>发那科 / 新能源专场跑通撮合闭环，落地 ≥1 个可收费项目</a:t>
-            </a:r>
-          </a:p>
-        </p:txBody>
-      </p:sp>
-      <p:sp>
-        <p:nvSpPr>
-          <p:cNvPr id="17" name="Rectangle 16"/>
-          <p:cNvSpPr/>
-          <p:nvPr/>
-        </p:nvSpPr>
-        <p:spPr>
-          <a:xfrm>
-            <a:off x="6309360" y="3977640"/>
-            <a:ext cx="5394960" cy="914400"/>
-          </a:xfrm>
-          <a:prstGeom prst="rect">
-            <a:avLst/>
-          </a:prstGeom>
-          <a:solidFill>
-            <a:srgbClr val="EEF3F8"/>
-          </a:solidFill>
-          <a:ln w="12700">
-            <a:solidFill>
-              <a:srgbClr val="D5DEE8"/>
-            </a:solidFill>
-          </a:ln>
-          <a:effectLst/>
-        </p:spPr>
-        <p:style>
-          <a:lnRef idx="1">
-            <a:schemeClr val="accent1"/>
-          </a:lnRef>
-          <a:fillRef idx="3">
-            <a:schemeClr val="accent1"/>
-          </a:fillRef>
-          <a:effectRef idx="2">
-            <a:schemeClr val="accent1"/>
-          </a:effectRef>
-          <a:fontRef idx="minor">
-            <a:schemeClr val="lt1"/>
-          </a:fontRef>
-        </p:style>
-        <p:txBody>
-          <a:bodyPr rtlCol="0" anchor="ctr"/>
-          <a:lstStyle/>
-          <a:p>
-            <a:pPr algn="ctr"/>
-          </a:p>
-        </p:txBody>
-      </p:sp>
-      <p:sp>
-        <p:nvSpPr>
-          <p:cNvPr id="18" name="Rectangle 17"/>
-          <p:cNvSpPr/>
-          <p:nvPr/>
-        </p:nvSpPr>
-        <p:spPr>
-          <a:xfrm>
-            <a:off x="6309360" y="3977640"/>
-            <a:ext cx="1280160" cy="914400"/>
-          </a:xfrm>
-          <a:prstGeom prst="rect">
-            <a:avLst/>
-          </a:prstGeom>
-          <a:solidFill>
-            <a:srgbClr val="1F4E79"/>
-          </a:solidFill>
-          <a:ln>
-            <a:noFill/>
-          </a:ln>
-          <a:effectLst/>
-        </p:spPr>
-        <p:style>
-          <a:lnRef idx="1">
-            <a:schemeClr val="accent1"/>
-          </a:lnRef>
-          <a:fillRef idx="3">
-            <a:schemeClr val="accent1"/>
-          </a:fillRef>
-          <a:effectRef idx="2">
-            <a:schemeClr val="accent1"/>
-          </a:effectRef>
-          <a:fontRef idx="minor">
-            <a:schemeClr val="lt1"/>
-          </a:fontRef>
-        </p:style>
-        <p:txBody>
-          <a:bodyPr rtlCol="0" anchor="ctr"/>
-          <a:lstStyle/>
-          <a:p>
-            <a:pPr algn="ctr"/>
-          </a:p>
-        </p:txBody>
-      </p:sp>
-      <p:sp>
-        <p:nvSpPr>
-          <p:cNvPr id="19" name="TextBox 18"/>
-          <p:cNvSpPr txBox="1"/>
-          <p:nvPr/>
-        </p:nvSpPr>
-        <p:spPr>
-          <a:xfrm>
-            <a:off x="6355080" y="4233672"/>
-            <a:ext cx="1234440" cy="457200"/>
-          </a:xfrm>
-          <a:prstGeom prst="rect">
-            <a:avLst/>
-          </a:prstGeom>
-          <a:noFill/>
-        </p:spPr>
-        <p:txBody>
-          <a:bodyPr wrap="square" anchor="t" lIns="50800" rIns="50800" tIns="25400" bIns="25400">
-            <a:spAutoFit/>
-          </a:bodyPr>
-          <a:lstStyle/>
-          <a:p>
-            <a:pPr algn="ctr">
-              <a:lnSpc>
-                <a:spcPct val="108000"/>
-              </a:lnSpc>
-              <a:spcAft>
-                <a:spcPts val="400"/>
-              </a:spcAft>
-            </a:pPr>
-            <a:r>
-              <a:rPr sz="1300" b="1">
-                <a:solidFill>
-                  <a:srgbClr val="FFFFFF"/>
-                </a:solidFill>
-                <a:latin typeface="微软雅黑"/>
-                <a:ea typeface="微软雅黑"/>
-                <a:cs typeface="微软雅黑"/>
-              </a:rPr>
-              <a:t>年底</a:t>
-            </a:r>
-          </a:p>
-        </p:txBody>
-      </p:sp>
-      <p:sp>
-        <p:nvSpPr>
-          <p:cNvPr id="20" name="TextBox 19"/>
-          <p:cNvSpPr txBox="1"/>
-          <p:nvPr/>
-        </p:nvSpPr>
-        <p:spPr>
-          <a:xfrm>
-            <a:off x="7726679" y="4105656"/>
-            <a:ext cx="3886200" cy="731520"/>
-          </a:xfrm>
-          <a:prstGeom prst="rect">
-            <a:avLst/>
-          </a:prstGeom>
-          <a:noFill/>
-        </p:spPr>
-        <p:txBody>
-          <a:bodyPr wrap="square" anchor="ctr" lIns="50800" rIns="50800" tIns="25400" bIns="25400">
-            <a:spAutoFit/>
-          </a:bodyPr>
-          <a:lstStyle/>
-          <a:p>
-            <a:pPr algn="l">
-              <a:lnSpc>
-                <a:spcPct val="108000"/>
-              </a:lnSpc>
-              <a:spcAft>
-                <a:spcPts val="400"/>
-              </a:spcAft>
-            </a:pPr>
-            <a:r>
-              <a:rPr sz="1150" b="0">
-                <a:solidFill>
-                  <a:srgbClr val="222A33"/>
-                </a:solidFill>
-                <a:latin typeface="微软雅黑"/>
-                <a:ea typeface="微软雅黑"/>
-                <a:cs typeface="微软雅黑"/>
-              </a:rPr>
-              <a:t>与中钢协签订【上海及长三角总战略合作伙伴】框架协议</a:t>
-            </a:r>
-          </a:p>
-        </p:txBody>
-      </p:sp>
-      <p:sp>
-        <p:nvSpPr>
-          <p:cNvPr id="21" name="TextBox 20"/>
-          <p:cNvSpPr txBox="1"/>
-          <p:nvPr/>
-        </p:nvSpPr>
-        <p:spPr>
-          <a:xfrm>
-            <a:off x="457200" y="6446520"/>
-            <a:ext cx="8229600" cy="320040"/>
-          </a:xfrm>
-          <a:prstGeom prst="rect">
-            <a:avLst/>
-          </a:prstGeom>
-          <a:noFill/>
-        </p:spPr>
-        <p:txBody>
-          <a:bodyPr wrap="square" anchor="t" lIns="50800" rIns="50800" tIns="25400" bIns="25400">
-            <a:spAutoFit/>
-          </a:bodyPr>
-          <a:lstStyle/>
-          <a:p>
-            <a:pPr algn="l">
-              <a:lnSpc>
-                <a:spcPct val="108000"/>
-              </a:lnSpc>
-              <a:spcAft>
-                <a:spcPts val="400"/>
-              </a:spcAft>
-            </a:pPr>
-            <a:r>
-              <a:rPr sz="900" b="0">
-                <a:solidFill>
-                  <a:srgbClr val="5A636E"/>
-                </a:solidFill>
-                <a:latin typeface="微软雅黑"/>
-                <a:ea typeface="微软雅黑"/>
-                <a:cs typeface="微软雅黑"/>
-              </a:rPr>
-              <a:t>钢铁 × 地产 × 产业园区 · 跨产业撮合与游学转化平台</a:t>
-            </a:r>
-          </a:p>
-        </p:txBody>
-      </p:sp>
-      <p:sp>
-        <p:nvSpPr>
-          <p:cNvPr id="22" name="TextBox 21"/>
+              <a:t>钢铁 × 不动产 × 产业园区 · 跨产业撮合与游学转化平台</a:t>
+            </a:r>
+          </a:p>
+        </p:txBody>
+      </p:sp>
+      <p:sp>
+        <p:nvSpPr>
+          <p:cNvPr id="9" name="TextBox 8"/>
           <p:cNvSpPr txBox="1"/>
           <p:nvPr/>
         </p:nvSpPr>
@@ -5359,7 +5404,7 @@
         <p:spPr>
           <a:xfrm>
             <a:off x="0" y="0"/>
-            <a:ext cx="12191695" cy="6858000"/>
+            <a:ext cx="12191695" cy="1051560"/>
           </a:xfrm>
           <a:prstGeom prst="rect">
             <a:avLst/>
@@ -5402,7 +5447,7 @@
         </p:nvSpPr>
         <p:spPr>
           <a:xfrm>
-            <a:off x="0" y="3200400"/>
+            <a:off x="0" y="1051560"/>
             <a:ext cx="12191695" cy="38100"/>
           </a:xfrm>
           <a:prstGeom prst="rect">
@@ -5446,7 +5491,3458 @@
         </p:nvSpPr>
         <p:spPr>
           <a:xfrm>
-            <a:off x="914400" y="2194560"/>
+            <a:off x="457200" y="109728"/>
+            <a:ext cx="5486400" cy="365760"/>
+          </a:xfrm>
+          <a:prstGeom prst="rect">
+            <a:avLst/>
+          </a:prstGeom>
+          <a:noFill/>
+        </p:spPr>
+        <p:txBody>
+          <a:bodyPr wrap="square" anchor="t" lIns="50800" rIns="50800" tIns="25400" bIns="25400">
+            <a:spAutoFit/>
+          </a:bodyPr>
+          <a:lstStyle/>
+          <a:p>
+            <a:pPr algn="l">
+              <a:lnSpc>
+                <a:spcPct val="108000"/>
+              </a:lnSpc>
+              <a:spcAft>
+                <a:spcPts val="400"/>
+              </a:spcAft>
+            </a:pPr>
+            <a:r>
+              <a:rPr sz="1300" b="1">
+                <a:solidFill>
+                  <a:srgbClr val="E88A1A"/>
+                </a:solidFill>
+                <a:latin typeface="微软雅黑"/>
+                <a:ea typeface="微软雅黑"/>
+                <a:cs typeface="微软雅黑"/>
+              </a:rPr>
+              <a:t>保护条款</a:t>
+            </a:r>
+          </a:p>
+        </p:txBody>
+      </p:sp>
+      <p:sp>
+        <p:nvSpPr>
+          <p:cNvPr id="5" name="TextBox 4"/>
+          <p:cNvSpPr txBox="1"/>
+          <p:nvPr/>
+        </p:nvSpPr>
+        <p:spPr>
+          <a:xfrm>
+            <a:off x="457200" y="384048"/>
+            <a:ext cx="11247120" cy="658368"/>
+          </a:xfrm>
+          <a:prstGeom prst="rect">
+            <a:avLst/>
+          </a:prstGeom>
+          <a:noFill/>
+        </p:spPr>
+        <p:txBody>
+          <a:bodyPr wrap="square" anchor="t" lIns="50800" rIns="50800" tIns="25400" bIns="25400">
+            <a:spAutoFit/>
+          </a:bodyPr>
+          <a:lstStyle/>
+          <a:p>
+            <a:pPr algn="l">
+              <a:lnSpc>
+                <a:spcPct val="108000"/>
+              </a:lnSpc>
+              <a:spcAft>
+                <a:spcPts val="400"/>
+              </a:spcAft>
+            </a:pPr>
+            <a:r>
+              <a:rPr sz="2500" b="1">
+                <a:solidFill>
+                  <a:srgbClr val="FFFFFF"/>
+                </a:solidFill>
+                <a:latin typeface="微软雅黑"/>
+                <a:ea typeface="微软雅黑"/>
+                <a:cs typeface="微软雅黑"/>
+              </a:rPr>
+              <a:t>核心保护条款（数据与资源防火墙）</a:t>
+            </a:r>
+          </a:p>
+          <a:p>
+            <a:pPr algn="l">
+              <a:lnSpc>
+                <a:spcPct val="108000"/>
+              </a:lnSpc>
+              <a:spcAft>
+                <a:spcPts val="400"/>
+              </a:spcAft>
+            </a:pPr>
+            <a:r>
+              <a:rPr sz="1300" b="0">
+                <a:solidFill>
+                  <a:srgbClr val="C9D6E3"/>
+                </a:solidFill>
+                <a:latin typeface="微软雅黑"/>
+                <a:ea typeface="微软雅黑"/>
+                <a:cs typeface="微软雅黑"/>
+              </a:rPr>
+              <a:t>防止过河拆桥、单方面洗走核心资源池</a:t>
+            </a:r>
+          </a:p>
+        </p:txBody>
+      </p:sp>
+      <p:sp>
+        <p:nvSpPr>
+          <p:cNvPr id="6" name="Rectangle 5"/>
+          <p:cNvSpPr/>
+          <p:nvPr/>
+        </p:nvSpPr>
+        <p:spPr>
+          <a:xfrm>
+            <a:off x="457200" y="1371600"/>
+            <a:ext cx="11247120" cy="1097280"/>
+          </a:xfrm>
+          <a:prstGeom prst="rect">
+            <a:avLst/>
+          </a:prstGeom>
+          <a:solidFill>
+            <a:srgbClr val="EEF3F8"/>
+          </a:solidFill>
+          <a:ln w="12700">
+            <a:solidFill>
+              <a:srgbClr val="D5DEE8"/>
+            </a:solidFill>
+          </a:ln>
+          <a:effectLst/>
+        </p:spPr>
+        <p:style>
+          <a:lnRef idx="1">
+            <a:schemeClr val="accent1"/>
+          </a:lnRef>
+          <a:fillRef idx="3">
+            <a:schemeClr val="accent1"/>
+          </a:fillRef>
+          <a:effectRef idx="2">
+            <a:schemeClr val="accent1"/>
+          </a:effectRef>
+          <a:fontRef idx="minor">
+            <a:schemeClr val="lt1"/>
+          </a:fontRef>
+        </p:style>
+        <p:txBody>
+          <a:bodyPr rtlCol="0" anchor="ctr"/>
+          <a:lstStyle/>
+          <a:p>
+            <a:pPr algn="ctr"/>
+          </a:p>
+        </p:txBody>
+      </p:sp>
+      <p:sp>
+        <p:nvSpPr>
+          <p:cNvPr id="7" name="Rectangle 6"/>
+          <p:cNvSpPr/>
+          <p:nvPr/>
+        </p:nvSpPr>
+        <p:spPr>
+          <a:xfrm>
+            <a:off x="457200" y="1371600"/>
+            <a:ext cx="128016" cy="1097280"/>
+          </a:xfrm>
+          <a:prstGeom prst="rect">
+            <a:avLst/>
+          </a:prstGeom>
+          <a:solidFill>
+            <a:srgbClr val="E88A1A"/>
+          </a:solidFill>
+          <a:ln>
+            <a:noFill/>
+          </a:ln>
+          <a:effectLst/>
+        </p:spPr>
+        <p:style>
+          <a:lnRef idx="1">
+            <a:schemeClr val="accent1"/>
+          </a:lnRef>
+          <a:fillRef idx="3">
+            <a:schemeClr val="accent1"/>
+          </a:fillRef>
+          <a:effectRef idx="2">
+            <a:schemeClr val="accent1"/>
+          </a:effectRef>
+          <a:fontRef idx="minor">
+            <a:schemeClr val="lt1"/>
+          </a:fontRef>
+        </p:style>
+        <p:txBody>
+          <a:bodyPr rtlCol="0" anchor="ctr"/>
+          <a:lstStyle/>
+          <a:p>
+            <a:pPr algn="ctr"/>
+          </a:p>
+        </p:txBody>
+      </p:sp>
+      <p:sp>
+        <p:nvSpPr>
+          <p:cNvPr id="8" name="TextBox 7"/>
+          <p:cNvSpPr txBox="1"/>
+          <p:nvPr/>
+        </p:nvSpPr>
+        <p:spPr>
+          <a:xfrm>
+            <a:off x="731520" y="1481328"/>
+            <a:ext cx="10789920" cy="914400"/>
+          </a:xfrm>
+          <a:prstGeom prst="rect">
+            <a:avLst/>
+          </a:prstGeom>
+          <a:noFill/>
+        </p:spPr>
+        <p:txBody>
+          <a:bodyPr wrap="square" anchor="t" lIns="50800" rIns="50800" tIns="25400" bIns="25400">
+            <a:spAutoFit/>
+          </a:bodyPr>
+          <a:lstStyle/>
+          <a:p>
+            <a:pPr algn="l">
+              <a:lnSpc>
+                <a:spcPct val="108000"/>
+              </a:lnSpc>
+              <a:spcAft>
+                <a:spcPts val="400"/>
+              </a:spcAft>
+            </a:pPr>
+            <a:r>
+              <a:rPr sz="1400" b="1">
+                <a:solidFill>
+                  <a:srgbClr val="142B45"/>
+                </a:solidFill>
+                <a:latin typeface="微软雅黑"/>
+                <a:ea typeface="微软雅黑"/>
+                <a:cs typeface="微软雅黑"/>
+              </a:rPr>
+              <a:t>1）名单共管与线索共享</a:t>
+            </a:r>
+          </a:p>
+          <a:p>
+            <a:pPr algn="l">
+              <a:lnSpc>
+                <a:spcPct val="108000"/>
+              </a:lnSpc>
+              <a:spcAft>
+                <a:spcPts val="400"/>
+              </a:spcAft>
+            </a:pPr>
+            <a:r>
+              <a:rPr sz="1200" b="0">
+                <a:solidFill>
+                  <a:srgbClr val="222A33"/>
+                </a:solidFill>
+                <a:latin typeface="微软雅黑"/>
+                <a:ea typeface="微软雅黑"/>
+                <a:cs typeface="微软雅黑"/>
+              </a:rPr>
+              <a:t>游学期间产生的企业通讯录、需求表、合作意向库为双方共有数据资产，活动结束后双向同步交付。</a:t>
+            </a:r>
+          </a:p>
+        </p:txBody>
+      </p:sp>
+      <p:sp>
+        <p:nvSpPr>
+          <p:cNvPr id="9" name="Rectangle 8"/>
+          <p:cNvSpPr/>
+          <p:nvPr/>
+        </p:nvSpPr>
+        <p:spPr>
+          <a:xfrm>
+            <a:off x="457200" y="2606040"/>
+            <a:ext cx="11247120" cy="1097280"/>
+          </a:xfrm>
+          <a:prstGeom prst="rect">
+            <a:avLst/>
+          </a:prstGeom>
+          <a:solidFill>
+            <a:srgbClr val="EEF3F8"/>
+          </a:solidFill>
+          <a:ln w="12700">
+            <a:solidFill>
+              <a:srgbClr val="D5DEE8"/>
+            </a:solidFill>
+          </a:ln>
+          <a:effectLst/>
+        </p:spPr>
+        <p:style>
+          <a:lnRef idx="1">
+            <a:schemeClr val="accent1"/>
+          </a:lnRef>
+          <a:fillRef idx="3">
+            <a:schemeClr val="accent1"/>
+          </a:fillRef>
+          <a:effectRef idx="2">
+            <a:schemeClr val="accent1"/>
+          </a:effectRef>
+          <a:fontRef idx="minor">
+            <a:schemeClr val="lt1"/>
+          </a:fontRef>
+        </p:style>
+        <p:txBody>
+          <a:bodyPr rtlCol="0" anchor="ctr"/>
+          <a:lstStyle/>
+          <a:p>
+            <a:pPr algn="ctr"/>
+          </a:p>
+        </p:txBody>
+      </p:sp>
+      <p:sp>
+        <p:nvSpPr>
+          <p:cNvPr id="10" name="Rectangle 9"/>
+          <p:cNvSpPr/>
+          <p:nvPr/>
+        </p:nvSpPr>
+        <p:spPr>
+          <a:xfrm>
+            <a:off x="457200" y="2606040"/>
+            <a:ext cx="128016" cy="1097280"/>
+          </a:xfrm>
+          <a:prstGeom prst="rect">
+            <a:avLst/>
+          </a:prstGeom>
+          <a:solidFill>
+            <a:srgbClr val="E88A1A"/>
+          </a:solidFill>
+          <a:ln>
+            <a:noFill/>
+          </a:ln>
+          <a:effectLst/>
+        </p:spPr>
+        <p:style>
+          <a:lnRef idx="1">
+            <a:schemeClr val="accent1"/>
+          </a:lnRef>
+          <a:fillRef idx="3">
+            <a:schemeClr val="accent1"/>
+          </a:fillRef>
+          <a:effectRef idx="2">
+            <a:schemeClr val="accent1"/>
+          </a:effectRef>
+          <a:fontRef idx="minor">
+            <a:schemeClr val="lt1"/>
+          </a:fontRef>
+        </p:style>
+        <p:txBody>
+          <a:bodyPr rtlCol="0" anchor="ctr"/>
+          <a:lstStyle/>
+          <a:p>
+            <a:pPr algn="ctr"/>
+          </a:p>
+        </p:txBody>
+      </p:sp>
+      <p:sp>
+        <p:nvSpPr>
+          <p:cNvPr id="11" name="TextBox 10"/>
+          <p:cNvSpPr txBox="1"/>
+          <p:nvPr/>
+        </p:nvSpPr>
+        <p:spPr>
+          <a:xfrm>
+            <a:off x="731520" y="2715768"/>
+            <a:ext cx="10789920" cy="914400"/>
+          </a:xfrm>
+          <a:prstGeom prst="rect">
+            <a:avLst/>
+          </a:prstGeom>
+          <a:noFill/>
+        </p:spPr>
+        <p:txBody>
+          <a:bodyPr wrap="square" anchor="t" lIns="50800" rIns="50800" tIns="25400" bIns="25400">
+            <a:spAutoFit/>
+          </a:bodyPr>
+          <a:lstStyle/>
+          <a:p>
+            <a:pPr algn="l">
+              <a:lnSpc>
+                <a:spcPct val="108000"/>
+              </a:lnSpc>
+              <a:spcAft>
+                <a:spcPts val="400"/>
+              </a:spcAft>
+            </a:pPr>
+            <a:r>
+              <a:rPr sz="1400" b="1">
+                <a:solidFill>
+                  <a:srgbClr val="142B45"/>
+                </a:solidFill>
+                <a:latin typeface="微软雅黑"/>
+                <a:ea typeface="微软雅黑"/>
+                <a:cs typeface="微软雅黑"/>
+              </a:rPr>
+              <a:t>2）社群独立权</a:t>
+            </a:r>
+          </a:p>
+          <a:p>
+            <a:pPr algn="l">
+              <a:lnSpc>
+                <a:spcPct val="108000"/>
+              </a:lnSpc>
+              <a:spcAft>
+                <a:spcPts val="400"/>
+              </a:spcAft>
+            </a:pPr>
+            <a:r>
+              <a:rPr sz="1200" b="0">
+                <a:solidFill>
+                  <a:srgbClr val="222A33"/>
+                </a:solidFill>
+                <a:latin typeface="微软雅黑"/>
+                <a:ea typeface="微软雅黑"/>
+                <a:cs typeface="微软雅黑"/>
+              </a:rPr>
+              <a:t>我方有权对邀请的买方 / 应用方企业建立独立“长三角产业协同专属群”；对方在群内二次营销需经我方审核或联合发起。</a:t>
+            </a:r>
+          </a:p>
+        </p:txBody>
+      </p:sp>
+      <p:sp>
+        <p:nvSpPr>
+          <p:cNvPr id="12" name="Rectangle 11"/>
+          <p:cNvSpPr/>
+          <p:nvPr/>
+        </p:nvSpPr>
+        <p:spPr>
+          <a:xfrm>
+            <a:off x="457200" y="3840480"/>
+            <a:ext cx="11247120" cy="1097280"/>
+          </a:xfrm>
+          <a:prstGeom prst="rect">
+            <a:avLst/>
+          </a:prstGeom>
+          <a:solidFill>
+            <a:srgbClr val="EEF3F8"/>
+          </a:solidFill>
+          <a:ln w="12700">
+            <a:solidFill>
+              <a:srgbClr val="D5DEE8"/>
+            </a:solidFill>
+          </a:ln>
+          <a:effectLst/>
+        </p:spPr>
+        <p:style>
+          <a:lnRef idx="1">
+            <a:schemeClr val="accent1"/>
+          </a:lnRef>
+          <a:fillRef idx="3">
+            <a:schemeClr val="accent1"/>
+          </a:fillRef>
+          <a:effectRef idx="2">
+            <a:schemeClr val="accent1"/>
+          </a:effectRef>
+          <a:fontRef idx="minor">
+            <a:schemeClr val="lt1"/>
+          </a:fontRef>
+        </p:style>
+        <p:txBody>
+          <a:bodyPr rtlCol="0" anchor="ctr"/>
+          <a:lstStyle/>
+          <a:p>
+            <a:pPr algn="ctr"/>
+          </a:p>
+        </p:txBody>
+      </p:sp>
+      <p:sp>
+        <p:nvSpPr>
+          <p:cNvPr id="13" name="Rectangle 12"/>
+          <p:cNvSpPr/>
+          <p:nvPr/>
+        </p:nvSpPr>
+        <p:spPr>
+          <a:xfrm>
+            <a:off x="457200" y="3840480"/>
+            <a:ext cx="128016" cy="1097280"/>
+          </a:xfrm>
+          <a:prstGeom prst="rect">
+            <a:avLst/>
+          </a:prstGeom>
+          <a:solidFill>
+            <a:srgbClr val="E88A1A"/>
+          </a:solidFill>
+          <a:ln>
+            <a:noFill/>
+          </a:ln>
+          <a:effectLst/>
+        </p:spPr>
+        <p:style>
+          <a:lnRef idx="1">
+            <a:schemeClr val="accent1"/>
+          </a:lnRef>
+          <a:fillRef idx="3">
+            <a:schemeClr val="accent1"/>
+          </a:fillRef>
+          <a:effectRef idx="2">
+            <a:schemeClr val="accent1"/>
+          </a:effectRef>
+          <a:fontRef idx="minor">
+            <a:schemeClr val="lt1"/>
+          </a:fontRef>
+        </p:style>
+        <p:txBody>
+          <a:bodyPr rtlCol="0" anchor="ctr"/>
+          <a:lstStyle/>
+          <a:p>
+            <a:pPr algn="ctr"/>
+          </a:p>
+        </p:txBody>
+      </p:sp>
+      <p:sp>
+        <p:nvSpPr>
+          <p:cNvPr id="14" name="TextBox 13"/>
+          <p:cNvSpPr txBox="1"/>
+          <p:nvPr/>
+        </p:nvSpPr>
+        <p:spPr>
+          <a:xfrm>
+            <a:off x="731520" y="3950208"/>
+            <a:ext cx="10789920" cy="914400"/>
+          </a:xfrm>
+          <a:prstGeom prst="rect">
+            <a:avLst/>
+          </a:prstGeom>
+          <a:noFill/>
+        </p:spPr>
+        <p:txBody>
+          <a:bodyPr wrap="square" anchor="t" lIns="50800" rIns="50800" tIns="25400" bIns="25400">
+            <a:spAutoFit/>
+          </a:bodyPr>
+          <a:lstStyle/>
+          <a:p>
+            <a:pPr algn="l">
+              <a:lnSpc>
+                <a:spcPct val="108000"/>
+              </a:lnSpc>
+              <a:spcAft>
+                <a:spcPts val="400"/>
+              </a:spcAft>
+            </a:pPr>
+            <a:r>
+              <a:rPr sz="1400" b="1">
+                <a:solidFill>
+                  <a:srgbClr val="142B45"/>
+                </a:solidFill>
+                <a:latin typeface="微软雅黑"/>
+                <a:ea typeface="微软雅黑"/>
+                <a:cs typeface="微软雅黑"/>
+              </a:rPr>
+              <a:t>3）品牌使用边界</a:t>
+            </a:r>
+          </a:p>
+          <a:p>
+            <a:pPr algn="l">
+              <a:lnSpc>
+                <a:spcPct val="108000"/>
+              </a:lnSpc>
+              <a:spcAft>
+                <a:spcPts val="400"/>
+              </a:spcAft>
+            </a:pPr>
+            <a:r>
+              <a:rPr sz="1200" b="0">
+                <a:solidFill>
+                  <a:srgbClr val="222A33"/>
+                </a:solidFill>
+                <a:latin typeface="微软雅黑"/>
+                <a:ea typeface="微软雅黑"/>
+                <a:cs typeface="微软雅黑"/>
+              </a:rPr>
+              <a:t>复旦及科企联品牌授权仅限本次两天半活动特定周期；未经书面许可不得在常规运营或后续独立活动继续挂靠我方抬头。</a:t>
+            </a:r>
+          </a:p>
+        </p:txBody>
+      </p:sp>
+      <p:sp>
+        <p:nvSpPr>
+          <p:cNvPr id="15" name="Rectangle 14"/>
+          <p:cNvSpPr/>
+          <p:nvPr/>
+        </p:nvSpPr>
+        <p:spPr>
+          <a:xfrm>
+            <a:off x="457200" y="5074920"/>
+            <a:ext cx="11247120" cy="1097280"/>
+          </a:xfrm>
+          <a:prstGeom prst="rect">
+            <a:avLst/>
+          </a:prstGeom>
+          <a:solidFill>
+            <a:srgbClr val="EEF3F8"/>
+          </a:solidFill>
+          <a:ln w="12700">
+            <a:solidFill>
+              <a:srgbClr val="D5DEE8"/>
+            </a:solidFill>
+          </a:ln>
+          <a:effectLst/>
+        </p:spPr>
+        <p:style>
+          <a:lnRef idx="1">
+            <a:schemeClr val="accent1"/>
+          </a:lnRef>
+          <a:fillRef idx="3">
+            <a:schemeClr val="accent1"/>
+          </a:fillRef>
+          <a:effectRef idx="2">
+            <a:schemeClr val="accent1"/>
+          </a:effectRef>
+          <a:fontRef idx="minor">
+            <a:schemeClr val="lt1"/>
+          </a:fontRef>
+        </p:style>
+        <p:txBody>
+          <a:bodyPr rtlCol="0" anchor="ctr"/>
+          <a:lstStyle/>
+          <a:p>
+            <a:pPr algn="ctr"/>
+          </a:p>
+        </p:txBody>
+      </p:sp>
+      <p:sp>
+        <p:nvSpPr>
+          <p:cNvPr id="16" name="Rectangle 15"/>
+          <p:cNvSpPr/>
+          <p:nvPr/>
+        </p:nvSpPr>
+        <p:spPr>
+          <a:xfrm>
+            <a:off x="457200" y="5074920"/>
+            <a:ext cx="128016" cy="1097280"/>
+          </a:xfrm>
+          <a:prstGeom prst="rect">
+            <a:avLst/>
+          </a:prstGeom>
+          <a:solidFill>
+            <a:srgbClr val="E88A1A"/>
+          </a:solidFill>
+          <a:ln>
+            <a:noFill/>
+          </a:ln>
+          <a:effectLst/>
+        </p:spPr>
+        <p:style>
+          <a:lnRef idx="1">
+            <a:schemeClr val="accent1"/>
+          </a:lnRef>
+          <a:fillRef idx="3">
+            <a:schemeClr val="accent1"/>
+          </a:fillRef>
+          <a:effectRef idx="2">
+            <a:schemeClr val="accent1"/>
+          </a:effectRef>
+          <a:fontRef idx="minor">
+            <a:schemeClr val="lt1"/>
+          </a:fontRef>
+        </p:style>
+        <p:txBody>
+          <a:bodyPr rtlCol="0" anchor="ctr"/>
+          <a:lstStyle/>
+          <a:p>
+            <a:pPr algn="ctr"/>
+          </a:p>
+        </p:txBody>
+      </p:sp>
+      <p:sp>
+        <p:nvSpPr>
+          <p:cNvPr id="17" name="TextBox 16"/>
+          <p:cNvSpPr txBox="1"/>
+          <p:nvPr/>
+        </p:nvSpPr>
+        <p:spPr>
+          <a:xfrm>
+            <a:off x="731520" y="5184648"/>
+            <a:ext cx="10789920" cy="914400"/>
+          </a:xfrm>
+          <a:prstGeom prst="rect">
+            <a:avLst/>
+          </a:prstGeom>
+          <a:noFill/>
+        </p:spPr>
+        <p:txBody>
+          <a:bodyPr wrap="square" anchor="t" lIns="50800" rIns="50800" tIns="25400" bIns="25400">
+            <a:spAutoFit/>
+          </a:bodyPr>
+          <a:lstStyle/>
+          <a:p>
+            <a:pPr algn="l">
+              <a:lnSpc>
+                <a:spcPct val="108000"/>
+              </a:lnSpc>
+              <a:spcAft>
+                <a:spcPts val="400"/>
+              </a:spcAft>
+            </a:pPr>
+            <a:r>
+              <a:rPr sz="1400" b="1">
+                <a:solidFill>
+                  <a:srgbClr val="142B45"/>
+                </a:solidFill>
+                <a:latin typeface="微软雅黑"/>
+                <a:ea typeface="微软雅黑"/>
+                <a:cs typeface="微软雅黑"/>
+              </a:rPr>
+              <a:t>4）分佣确认与追溯</a:t>
+            </a:r>
+          </a:p>
+          <a:p>
+            <a:pPr algn="l">
+              <a:lnSpc>
+                <a:spcPct val="108000"/>
+              </a:lnSpc>
+              <a:spcAft>
+                <a:spcPts val="400"/>
+              </a:spcAft>
+            </a:pPr>
+            <a:r>
+              <a:rPr sz="1200" b="0">
+                <a:solidFill>
+                  <a:srgbClr val="222A33"/>
+                </a:solidFill>
+                <a:latin typeface="微软雅黑"/>
+                <a:ea typeface="微软雅黑"/>
+                <a:cs typeface="微软雅黑"/>
+              </a:rPr>
+              <a:t>转化 / 成交以名单共管库为准，设活动后 1 年追溯期，防止跳单与资源洗单。</a:t>
+            </a:r>
+          </a:p>
+        </p:txBody>
+      </p:sp>
+      <p:sp>
+        <p:nvSpPr>
+          <p:cNvPr id="18" name="TextBox 17"/>
+          <p:cNvSpPr txBox="1"/>
+          <p:nvPr/>
+        </p:nvSpPr>
+        <p:spPr>
+          <a:xfrm>
+            <a:off x="457200" y="6446520"/>
+            <a:ext cx="8229600" cy="320040"/>
+          </a:xfrm>
+          <a:prstGeom prst="rect">
+            <a:avLst/>
+          </a:prstGeom>
+          <a:noFill/>
+        </p:spPr>
+        <p:txBody>
+          <a:bodyPr wrap="square" anchor="t" lIns="50800" rIns="50800" tIns="25400" bIns="25400">
+            <a:spAutoFit/>
+          </a:bodyPr>
+          <a:lstStyle/>
+          <a:p>
+            <a:pPr algn="l">
+              <a:lnSpc>
+                <a:spcPct val="108000"/>
+              </a:lnSpc>
+              <a:spcAft>
+                <a:spcPts val="400"/>
+              </a:spcAft>
+            </a:pPr>
+            <a:r>
+              <a:rPr sz="900" b="0">
+                <a:solidFill>
+                  <a:srgbClr val="5A636E"/>
+                </a:solidFill>
+                <a:latin typeface="微软雅黑"/>
+                <a:ea typeface="微软雅黑"/>
+                <a:cs typeface="微软雅黑"/>
+              </a:rPr>
+              <a:t>钢铁 × 不动产 × 产业园区 · 跨产业撮合与游学转化平台</a:t>
+            </a:r>
+          </a:p>
+        </p:txBody>
+      </p:sp>
+      <p:sp>
+        <p:nvSpPr>
+          <p:cNvPr id="19" name="TextBox 18"/>
+          <p:cNvSpPr txBox="1"/>
+          <p:nvPr/>
+        </p:nvSpPr>
+        <p:spPr>
+          <a:xfrm>
+            <a:off x="10789920" y="6446520"/>
+            <a:ext cx="1097280" cy="320040"/>
+          </a:xfrm>
+          <a:prstGeom prst="rect">
+            <a:avLst/>
+          </a:prstGeom>
+          <a:noFill/>
+        </p:spPr>
+        <p:txBody>
+          <a:bodyPr wrap="square" anchor="t" lIns="50800" rIns="50800" tIns="25400" bIns="25400">
+            <a:spAutoFit/>
+          </a:bodyPr>
+          <a:lstStyle/>
+          <a:p>
+            <a:pPr algn="r">
+              <a:lnSpc>
+                <a:spcPct val="108000"/>
+              </a:lnSpc>
+              <a:spcAft>
+                <a:spcPts val="400"/>
+              </a:spcAft>
+            </a:pPr>
+            <a:r>
+              <a:rPr sz="900" b="0">
+                <a:solidFill>
+                  <a:srgbClr val="5A636E"/>
+                </a:solidFill>
+                <a:latin typeface="微软雅黑"/>
+                <a:ea typeface="微软雅黑"/>
+                <a:cs typeface="微软雅黑"/>
+              </a:rPr>
+              <a:t>12</a:t>
+            </a:r>
+          </a:p>
+        </p:txBody>
+      </p:sp>
+    </p:spTree>
+  </p:cSld>
+  <p:clrMapOvr>
+    <a:masterClrMapping/>
+  </p:clrMapOvr>
+</p:sld>
+</file>
+
+<file path=ppt/slides/slide13.xml><?xml version="1.0" encoding="utf-8"?>
+<p:sld xmlns:a="http://schemas.openxmlformats.org/drawingml/2006/main" xmlns:p="http://schemas.openxmlformats.org/presentationml/2006/main" xmlns:r="http://schemas.openxmlformats.org/officeDocument/2006/relationships">
+  <p:cSld>
+    <p:spTree>
+      <p:nvGrpSpPr>
+        <p:cNvPr id="1" name=""/>
+        <p:cNvGrpSpPr/>
+        <p:nvPr/>
+      </p:nvGrpSpPr>
+      <p:grpSpPr/>
+      <p:sp>
+        <p:nvSpPr>
+          <p:cNvPr id="2" name="Rectangle 1"/>
+          <p:cNvSpPr/>
+          <p:nvPr/>
+        </p:nvSpPr>
+        <p:spPr>
+          <a:xfrm>
+            <a:off x="0" y="0"/>
+            <a:ext cx="12191695" cy="1051560"/>
+          </a:xfrm>
+          <a:prstGeom prst="rect">
+            <a:avLst/>
+          </a:prstGeom>
+          <a:solidFill>
+            <a:srgbClr val="142B45"/>
+          </a:solidFill>
+          <a:ln>
+            <a:noFill/>
+          </a:ln>
+          <a:effectLst/>
+        </p:spPr>
+        <p:style>
+          <a:lnRef idx="1">
+            <a:schemeClr val="accent1"/>
+          </a:lnRef>
+          <a:fillRef idx="3">
+            <a:schemeClr val="accent1"/>
+          </a:fillRef>
+          <a:effectRef idx="2">
+            <a:schemeClr val="accent1"/>
+          </a:effectRef>
+          <a:fontRef idx="minor">
+            <a:schemeClr val="lt1"/>
+          </a:fontRef>
+        </p:style>
+        <p:txBody>
+          <a:bodyPr rtlCol="0" anchor="ctr"/>
+          <a:lstStyle/>
+          <a:p>
+            <a:pPr algn="ctr"/>
+          </a:p>
+        </p:txBody>
+      </p:sp>
+      <p:sp>
+        <p:nvSpPr>
+          <p:cNvPr id="3" name="Rectangle 2"/>
+          <p:cNvSpPr/>
+          <p:nvPr/>
+        </p:nvSpPr>
+        <p:spPr>
+          <a:xfrm>
+            <a:off x="0" y="1051560"/>
+            <a:ext cx="12191695" cy="38100"/>
+          </a:xfrm>
+          <a:prstGeom prst="rect">
+            <a:avLst/>
+          </a:prstGeom>
+          <a:solidFill>
+            <a:srgbClr val="E88A1A"/>
+          </a:solidFill>
+          <a:ln>
+            <a:noFill/>
+          </a:ln>
+          <a:effectLst/>
+        </p:spPr>
+        <p:style>
+          <a:lnRef idx="1">
+            <a:schemeClr val="accent1"/>
+          </a:lnRef>
+          <a:fillRef idx="3">
+            <a:schemeClr val="accent1"/>
+          </a:fillRef>
+          <a:effectRef idx="2">
+            <a:schemeClr val="accent1"/>
+          </a:effectRef>
+          <a:fontRef idx="minor">
+            <a:schemeClr val="lt1"/>
+          </a:fontRef>
+        </p:style>
+        <p:txBody>
+          <a:bodyPr rtlCol="0" anchor="ctr"/>
+          <a:lstStyle/>
+          <a:p>
+            <a:pPr algn="ctr"/>
+          </a:p>
+        </p:txBody>
+      </p:sp>
+      <p:sp>
+        <p:nvSpPr>
+          <p:cNvPr id="4" name="TextBox 3"/>
+          <p:cNvSpPr txBox="1"/>
+          <p:nvPr/>
+        </p:nvSpPr>
+        <p:spPr>
+          <a:xfrm>
+            <a:off x="457200" y="109728"/>
+            <a:ext cx="5486400" cy="365760"/>
+          </a:xfrm>
+          <a:prstGeom prst="rect">
+            <a:avLst/>
+          </a:prstGeom>
+          <a:noFill/>
+        </p:spPr>
+        <p:txBody>
+          <a:bodyPr wrap="square" anchor="t" lIns="50800" rIns="50800" tIns="25400" bIns="25400">
+            <a:spAutoFit/>
+          </a:bodyPr>
+          <a:lstStyle/>
+          <a:p>
+            <a:pPr algn="l">
+              <a:lnSpc>
+                <a:spcPct val="108000"/>
+              </a:lnSpc>
+              <a:spcAft>
+                <a:spcPts val="400"/>
+              </a:spcAft>
+            </a:pPr>
+            <a:r>
+              <a:rPr sz="1300" b="1">
+                <a:solidFill>
+                  <a:srgbClr val="E88A1A"/>
+                </a:solidFill>
+                <a:latin typeface="微软雅黑"/>
+                <a:ea typeface="微软雅黑"/>
+                <a:cs typeface="微软雅黑"/>
+              </a:rPr>
+              <a:t>底线与应对</a:t>
+            </a:r>
+          </a:p>
+        </p:txBody>
+      </p:sp>
+      <p:sp>
+        <p:nvSpPr>
+          <p:cNvPr id="5" name="TextBox 4"/>
+          <p:cNvSpPr txBox="1"/>
+          <p:nvPr/>
+        </p:nvSpPr>
+        <p:spPr>
+          <a:xfrm>
+            <a:off x="457200" y="384048"/>
+            <a:ext cx="11247120" cy="658368"/>
+          </a:xfrm>
+          <a:prstGeom prst="rect">
+            <a:avLst/>
+          </a:prstGeom>
+          <a:noFill/>
+        </p:spPr>
+        <p:txBody>
+          <a:bodyPr wrap="square" anchor="t" lIns="50800" rIns="50800" tIns="25400" bIns="25400">
+            <a:spAutoFit/>
+          </a:bodyPr>
+          <a:lstStyle/>
+          <a:p>
+            <a:pPr algn="l">
+              <a:lnSpc>
+                <a:spcPct val="108000"/>
+              </a:lnSpc>
+              <a:spcAft>
+                <a:spcPts val="400"/>
+              </a:spcAft>
+            </a:pPr>
+            <a:r>
+              <a:rPr sz="2500" b="1">
+                <a:solidFill>
+                  <a:srgbClr val="FFFFFF"/>
+                </a:solidFill>
+                <a:latin typeface="微软雅黑"/>
+                <a:ea typeface="微软雅黑"/>
+                <a:cs typeface="微软雅黑"/>
+              </a:rPr>
+              <a:t>我方底线 与 对方反应分级应对</a:t>
+            </a:r>
+          </a:p>
+        </p:txBody>
+      </p:sp>
+      <p:sp>
+        <p:nvSpPr>
+          <p:cNvPr id="6" name="TextBox 5"/>
+          <p:cNvSpPr txBox="1"/>
+          <p:nvPr/>
+        </p:nvSpPr>
+        <p:spPr>
+          <a:xfrm>
+            <a:off x="457200" y="1280160"/>
+            <a:ext cx="5486400" cy="365760"/>
+          </a:xfrm>
+          <a:prstGeom prst="rect">
+            <a:avLst/>
+          </a:prstGeom>
+          <a:noFill/>
+        </p:spPr>
+        <p:txBody>
+          <a:bodyPr wrap="square" anchor="t" lIns="50800" rIns="50800" tIns="25400" bIns="25400">
+            <a:spAutoFit/>
+          </a:bodyPr>
+          <a:lstStyle/>
+          <a:p>
+            <a:pPr algn="l">
+              <a:lnSpc>
+                <a:spcPct val="108000"/>
+              </a:lnSpc>
+              <a:spcAft>
+                <a:spcPts val="400"/>
+              </a:spcAft>
+            </a:pPr>
+            <a:r>
+              <a:rPr sz="1500" b="1">
+                <a:solidFill>
+                  <a:srgbClr val="B03A2E"/>
+                </a:solidFill>
+                <a:latin typeface="微软雅黑"/>
+                <a:ea typeface="微软雅黑"/>
+                <a:cs typeface="微软雅黑"/>
+              </a:rPr>
+              <a:t>我方要守住的底线</a:t>
+            </a:r>
+          </a:p>
+        </p:txBody>
+      </p:sp>
+      <p:sp>
+        <p:nvSpPr>
+          <p:cNvPr id="7" name="TextBox 6"/>
+          <p:cNvSpPr txBox="1"/>
+          <p:nvPr/>
+        </p:nvSpPr>
+        <p:spPr>
+          <a:xfrm>
+            <a:off x="502920" y="1783080"/>
+            <a:ext cx="5577840" cy="4114800"/>
+          </a:xfrm>
+          <a:prstGeom prst="rect">
+            <a:avLst/>
+          </a:prstGeom>
+          <a:noFill/>
+        </p:spPr>
+        <p:txBody>
+          <a:bodyPr wrap="square" anchor="t" lIns="50800" rIns="50800" tIns="25400" bIns="25400">
+            <a:spAutoFit/>
+          </a:bodyPr>
+          <a:lstStyle/>
+          <a:p>
+            <a:pPr algn="l">
+              <a:lnSpc>
+                <a:spcPct val="108000"/>
+              </a:lnSpc>
+              <a:spcAft>
+                <a:spcPts val="1400"/>
+              </a:spcAft>
+            </a:pPr>
+            <a:r>
+              <a:rPr sz="1300" b="0">
+                <a:solidFill>
+                  <a:srgbClr val="222A33"/>
+                </a:solidFill>
+                <a:latin typeface="微软雅黑"/>
+                <a:ea typeface="微软雅黑"/>
+                <a:cs typeface="微软雅黑"/>
+              </a:rPr>
+              <a:t>• 不再接受“各收各钱”——对方有会员制、我方无，否则我方拿不到产业链利润；</a:t>
+            </a:r>
+          </a:p>
+          <a:p>
+            <a:pPr algn="l">
+              <a:lnSpc>
+                <a:spcPct val="108000"/>
+              </a:lnSpc>
+              <a:spcAft>
+                <a:spcPts val="1400"/>
+              </a:spcAft>
+            </a:pPr>
+            <a:r>
+              <a:rPr sz="1300" b="0">
+                <a:solidFill>
+                  <a:srgbClr val="222A33"/>
+                </a:solidFill>
+                <a:latin typeface="微软雅黑"/>
+                <a:ea typeface="微软雅黑"/>
+                <a:cs typeface="微软雅黑"/>
+              </a:rPr>
+              <a:t>• 品牌必须绑定收费——否则复旦 = 免费工具人；</a:t>
+            </a:r>
+          </a:p>
+          <a:p>
+            <a:pPr algn="l">
+              <a:lnSpc>
+                <a:spcPct val="108000"/>
+              </a:lnSpc>
+              <a:spcAft>
+                <a:spcPts val="1400"/>
+              </a:spcAft>
+            </a:pPr>
+            <a:r>
+              <a:rPr sz="1300" b="0">
+                <a:solidFill>
+                  <a:srgbClr val="222A33"/>
+                </a:solidFill>
+                <a:latin typeface="微软雅黑"/>
+                <a:ea typeface="微软雅黑"/>
+                <a:cs typeface="微软雅黑"/>
+              </a:rPr>
+              <a:t>• 我方必须参与产品定义（哪怕不参与招生）——否则被边缘化为执行方；</a:t>
+            </a:r>
+          </a:p>
+          <a:p>
+            <a:pPr algn="l">
+              <a:lnSpc>
+                <a:spcPct val="108000"/>
+              </a:lnSpc>
+              <a:spcAft>
+                <a:spcPts val="1400"/>
+              </a:spcAft>
+            </a:pPr>
+            <a:r>
+              <a:rPr sz="1300" b="0">
+                <a:solidFill>
+                  <a:srgbClr val="222A33"/>
+                </a:solidFill>
+                <a:latin typeface="微软雅黑"/>
+                <a:ea typeface="微软雅黑"/>
+                <a:cs typeface="微软雅黑"/>
+              </a:rPr>
+              <a:t>• 坚持对等交流、商务对商务、总会对总会。</a:t>
+            </a:r>
+          </a:p>
+        </p:txBody>
+      </p:sp>
+      <p:sp>
+        <p:nvSpPr>
+          <p:cNvPr id="8" name="TextBox 7"/>
+          <p:cNvSpPr txBox="1"/>
+          <p:nvPr/>
+        </p:nvSpPr>
+        <p:spPr>
+          <a:xfrm>
+            <a:off x="6309360" y="1280160"/>
+            <a:ext cx="5486400" cy="365760"/>
+          </a:xfrm>
+          <a:prstGeom prst="rect">
+            <a:avLst/>
+          </a:prstGeom>
+          <a:noFill/>
+        </p:spPr>
+        <p:txBody>
+          <a:bodyPr wrap="square" anchor="t" lIns="50800" rIns="50800" tIns="25400" bIns="25400">
+            <a:spAutoFit/>
+          </a:bodyPr>
+          <a:lstStyle/>
+          <a:p>
+            <a:pPr algn="l">
+              <a:lnSpc>
+                <a:spcPct val="108000"/>
+              </a:lnSpc>
+              <a:spcAft>
+                <a:spcPts val="400"/>
+              </a:spcAft>
+            </a:pPr>
+            <a:r>
+              <a:rPr sz="1500" b="1">
+                <a:solidFill>
+                  <a:srgbClr val="142B45"/>
+                </a:solidFill>
+                <a:latin typeface="微软雅黑"/>
+                <a:ea typeface="微软雅黑"/>
+                <a:cs typeface="微软雅黑"/>
+              </a:rPr>
+              <a:t>对方反应 · 分级应对</a:t>
+            </a:r>
+          </a:p>
+        </p:txBody>
+      </p:sp>
+      <p:sp>
+        <p:nvSpPr>
+          <p:cNvPr id="9" name="Rectangle 8"/>
+          <p:cNvSpPr/>
+          <p:nvPr/>
+        </p:nvSpPr>
+        <p:spPr>
+          <a:xfrm>
+            <a:off x="6309360" y="1783080"/>
+            <a:ext cx="5394960" cy="1234440"/>
+          </a:xfrm>
+          <a:prstGeom prst="rect">
+            <a:avLst/>
+          </a:prstGeom>
+          <a:solidFill>
+            <a:srgbClr val="EEF3F8"/>
+          </a:solidFill>
+          <a:ln w="12700">
+            <a:solidFill>
+              <a:srgbClr val="D5DEE8"/>
+            </a:solidFill>
+          </a:ln>
+          <a:effectLst/>
+        </p:spPr>
+        <p:style>
+          <a:lnRef idx="1">
+            <a:schemeClr val="accent1"/>
+          </a:lnRef>
+          <a:fillRef idx="3">
+            <a:schemeClr val="accent1"/>
+          </a:fillRef>
+          <a:effectRef idx="2">
+            <a:schemeClr val="accent1"/>
+          </a:effectRef>
+          <a:fontRef idx="minor">
+            <a:schemeClr val="lt1"/>
+          </a:fontRef>
+        </p:style>
+        <p:txBody>
+          <a:bodyPr rtlCol="0" anchor="ctr"/>
+          <a:lstStyle/>
+          <a:p>
+            <a:pPr algn="ctr"/>
+          </a:p>
+        </p:txBody>
+      </p:sp>
+      <p:sp>
+        <p:nvSpPr>
+          <p:cNvPr id="10" name="Rectangle 9"/>
+          <p:cNvSpPr/>
+          <p:nvPr/>
+        </p:nvSpPr>
+        <p:spPr>
+          <a:xfrm>
+            <a:off x="6309360" y="1783080"/>
+            <a:ext cx="1280160" cy="1234440"/>
+          </a:xfrm>
+          <a:prstGeom prst="rect">
+            <a:avLst/>
+          </a:prstGeom>
+          <a:solidFill>
+            <a:srgbClr val="2E7D53"/>
+          </a:solidFill>
+          <a:ln>
+            <a:noFill/>
+          </a:ln>
+          <a:effectLst/>
+        </p:spPr>
+        <p:style>
+          <a:lnRef idx="1">
+            <a:schemeClr val="accent1"/>
+          </a:lnRef>
+          <a:fillRef idx="3">
+            <a:schemeClr val="accent1"/>
+          </a:fillRef>
+          <a:effectRef idx="2">
+            <a:schemeClr val="accent1"/>
+          </a:effectRef>
+          <a:fontRef idx="minor">
+            <a:schemeClr val="lt1"/>
+          </a:fontRef>
+        </p:style>
+        <p:txBody>
+          <a:bodyPr rtlCol="0" anchor="ctr"/>
+          <a:lstStyle/>
+          <a:p>
+            <a:pPr algn="ctr"/>
+          </a:p>
+        </p:txBody>
+      </p:sp>
+      <p:sp>
+        <p:nvSpPr>
+          <p:cNvPr id="11" name="TextBox 10"/>
+          <p:cNvSpPr txBox="1"/>
+          <p:nvPr/>
+        </p:nvSpPr>
+        <p:spPr>
+          <a:xfrm>
+            <a:off x="6355080" y="2194560"/>
+            <a:ext cx="1234440" cy="457200"/>
+          </a:xfrm>
+          <a:prstGeom prst="rect">
+            <a:avLst/>
+          </a:prstGeom>
+          <a:noFill/>
+        </p:spPr>
+        <p:txBody>
+          <a:bodyPr wrap="square" anchor="t" lIns="50800" rIns="50800" tIns="25400" bIns="25400">
+            <a:spAutoFit/>
+          </a:bodyPr>
+          <a:lstStyle/>
+          <a:p>
+            <a:pPr algn="ctr">
+              <a:lnSpc>
+                <a:spcPct val="108000"/>
+              </a:lnSpc>
+              <a:spcAft>
+                <a:spcPts val="400"/>
+              </a:spcAft>
+            </a:pPr>
+            <a:r>
+              <a:rPr sz="1400" b="1">
+                <a:solidFill>
+                  <a:srgbClr val="FFFFFF"/>
+                </a:solidFill>
+                <a:latin typeface="微软雅黑"/>
+                <a:ea typeface="微软雅黑"/>
+                <a:cs typeface="微软雅黑"/>
+              </a:rPr>
+              <a:t>接受</a:t>
+            </a:r>
+          </a:p>
+        </p:txBody>
+      </p:sp>
+      <p:sp>
+        <p:nvSpPr>
+          <p:cNvPr id="12" name="TextBox 11"/>
+          <p:cNvSpPr txBox="1"/>
+          <p:nvPr/>
+        </p:nvSpPr>
+        <p:spPr>
+          <a:xfrm>
+            <a:off x="7726679" y="1911096"/>
+            <a:ext cx="3886200" cy="960120"/>
+          </a:xfrm>
+          <a:prstGeom prst="rect">
+            <a:avLst/>
+          </a:prstGeom>
+          <a:noFill/>
+        </p:spPr>
+        <p:txBody>
+          <a:bodyPr wrap="square" anchor="ctr" lIns="50800" rIns="50800" tIns="25400" bIns="25400">
+            <a:spAutoFit/>
+          </a:bodyPr>
+          <a:lstStyle/>
+          <a:p>
+            <a:pPr algn="l">
+              <a:lnSpc>
+                <a:spcPct val="108000"/>
+              </a:lnSpc>
+              <a:spcAft>
+                <a:spcPts val="400"/>
+              </a:spcAft>
+            </a:pPr>
+            <a:r>
+              <a:rPr sz="1200" b="0">
+                <a:solidFill>
+                  <a:srgbClr val="222A33"/>
+                </a:solidFill>
+                <a:latin typeface="微软雅黑"/>
+                <a:ea typeface="微软雅黑"/>
+                <a:cs typeface="微软雅黑"/>
+              </a:rPr>
+              <a:t>直接进入价格结构谈判，A / B / C 方案组合落位。</a:t>
+            </a:r>
+          </a:p>
+        </p:txBody>
+      </p:sp>
+      <p:sp>
+        <p:nvSpPr>
+          <p:cNvPr id="13" name="Rectangle 12"/>
+          <p:cNvSpPr/>
+          <p:nvPr/>
+        </p:nvSpPr>
+        <p:spPr>
+          <a:xfrm>
+            <a:off x="6309360" y="3154680"/>
+            <a:ext cx="5394960" cy="1234440"/>
+          </a:xfrm>
+          <a:prstGeom prst="rect">
+            <a:avLst/>
+          </a:prstGeom>
+          <a:solidFill>
+            <a:srgbClr val="EEF3F8"/>
+          </a:solidFill>
+          <a:ln w="12700">
+            <a:solidFill>
+              <a:srgbClr val="D5DEE8"/>
+            </a:solidFill>
+          </a:ln>
+          <a:effectLst/>
+        </p:spPr>
+        <p:style>
+          <a:lnRef idx="1">
+            <a:schemeClr val="accent1"/>
+          </a:lnRef>
+          <a:fillRef idx="3">
+            <a:schemeClr val="accent1"/>
+          </a:fillRef>
+          <a:effectRef idx="2">
+            <a:schemeClr val="accent1"/>
+          </a:effectRef>
+          <a:fontRef idx="minor">
+            <a:schemeClr val="lt1"/>
+          </a:fontRef>
+        </p:style>
+        <p:txBody>
+          <a:bodyPr rtlCol="0" anchor="ctr"/>
+          <a:lstStyle/>
+          <a:p>
+            <a:pPr algn="ctr"/>
+          </a:p>
+        </p:txBody>
+      </p:sp>
+      <p:sp>
+        <p:nvSpPr>
+          <p:cNvPr id="14" name="Rectangle 13"/>
+          <p:cNvSpPr/>
+          <p:nvPr/>
+        </p:nvSpPr>
+        <p:spPr>
+          <a:xfrm>
+            <a:off x="6309360" y="3154680"/>
+            <a:ext cx="1280160" cy="1234440"/>
+          </a:xfrm>
+          <a:prstGeom prst="rect">
+            <a:avLst/>
+          </a:prstGeom>
+          <a:solidFill>
+            <a:srgbClr val="E88A1A"/>
+          </a:solidFill>
+          <a:ln>
+            <a:noFill/>
+          </a:ln>
+          <a:effectLst/>
+        </p:spPr>
+        <p:style>
+          <a:lnRef idx="1">
+            <a:schemeClr val="accent1"/>
+          </a:lnRef>
+          <a:fillRef idx="3">
+            <a:schemeClr val="accent1"/>
+          </a:fillRef>
+          <a:effectRef idx="2">
+            <a:schemeClr val="accent1"/>
+          </a:effectRef>
+          <a:fontRef idx="minor">
+            <a:schemeClr val="lt1"/>
+          </a:fontRef>
+        </p:style>
+        <p:txBody>
+          <a:bodyPr rtlCol="0" anchor="ctr"/>
+          <a:lstStyle/>
+          <a:p>
+            <a:pPr algn="ctr"/>
+          </a:p>
+        </p:txBody>
+      </p:sp>
+      <p:sp>
+        <p:nvSpPr>
+          <p:cNvPr id="15" name="TextBox 14"/>
+          <p:cNvSpPr txBox="1"/>
+          <p:nvPr/>
+        </p:nvSpPr>
+        <p:spPr>
+          <a:xfrm>
+            <a:off x="6355080" y="3566160"/>
+            <a:ext cx="1234440" cy="457200"/>
+          </a:xfrm>
+          <a:prstGeom prst="rect">
+            <a:avLst/>
+          </a:prstGeom>
+          <a:noFill/>
+        </p:spPr>
+        <p:txBody>
+          <a:bodyPr wrap="square" anchor="t" lIns="50800" rIns="50800" tIns="25400" bIns="25400">
+            <a:spAutoFit/>
+          </a:bodyPr>
+          <a:lstStyle/>
+          <a:p>
+            <a:pPr algn="ctr">
+              <a:lnSpc>
+                <a:spcPct val="108000"/>
+              </a:lnSpc>
+              <a:spcAft>
+                <a:spcPts val="400"/>
+              </a:spcAft>
+            </a:pPr>
+            <a:r>
+              <a:rPr sz="1400" b="1">
+                <a:solidFill>
+                  <a:srgbClr val="FFFFFF"/>
+                </a:solidFill>
+                <a:latin typeface="微软雅黑"/>
+                <a:ea typeface="微软雅黑"/>
+                <a:cs typeface="微软雅黑"/>
+              </a:rPr>
+              <a:t>犹豫</a:t>
+            </a:r>
+          </a:p>
+        </p:txBody>
+      </p:sp>
+      <p:sp>
+        <p:nvSpPr>
+          <p:cNvPr id="16" name="TextBox 15"/>
+          <p:cNvSpPr txBox="1"/>
+          <p:nvPr/>
+        </p:nvSpPr>
+        <p:spPr>
+          <a:xfrm>
+            <a:off x="7726679" y="3282696"/>
+            <a:ext cx="3886200" cy="960120"/>
+          </a:xfrm>
+          <a:prstGeom prst="rect">
+            <a:avLst/>
+          </a:prstGeom>
+          <a:noFill/>
+        </p:spPr>
+        <p:txBody>
+          <a:bodyPr wrap="square" anchor="ctr" lIns="50800" rIns="50800" tIns="25400" bIns="25400">
+            <a:spAutoFit/>
+          </a:bodyPr>
+          <a:lstStyle/>
+          <a:p>
+            <a:pPr algn="l">
+              <a:lnSpc>
+                <a:spcPct val="108000"/>
+              </a:lnSpc>
+              <a:spcAft>
+                <a:spcPts val="400"/>
+              </a:spcAft>
+            </a:pPr>
+            <a:r>
+              <a:rPr sz="1200" b="0">
+                <a:solidFill>
+                  <a:srgbClr val="222A33"/>
+                </a:solidFill>
+                <a:latin typeface="微软雅黑"/>
+                <a:ea typeface="微软雅黑"/>
+                <a:cs typeface="微软雅黑"/>
+              </a:rPr>
+              <a:t>给轻量版：先收基础品牌与资源服务费（方案 A 下限），保留后端分成条款。</a:t>
+            </a:r>
+          </a:p>
+        </p:txBody>
+      </p:sp>
+      <p:sp>
+        <p:nvSpPr>
+          <p:cNvPr id="17" name="Rectangle 16"/>
+          <p:cNvSpPr/>
+          <p:nvPr/>
+        </p:nvSpPr>
+        <p:spPr>
+          <a:xfrm>
+            <a:off x="6309360" y="4526280"/>
+            <a:ext cx="5394960" cy="1234440"/>
+          </a:xfrm>
+          <a:prstGeom prst="rect">
+            <a:avLst/>
+          </a:prstGeom>
+          <a:solidFill>
+            <a:srgbClr val="EEF3F8"/>
+          </a:solidFill>
+          <a:ln w="12700">
+            <a:solidFill>
+              <a:srgbClr val="D5DEE8"/>
+            </a:solidFill>
+          </a:ln>
+          <a:effectLst/>
+        </p:spPr>
+        <p:style>
+          <a:lnRef idx="1">
+            <a:schemeClr val="accent1"/>
+          </a:lnRef>
+          <a:fillRef idx="3">
+            <a:schemeClr val="accent1"/>
+          </a:fillRef>
+          <a:effectRef idx="2">
+            <a:schemeClr val="accent1"/>
+          </a:effectRef>
+          <a:fontRef idx="minor">
+            <a:schemeClr val="lt1"/>
+          </a:fontRef>
+        </p:style>
+        <p:txBody>
+          <a:bodyPr rtlCol="0" anchor="ctr"/>
+          <a:lstStyle/>
+          <a:p>
+            <a:pPr algn="ctr"/>
+          </a:p>
+        </p:txBody>
+      </p:sp>
+      <p:sp>
+        <p:nvSpPr>
+          <p:cNvPr id="18" name="Rectangle 17"/>
+          <p:cNvSpPr/>
+          <p:nvPr/>
+        </p:nvSpPr>
+        <p:spPr>
+          <a:xfrm>
+            <a:off x="6309360" y="4526280"/>
+            <a:ext cx="1280160" cy="1234440"/>
+          </a:xfrm>
+          <a:prstGeom prst="rect">
+            <a:avLst/>
+          </a:prstGeom>
+          <a:solidFill>
+            <a:srgbClr val="B03A2E"/>
+          </a:solidFill>
+          <a:ln>
+            <a:noFill/>
+          </a:ln>
+          <a:effectLst/>
+        </p:spPr>
+        <p:style>
+          <a:lnRef idx="1">
+            <a:schemeClr val="accent1"/>
+          </a:lnRef>
+          <a:fillRef idx="3">
+            <a:schemeClr val="accent1"/>
+          </a:fillRef>
+          <a:effectRef idx="2">
+            <a:schemeClr val="accent1"/>
+          </a:effectRef>
+          <a:fontRef idx="minor">
+            <a:schemeClr val="lt1"/>
+          </a:fontRef>
+        </p:style>
+        <p:txBody>
+          <a:bodyPr rtlCol="0" anchor="ctr"/>
+          <a:lstStyle/>
+          <a:p>
+            <a:pPr algn="ctr"/>
+          </a:p>
+        </p:txBody>
+      </p:sp>
+      <p:sp>
+        <p:nvSpPr>
+          <p:cNvPr id="19" name="TextBox 18"/>
+          <p:cNvSpPr txBox="1"/>
+          <p:nvPr/>
+        </p:nvSpPr>
+        <p:spPr>
+          <a:xfrm>
+            <a:off x="6355080" y="4937760"/>
+            <a:ext cx="1234440" cy="457200"/>
+          </a:xfrm>
+          <a:prstGeom prst="rect">
+            <a:avLst/>
+          </a:prstGeom>
+          <a:noFill/>
+        </p:spPr>
+        <p:txBody>
+          <a:bodyPr wrap="square" anchor="t" lIns="50800" rIns="50800" tIns="25400" bIns="25400">
+            <a:spAutoFit/>
+          </a:bodyPr>
+          <a:lstStyle/>
+          <a:p>
+            <a:pPr algn="ctr">
+              <a:lnSpc>
+                <a:spcPct val="108000"/>
+              </a:lnSpc>
+              <a:spcAft>
+                <a:spcPts val="400"/>
+              </a:spcAft>
+            </a:pPr>
+            <a:r>
+              <a:rPr sz="1400" b="1">
+                <a:solidFill>
+                  <a:srgbClr val="FFFFFF"/>
+                </a:solidFill>
+                <a:latin typeface="微软雅黑"/>
+                <a:ea typeface="微软雅黑"/>
+                <a:cs typeface="微软雅黑"/>
+              </a:rPr>
+              <a:t>拒绝</a:t>
+            </a:r>
+          </a:p>
+        </p:txBody>
+      </p:sp>
+      <p:sp>
+        <p:nvSpPr>
+          <p:cNvPr id="20" name="TextBox 19"/>
+          <p:cNvSpPr txBox="1"/>
+          <p:nvPr/>
+        </p:nvSpPr>
+        <p:spPr>
+          <a:xfrm>
+            <a:off x="7726679" y="4654296"/>
+            <a:ext cx="3886200" cy="960120"/>
+          </a:xfrm>
+          <a:prstGeom prst="rect">
+            <a:avLst/>
+          </a:prstGeom>
+          <a:noFill/>
+        </p:spPr>
+        <p:txBody>
+          <a:bodyPr wrap="square" anchor="ctr" lIns="50800" rIns="50800" tIns="25400" bIns="25400">
+            <a:spAutoFit/>
+          </a:bodyPr>
+          <a:lstStyle/>
+          <a:p>
+            <a:pPr algn="l">
+              <a:lnSpc>
+                <a:spcPct val="108000"/>
+              </a:lnSpc>
+              <a:spcAft>
+                <a:spcPts val="400"/>
+              </a:spcAft>
+            </a:pPr>
+            <a:r>
+              <a:rPr sz="1200" b="0">
+                <a:solidFill>
+                  <a:srgbClr val="222A33"/>
+                </a:solidFill>
+                <a:latin typeface="微软雅黑"/>
+                <a:ea typeface="微软雅黑"/>
+                <a:cs typeface="微软雅黑"/>
+              </a:rPr>
+              <a:t>拒付品牌费 / 拒分成 / 坚持各收各 → 本质“要资源、不让参与收益”，降级为弱合作或退出。</a:t>
+            </a:r>
+          </a:p>
+        </p:txBody>
+      </p:sp>
+      <p:sp>
+        <p:nvSpPr>
+          <p:cNvPr id="21" name="TextBox 20"/>
+          <p:cNvSpPr txBox="1"/>
+          <p:nvPr/>
+        </p:nvSpPr>
+        <p:spPr>
+          <a:xfrm>
+            <a:off x="457200" y="6446520"/>
+            <a:ext cx="8229600" cy="320040"/>
+          </a:xfrm>
+          <a:prstGeom prst="rect">
+            <a:avLst/>
+          </a:prstGeom>
+          <a:noFill/>
+        </p:spPr>
+        <p:txBody>
+          <a:bodyPr wrap="square" anchor="t" lIns="50800" rIns="50800" tIns="25400" bIns="25400">
+            <a:spAutoFit/>
+          </a:bodyPr>
+          <a:lstStyle/>
+          <a:p>
+            <a:pPr algn="l">
+              <a:lnSpc>
+                <a:spcPct val="108000"/>
+              </a:lnSpc>
+              <a:spcAft>
+                <a:spcPts val="400"/>
+              </a:spcAft>
+            </a:pPr>
+            <a:r>
+              <a:rPr sz="900" b="0">
+                <a:solidFill>
+                  <a:srgbClr val="5A636E"/>
+                </a:solidFill>
+                <a:latin typeface="微软雅黑"/>
+                <a:ea typeface="微软雅黑"/>
+                <a:cs typeface="微软雅黑"/>
+              </a:rPr>
+              <a:t>钢铁 × 不动产 × 产业园区 · 跨产业撮合与游学转化平台</a:t>
+            </a:r>
+          </a:p>
+        </p:txBody>
+      </p:sp>
+      <p:sp>
+        <p:nvSpPr>
+          <p:cNvPr id="22" name="TextBox 21"/>
+          <p:cNvSpPr txBox="1"/>
+          <p:nvPr/>
+        </p:nvSpPr>
+        <p:spPr>
+          <a:xfrm>
+            <a:off x="10789920" y="6446520"/>
+            <a:ext cx="1097280" cy="320040"/>
+          </a:xfrm>
+          <a:prstGeom prst="rect">
+            <a:avLst/>
+          </a:prstGeom>
+          <a:noFill/>
+        </p:spPr>
+        <p:txBody>
+          <a:bodyPr wrap="square" anchor="t" lIns="50800" rIns="50800" tIns="25400" bIns="25400">
+            <a:spAutoFit/>
+          </a:bodyPr>
+          <a:lstStyle/>
+          <a:p>
+            <a:pPr algn="r">
+              <a:lnSpc>
+                <a:spcPct val="108000"/>
+              </a:lnSpc>
+              <a:spcAft>
+                <a:spcPts val="400"/>
+              </a:spcAft>
+            </a:pPr>
+            <a:r>
+              <a:rPr sz="900" b="0">
+                <a:solidFill>
+                  <a:srgbClr val="5A636E"/>
+                </a:solidFill>
+                <a:latin typeface="微软雅黑"/>
+                <a:ea typeface="微软雅黑"/>
+                <a:cs typeface="微软雅黑"/>
+              </a:rPr>
+              <a:t>13</a:t>
+            </a:r>
+          </a:p>
+        </p:txBody>
+      </p:sp>
+    </p:spTree>
+  </p:cSld>
+  <p:clrMapOvr>
+    <a:masterClrMapping/>
+  </p:clrMapOvr>
+</p:sld>
+</file>
+
+<file path=ppt/slides/slide14.xml><?xml version="1.0" encoding="utf-8"?>
+<p:sld xmlns:a="http://schemas.openxmlformats.org/drawingml/2006/main" xmlns:p="http://schemas.openxmlformats.org/presentationml/2006/main" xmlns:r="http://schemas.openxmlformats.org/officeDocument/2006/relationships">
+  <p:cSld>
+    <p:spTree>
+      <p:nvGrpSpPr>
+        <p:cNvPr id="1" name=""/>
+        <p:cNvGrpSpPr/>
+        <p:nvPr/>
+      </p:nvGrpSpPr>
+      <p:grpSpPr/>
+      <p:sp>
+        <p:nvSpPr>
+          <p:cNvPr id="2" name="Rectangle 1"/>
+          <p:cNvSpPr/>
+          <p:nvPr/>
+        </p:nvSpPr>
+        <p:spPr>
+          <a:xfrm>
+            <a:off x="0" y="0"/>
+            <a:ext cx="12191695" cy="1051560"/>
+          </a:xfrm>
+          <a:prstGeom prst="rect">
+            <a:avLst/>
+          </a:prstGeom>
+          <a:solidFill>
+            <a:srgbClr val="142B45"/>
+          </a:solidFill>
+          <a:ln>
+            <a:noFill/>
+          </a:ln>
+          <a:effectLst/>
+        </p:spPr>
+        <p:style>
+          <a:lnRef idx="1">
+            <a:schemeClr val="accent1"/>
+          </a:lnRef>
+          <a:fillRef idx="3">
+            <a:schemeClr val="accent1"/>
+          </a:fillRef>
+          <a:effectRef idx="2">
+            <a:schemeClr val="accent1"/>
+          </a:effectRef>
+          <a:fontRef idx="minor">
+            <a:schemeClr val="lt1"/>
+          </a:fontRef>
+        </p:style>
+        <p:txBody>
+          <a:bodyPr rtlCol="0" anchor="ctr"/>
+          <a:lstStyle/>
+          <a:p>
+            <a:pPr algn="ctr"/>
+          </a:p>
+        </p:txBody>
+      </p:sp>
+      <p:sp>
+        <p:nvSpPr>
+          <p:cNvPr id="3" name="Rectangle 2"/>
+          <p:cNvSpPr/>
+          <p:nvPr/>
+        </p:nvSpPr>
+        <p:spPr>
+          <a:xfrm>
+            <a:off x="0" y="1051560"/>
+            <a:ext cx="12191695" cy="38100"/>
+          </a:xfrm>
+          <a:prstGeom prst="rect">
+            <a:avLst/>
+          </a:prstGeom>
+          <a:solidFill>
+            <a:srgbClr val="E88A1A"/>
+          </a:solidFill>
+          <a:ln>
+            <a:noFill/>
+          </a:ln>
+          <a:effectLst/>
+        </p:spPr>
+        <p:style>
+          <a:lnRef idx="1">
+            <a:schemeClr val="accent1"/>
+          </a:lnRef>
+          <a:fillRef idx="3">
+            <a:schemeClr val="accent1"/>
+          </a:fillRef>
+          <a:effectRef idx="2">
+            <a:schemeClr val="accent1"/>
+          </a:effectRef>
+          <a:fontRef idx="minor">
+            <a:schemeClr val="lt1"/>
+          </a:fontRef>
+        </p:style>
+        <p:txBody>
+          <a:bodyPr rtlCol="0" anchor="ctr"/>
+          <a:lstStyle/>
+          <a:p>
+            <a:pPr algn="ctr"/>
+          </a:p>
+        </p:txBody>
+      </p:sp>
+      <p:sp>
+        <p:nvSpPr>
+          <p:cNvPr id="4" name="TextBox 3"/>
+          <p:cNvSpPr txBox="1"/>
+          <p:nvPr/>
+        </p:nvSpPr>
+        <p:spPr>
+          <a:xfrm>
+            <a:off x="457200" y="109728"/>
+            <a:ext cx="5486400" cy="365760"/>
+          </a:xfrm>
+          <a:prstGeom prst="rect">
+            <a:avLst/>
+          </a:prstGeom>
+          <a:noFill/>
+        </p:spPr>
+        <p:txBody>
+          <a:bodyPr wrap="square" anchor="t" lIns="50800" rIns="50800" tIns="25400" bIns="25400">
+            <a:spAutoFit/>
+          </a:bodyPr>
+          <a:lstStyle/>
+          <a:p>
+            <a:pPr algn="l">
+              <a:lnSpc>
+                <a:spcPct val="108000"/>
+              </a:lnSpc>
+              <a:spcAft>
+                <a:spcPts val="400"/>
+              </a:spcAft>
+            </a:pPr>
+            <a:r>
+              <a:rPr sz="1300" b="1">
+                <a:solidFill>
+                  <a:srgbClr val="E88A1A"/>
+                </a:solidFill>
+                <a:latin typeface="微软雅黑"/>
+                <a:ea typeface="微软雅黑"/>
+                <a:cs typeface="微软雅黑"/>
+              </a:rPr>
+              <a:t>对外话术</a:t>
+            </a:r>
+          </a:p>
+        </p:txBody>
+      </p:sp>
+      <p:sp>
+        <p:nvSpPr>
+          <p:cNvPr id="5" name="TextBox 4"/>
+          <p:cNvSpPr txBox="1"/>
+          <p:nvPr/>
+        </p:nvSpPr>
+        <p:spPr>
+          <a:xfrm>
+            <a:off x="457200" y="384048"/>
+            <a:ext cx="11247120" cy="658368"/>
+          </a:xfrm>
+          <a:prstGeom prst="rect">
+            <a:avLst/>
+          </a:prstGeom>
+          <a:noFill/>
+        </p:spPr>
+        <p:txBody>
+          <a:bodyPr wrap="square" anchor="t" lIns="50800" rIns="50800" tIns="25400" bIns="25400">
+            <a:spAutoFit/>
+          </a:bodyPr>
+          <a:lstStyle/>
+          <a:p>
+            <a:pPr algn="l">
+              <a:lnSpc>
+                <a:spcPct val="108000"/>
+              </a:lnSpc>
+              <a:spcAft>
+                <a:spcPts val="400"/>
+              </a:spcAft>
+            </a:pPr>
+            <a:r>
+              <a:rPr sz="2500" b="1">
+                <a:solidFill>
+                  <a:srgbClr val="FFFFFF"/>
+                </a:solidFill>
+                <a:latin typeface="微软雅黑"/>
+                <a:ea typeface="微软雅黑"/>
+                <a:cs typeface="微软雅黑"/>
+              </a:rPr>
+              <a:t>对外沟通话术（可直接用）</a:t>
+            </a:r>
+          </a:p>
+          <a:p>
+            <a:pPr algn="l">
+              <a:lnSpc>
+                <a:spcPct val="108000"/>
+              </a:lnSpc>
+              <a:spcAft>
+                <a:spcPts val="400"/>
+              </a:spcAft>
+            </a:pPr>
+            <a:r>
+              <a:rPr sz="1300" b="0">
+                <a:solidFill>
+                  <a:srgbClr val="C9D6E3"/>
+                </a:solidFill>
+                <a:latin typeface="微软雅黑"/>
+                <a:ea typeface="微软雅黑"/>
+                <a:cs typeface="微软雅黑"/>
+              </a:rPr>
+              <a:t>先肯定、再升维、合理化收费、导向长期合作</a:t>
+            </a:r>
+          </a:p>
+        </p:txBody>
+      </p:sp>
+      <p:sp>
+        <p:nvSpPr>
+          <p:cNvPr id="6" name="Rectangle 5"/>
+          <p:cNvSpPr/>
+          <p:nvPr/>
+        </p:nvSpPr>
+        <p:spPr>
+          <a:xfrm>
+            <a:off x="457200" y="1325880"/>
+            <a:ext cx="11247120" cy="2331720"/>
+          </a:xfrm>
+          <a:prstGeom prst="rect">
+            <a:avLst/>
+          </a:prstGeom>
+          <a:solidFill>
+            <a:srgbClr val="EEF3F8"/>
+          </a:solidFill>
+          <a:ln w="12700">
+            <a:solidFill>
+              <a:srgbClr val="D5DEE8"/>
+            </a:solidFill>
+          </a:ln>
+          <a:effectLst/>
+        </p:spPr>
+        <p:style>
+          <a:lnRef idx="1">
+            <a:schemeClr val="accent1"/>
+          </a:lnRef>
+          <a:fillRef idx="3">
+            <a:schemeClr val="accent1"/>
+          </a:fillRef>
+          <a:effectRef idx="2">
+            <a:schemeClr val="accent1"/>
+          </a:effectRef>
+          <a:fontRef idx="minor">
+            <a:schemeClr val="lt1"/>
+          </a:fontRef>
+        </p:style>
+        <p:txBody>
+          <a:bodyPr rtlCol="0" anchor="ctr"/>
+          <a:lstStyle/>
+          <a:p>
+            <a:pPr algn="ctr"/>
+          </a:p>
+        </p:txBody>
+      </p:sp>
+      <p:sp>
+        <p:nvSpPr>
+          <p:cNvPr id="7" name="Rectangle 6"/>
+          <p:cNvSpPr/>
+          <p:nvPr/>
+        </p:nvSpPr>
+        <p:spPr>
+          <a:xfrm>
+            <a:off x="457200" y="1325880"/>
+            <a:ext cx="128016" cy="2331720"/>
+          </a:xfrm>
+          <a:prstGeom prst="rect">
+            <a:avLst/>
+          </a:prstGeom>
+          <a:solidFill>
+            <a:srgbClr val="2E6DA4"/>
+          </a:solidFill>
+          <a:ln>
+            <a:noFill/>
+          </a:ln>
+          <a:effectLst/>
+        </p:spPr>
+        <p:style>
+          <a:lnRef idx="1">
+            <a:schemeClr val="accent1"/>
+          </a:lnRef>
+          <a:fillRef idx="3">
+            <a:schemeClr val="accent1"/>
+          </a:fillRef>
+          <a:effectRef idx="2">
+            <a:schemeClr val="accent1"/>
+          </a:effectRef>
+          <a:fontRef idx="minor">
+            <a:schemeClr val="lt1"/>
+          </a:fontRef>
+        </p:style>
+        <p:txBody>
+          <a:bodyPr rtlCol="0" anchor="ctr"/>
+          <a:lstStyle/>
+          <a:p>
+            <a:pPr algn="ctr"/>
+          </a:p>
+        </p:txBody>
+      </p:sp>
+      <p:sp>
+        <p:nvSpPr>
+          <p:cNvPr id="8" name="TextBox 7"/>
+          <p:cNvSpPr txBox="1"/>
+          <p:nvPr/>
+        </p:nvSpPr>
+        <p:spPr>
+          <a:xfrm>
+            <a:off x="731520" y="1463040"/>
+            <a:ext cx="10789920" cy="2103120"/>
+          </a:xfrm>
+          <a:prstGeom prst="rect">
+            <a:avLst/>
+          </a:prstGeom>
+          <a:noFill/>
+        </p:spPr>
+        <p:txBody>
+          <a:bodyPr wrap="square" anchor="t" lIns="50800" rIns="50800" tIns="25400" bIns="25400">
+            <a:spAutoFit/>
+          </a:bodyPr>
+          <a:lstStyle/>
+          <a:p>
+            <a:pPr algn="l">
+              <a:lnSpc>
+                <a:spcPct val="108000"/>
+              </a:lnSpc>
+              <a:spcAft>
+                <a:spcPts val="800"/>
+              </a:spcAft>
+            </a:pPr>
+            <a:r>
+              <a:rPr sz="1300" b="1">
+                <a:solidFill>
+                  <a:srgbClr val="2E6DA4"/>
+                </a:solidFill>
+                <a:latin typeface="微软雅黑"/>
+                <a:ea typeface="微软雅黑"/>
+                <a:cs typeface="微软雅黑"/>
+              </a:rPr>
+              <a:t>① 商业升维版（试水）</a:t>
+            </a:r>
+          </a:p>
+          <a:p>
+            <a:pPr algn="l">
+              <a:lnSpc>
+                <a:spcPct val="108000"/>
+              </a:lnSpc>
+              <a:spcAft>
+                <a:spcPts val="400"/>
+              </a:spcAft>
+            </a:pPr>
+            <a:r>
+              <a:rPr sz="1200" b="0">
+                <a:solidFill>
+                  <a:srgbClr val="222A33"/>
+                </a:solidFill>
+                <a:latin typeface="微软雅黑"/>
+                <a:ea typeface="微软雅黑"/>
+                <a:cs typeface="微软雅黑"/>
+              </a:rPr>
+              <a:t>前期活动是基于双方资源互补的初步尝试，也验证了这个方向在钢铁产业与长三角资源对接上的可行性。从实际执行看，这类参访游学已不是简单的活动组织，而是涉及复旦品牌背书、政产学资源协调与高质量企业对接的系统性产品。基于此，后续若持续推进，建议升级为更标准化的联合主办合作模式，对双方也更可持续。具体而言，我方承担整体产品设计、复旦品牌及相关资源对接，因此每期活动建议设置基础的品牌与资源服务费；同时在招生或会员转化部分设计更合理的分成机制，确保双方投入与收益匹配。如您这边认可，我们可就下一期的合作模式与具体结构再细化对齐。</a:t>
+            </a:r>
+          </a:p>
+        </p:txBody>
+      </p:sp>
+      <p:sp>
+        <p:nvSpPr>
+          <p:cNvPr id="9" name="Rectangle 8"/>
+          <p:cNvSpPr/>
+          <p:nvPr/>
+        </p:nvSpPr>
+        <p:spPr>
+          <a:xfrm>
+            <a:off x="457200" y="3840480"/>
+            <a:ext cx="11247120" cy="2240280"/>
+          </a:xfrm>
+          <a:prstGeom prst="rect">
+            <a:avLst/>
+          </a:prstGeom>
+          <a:solidFill>
+            <a:srgbClr val="EEF3F8"/>
+          </a:solidFill>
+          <a:ln w="12700">
+            <a:solidFill>
+              <a:srgbClr val="D5DEE8"/>
+            </a:solidFill>
+          </a:ln>
+          <a:effectLst/>
+        </p:spPr>
+        <p:style>
+          <a:lnRef idx="1">
+            <a:schemeClr val="accent1"/>
+          </a:lnRef>
+          <a:fillRef idx="3">
+            <a:schemeClr val="accent1"/>
+          </a:fillRef>
+          <a:effectRef idx="2">
+            <a:schemeClr val="accent1"/>
+          </a:effectRef>
+          <a:fontRef idx="minor">
+            <a:schemeClr val="lt1"/>
+          </a:fontRef>
+        </p:style>
+        <p:txBody>
+          <a:bodyPr rtlCol="0" anchor="ctr"/>
+          <a:lstStyle/>
+          <a:p>
+            <a:pPr algn="ctr"/>
+          </a:p>
+        </p:txBody>
+      </p:sp>
+      <p:sp>
+        <p:nvSpPr>
+          <p:cNvPr id="10" name="Rectangle 9"/>
+          <p:cNvSpPr/>
+          <p:nvPr/>
+        </p:nvSpPr>
+        <p:spPr>
+          <a:xfrm>
+            <a:off x="457200" y="3840480"/>
+            <a:ext cx="128016" cy="2240280"/>
+          </a:xfrm>
+          <a:prstGeom prst="rect">
+            <a:avLst/>
+          </a:prstGeom>
+          <a:solidFill>
+            <a:srgbClr val="E88A1A"/>
+          </a:solidFill>
+          <a:ln>
+            <a:noFill/>
+          </a:ln>
+          <a:effectLst/>
+        </p:spPr>
+        <p:style>
+          <a:lnRef idx="1">
+            <a:schemeClr val="accent1"/>
+          </a:lnRef>
+          <a:fillRef idx="3">
+            <a:schemeClr val="accent1"/>
+          </a:fillRef>
+          <a:effectRef idx="2">
+            <a:schemeClr val="accent1"/>
+          </a:effectRef>
+          <a:fontRef idx="minor">
+            <a:schemeClr val="lt1"/>
+          </a:fontRef>
+        </p:style>
+        <p:txBody>
+          <a:bodyPr rtlCol="0" anchor="ctr"/>
+          <a:lstStyle/>
+          <a:p>
+            <a:pPr algn="ctr"/>
+          </a:p>
+        </p:txBody>
+      </p:sp>
+      <p:sp>
+        <p:nvSpPr>
+          <p:cNvPr id="11" name="TextBox 10"/>
+          <p:cNvSpPr txBox="1"/>
+          <p:nvPr/>
+        </p:nvSpPr>
+        <p:spPr>
+          <a:xfrm>
+            <a:off x="731520" y="3977639"/>
+            <a:ext cx="10789920" cy="2011680"/>
+          </a:xfrm>
+          <a:prstGeom prst="rect">
+            <a:avLst/>
+          </a:prstGeom>
+          <a:noFill/>
+        </p:spPr>
+        <p:txBody>
+          <a:bodyPr wrap="square" anchor="t" lIns="50800" rIns="50800" tIns="25400" bIns="25400">
+            <a:spAutoFit/>
+          </a:bodyPr>
+          <a:lstStyle/>
+          <a:p>
+            <a:pPr algn="l">
+              <a:lnSpc>
+                <a:spcPct val="108000"/>
+              </a:lnSpc>
+              <a:spcAft>
+                <a:spcPts val="800"/>
+              </a:spcAft>
+            </a:pPr>
+            <a:r>
+              <a:rPr sz="1300" b="1">
+                <a:solidFill>
+                  <a:srgbClr val="E88A1A"/>
+                </a:solidFill>
+                <a:latin typeface="微软雅黑"/>
+                <a:ea typeface="微软雅黑"/>
+                <a:cs typeface="微软雅黑"/>
+              </a:rPr>
+              <a:t>② 战略高位切入版（正式磋商）</a:t>
+            </a:r>
+          </a:p>
+          <a:p>
+            <a:pPr algn="l">
+              <a:lnSpc>
+                <a:spcPct val="108000"/>
+              </a:lnSpc>
+              <a:spcAft>
+                <a:spcPts val="400"/>
+              </a:spcAft>
+            </a:pPr>
+            <a:r>
+              <a:rPr sz="1200" b="0">
+                <a:solidFill>
+                  <a:srgbClr val="222A33"/>
+                </a:solidFill>
+                <a:latin typeface="微软雅黑"/>
+                <a:ea typeface="微软雅黑"/>
+                <a:cs typeface="微软雅黑"/>
+              </a:rPr>
+              <a:t>这两天的行程，从会务与接待成本上，各自独立核算没有问题。但从产业逻辑看，中国钢铁工业协会带上游供应商来，核心痛点是找下游的去化场景；我方中心与科企联出面，等于用在长三角沉淀多年的学术公信力和真实买方网络，为钢铁企业做信任背书与精准导流。你们有成熟的会员体系，这是好事；但要确保这种高势能的品牌输出与资源对接在商业上形成良性闭环，而不是单向消耗。为让模式长期玩下去，我方梳理了一个联合主办合作框架——在收益分成或前端品牌费用上，看哪种模式更契合你们的预算与长期诉求。</a:t>
+            </a:r>
+          </a:p>
+        </p:txBody>
+      </p:sp>
+      <p:sp>
+        <p:nvSpPr>
+          <p:cNvPr id="12" name="TextBox 11"/>
+          <p:cNvSpPr txBox="1"/>
+          <p:nvPr/>
+        </p:nvSpPr>
+        <p:spPr>
+          <a:xfrm>
+            <a:off x="457200" y="6446520"/>
+            <a:ext cx="8229600" cy="320040"/>
+          </a:xfrm>
+          <a:prstGeom prst="rect">
+            <a:avLst/>
+          </a:prstGeom>
+          <a:noFill/>
+        </p:spPr>
+        <p:txBody>
+          <a:bodyPr wrap="square" anchor="t" lIns="50800" rIns="50800" tIns="25400" bIns="25400">
+            <a:spAutoFit/>
+          </a:bodyPr>
+          <a:lstStyle/>
+          <a:p>
+            <a:pPr algn="l">
+              <a:lnSpc>
+                <a:spcPct val="108000"/>
+              </a:lnSpc>
+              <a:spcAft>
+                <a:spcPts val="400"/>
+              </a:spcAft>
+            </a:pPr>
+            <a:r>
+              <a:rPr sz="900" b="0">
+                <a:solidFill>
+                  <a:srgbClr val="5A636E"/>
+                </a:solidFill>
+                <a:latin typeface="微软雅黑"/>
+                <a:ea typeface="微软雅黑"/>
+                <a:cs typeface="微软雅黑"/>
+              </a:rPr>
+              <a:t>钢铁 × 不动产 × 产业园区 · 跨产业撮合与游学转化平台</a:t>
+            </a:r>
+          </a:p>
+        </p:txBody>
+      </p:sp>
+      <p:sp>
+        <p:nvSpPr>
+          <p:cNvPr id="13" name="TextBox 12"/>
+          <p:cNvSpPr txBox="1"/>
+          <p:nvPr/>
+        </p:nvSpPr>
+        <p:spPr>
+          <a:xfrm>
+            <a:off x="10789920" y="6446520"/>
+            <a:ext cx="1097280" cy="320040"/>
+          </a:xfrm>
+          <a:prstGeom prst="rect">
+            <a:avLst/>
+          </a:prstGeom>
+          <a:noFill/>
+        </p:spPr>
+        <p:txBody>
+          <a:bodyPr wrap="square" anchor="t" lIns="50800" rIns="50800" tIns="25400" bIns="25400">
+            <a:spAutoFit/>
+          </a:bodyPr>
+          <a:lstStyle/>
+          <a:p>
+            <a:pPr algn="r">
+              <a:lnSpc>
+                <a:spcPct val="108000"/>
+              </a:lnSpc>
+              <a:spcAft>
+                <a:spcPts val="400"/>
+              </a:spcAft>
+            </a:pPr>
+            <a:r>
+              <a:rPr sz="900" b="0">
+                <a:solidFill>
+                  <a:srgbClr val="5A636E"/>
+                </a:solidFill>
+                <a:latin typeface="微软雅黑"/>
+                <a:ea typeface="微软雅黑"/>
+                <a:cs typeface="微软雅黑"/>
+              </a:rPr>
+              <a:t>14</a:t>
+            </a:r>
+          </a:p>
+        </p:txBody>
+      </p:sp>
+    </p:spTree>
+  </p:cSld>
+  <p:clrMapOvr>
+    <a:masterClrMapping/>
+  </p:clrMapOvr>
+</p:sld>
+</file>
+
+<file path=ppt/slides/slide15.xml><?xml version="1.0" encoding="utf-8"?>
+<p:sld xmlns:a="http://schemas.openxmlformats.org/drawingml/2006/main" xmlns:p="http://schemas.openxmlformats.org/presentationml/2006/main" xmlns:r="http://schemas.openxmlformats.org/officeDocument/2006/relationships">
+  <p:cSld>
+    <p:spTree>
+      <p:nvGrpSpPr>
+        <p:cNvPr id="1" name=""/>
+        <p:cNvGrpSpPr/>
+        <p:nvPr/>
+      </p:nvGrpSpPr>
+      <p:grpSpPr/>
+      <p:sp>
+        <p:nvSpPr>
+          <p:cNvPr id="2" name="Rectangle 1"/>
+          <p:cNvSpPr/>
+          <p:nvPr/>
+        </p:nvSpPr>
+        <p:spPr>
+          <a:xfrm>
+            <a:off x="0" y="0"/>
+            <a:ext cx="12191695" cy="1051560"/>
+          </a:xfrm>
+          <a:prstGeom prst="rect">
+            <a:avLst/>
+          </a:prstGeom>
+          <a:solidFill>
+            <a:srgbClr val="142B45"/>
+          </a:solidFill>
+          <a:ln>
+            <a:noFill/>
+          </a:ln>
+          <a:effectLst/>
+        </p:spPr>
+        <p:style>
+          <a:lnRef idx="1">
+            <a:schemeClr val="accent1"/>
+          </a:lnRef>
+          <a:fillRef idx="3">
+            <a:schemeClr val="accent1"/>
+          </a:fillRef>
+          <a:effectRef idx="2">
+            <a:schemeClr val="accent1"/>
+          </a:effectRef>
+          <a:fontRef idx="minor">
+            <a:schemeClr val="lt1"/>
+          </a:fontRef>
+        </p:style>
+        <p:txBody>
+          <a:bodyPr rtlCol="0" anchor="ctr"/>
+          <a:lstStyle/>
+          <a:p>
+            <a:pPr algn="ctr"/>
+          </a:p>
+        </p:txBody>
+      </p:sp>
+      <p:sp>
+        <p:nvSpPr>
+          <p:cNvPr id="3" name="Rectangle 2"/>
+          <p:cNvSpPr/>
+          <p:nvPr/>
+        </p:nvSpPr>
+        <p:spPr>
+          <a:xfrm>
+            <a:off x="0" y="1051560"/>
+            <a:ext cx="12191695" cy="38100"/>
+          </a:xfrm>
+          <a:prstGeom prst="rect">
+            <a:avLst/>
+          </a:prstGeom>
+          <a:solidFill>
+            <a:srgbClr val="E88A1A"/>
+          </a:solidFill>
+          <a:ln>
+            <a:noFill/>
+          </a:ln>
+          <a:effectLst/>
+        </p:spPr>
+        <p:style>
+          <a:lnRef idx="1">
+            <a:schemeClr val="accent1"/>
+          </a:lnRef>
+          <a:fillRef idx="3">
+            <a:schemeClr val="accent1"/>
+          </a:fillRef>
+          <a:effectRef idx="2">
+            <a:schemeClr val="accent1"/>
+          </a:effectRef>
+          <a:fontRef idx="minor">
+            <a:schemeClr val="lt1"/>
+          </a:fontRef>
+        </p:style>
+        <p:txBody>
+          <a:bodyPr rtlCol="0" anchor="ctr"/>
+          <a:lstStyle/>
+          <a:p>
+            <a:pPr algn="ctr"/>
+          </a:p>
+        </p:txBody>
+      </p:sp>
+      <p:sp>
+        <p:nvSpPr>
+          <p:cNvPr id="4" name="TextBox 3"/>
+          <p:cNvSpPr txBox="1"/>
+          <p:nvPr/>
+        </p:nvSpPr>
+        <p:spPr>
+          <a:xfrm>
+            <a:off x="457200" y="109728"/>
+            <a:ext cx="5486400" cy="365760"/>
+          </a:xfrm>
+          <a:prstGeom prst="rect">
+            <a:avLst/>
+          </a:prstGeom>
+          <a:noFill/>
+        </p:spPr>
+        <p:txBody>
+          <a:bodyPr wrap="square" anchor="t" lIns="50800" rIns="50800" tIns="25400" bIns="25400">
+            <a:spAutoFit/>
+          </a:bodyPr>
+          <a:lstStyle/>
+          <a:p>
+            <a:pPr algn="l">
+              <a:lnSpc>
+                <a:spcPct val="108000"/>
+              </a:lnSpc>
+              <a:spcAft>
+                <a:spcPts val="400"/>
+              </a:spcAft>
+            </a:pPr>
+            <a:r>
+              <a:rPr sz="1300" b="1">
+                <a:solidFill>
+                  <a:srgbClr val="E88A1A"/>
+                </a:solidFill>
+                <a:latin typeface="微软雅黑"/>
+                <a:ea typeface="微软雅黑"/>
+                <a:cs typeface="微软雅黑"/>
+              </a:rPr>
+              <a:t>目标</a:t>
+            </a:r>
+          </a:p>
+        </p:txBody>
+      </p:sp>
+      <p:sp>
+        <p:nvSpPr>
+          <p:cNvPr id="5" name="TextBox 4"/>
+          <p:cNvSpPr txBox="1"/>
+          <p:nvPr/>
+        </p:nvSpPr>
+        <p:spPr>
+          <a:xfrm>
+            <a:off x="457200" y="384048"/>
+            <a:ext cx="11247120" cy="658368"/>
+          </a:xfrm>
+          <a:prstGeom prst="rect">
+            <a:avLst/>
+          </a:prstGeom>
+          <a:noFill/>
+        </p:spPr>
+        <p:txBody>
+          <a:bodyPr wrap="square" anchor="t" lIns="50800" rIns="50800" tIns="25400" bIns="25400">
+            <a:spAutoFit/>
+          </a:bodyPr>
+          <a:lstStyle/>
+          <a:p>
+            <a:pPr algn="l">
+              <a:lnSpc>
+                <a:spcPct val="108000"/>
+              </a:lnSpc>
+              <a:spcAft>
+                <a:spcPts val="400"/>
+              </a:spcAft>
+            </a:pPr>
+            <a:r>
+              <a:rPr sz="2500" b="1">
+                <a:solidFill>
+                  <a:srgbClr val="FFFFFF"/>
+                </a:solidFill>
+                <a:latin typeface="微软雅黑"/>
+                <a:ea typeface="微软雅黑"/>
+                <a:cs typeface="微软雅黑"/>
+              </a:rPr>
+              <a:t>目标里程碑 与 战略定位</a:t>
+            </a:r>
+          </a:p>
+        </p:txBody>
+      </p:sp>
+      <p:sp>
+        <p:nvSpPr>
+          <p:cNvPr id="6" name="Rectangle 5"/>
+          <p:cNvSpPr/>
+          <p:nvPr/>
+        </p:nvSpPr>
+        <p:spPr>
+          <a:xfrm>
+            <a:off x="457200" y="1554480"/>
+            <a:ext cx="11247120" cy="1051560"/>
+          </a:xfrm>
+          <a:prstGeom prst="rect">
+            <a:avLst/>
+          </a:prstGeom>
+          <a:solidFill>
+            <a:srgbClr val="EEF3F8"/>
+          </a:solidFill>
+          <a:ln w="12700">
+            <a:solidFill>
+              <a:srgbClr val="D5DEE8"/>
+            </a:solidFill>
+          </a:ln>
+          <a:effectLst/>
+        </p:spPr>
+        <p:style>
+          <a:lnRef idx="1">
+            <a:schemeClr val="accent1"/>
+          </a:lnRef>
+          <a:fillRef idx="3">
+            <a:schemeClr val="accent1"/>
+          </a:fillRef>
+          <a:effectRef idx="2">
+            <a:schemeClr val="accent1"/>
+          </a:effectRef>
+          <a:fontRef idx="minor">
+            <a:schemeClr val="lt1"/>
+          </a:fontRef>
+        </p:style>
+        <p:txBody>
+          <a:bodyPr rtlCol="0" anchor="ctr"/>
+          <a:lstStyle/>
+          <a:p>
+            <a:pPr algn="ctr"/>
+          </a:p>
+        </p:txBody>
+      </p:sp>
+      <p:sp>
+        <p:nvSpPr>
+          <p:cNvPr id="7" name="Rectangle 6"/>
+          <p:cNvSpPr/>
+          <p:nvPr/>
+        </p:nvSpPr>
+        <p:spPr>
+          <a:xfrm>
+            <a:off x="457200" y="1554480"/>
+            <a:ext cx="1828800" cy="1051560"/>
+          </a:xfrm>
+          <a:prstGeom prst="rect">
+            <a:avLst/>
+          </a:prstGeom>
+          <a:solidFill>
+            <a:srgbClr val="1F4E79"/>
+          </a:solidFill>
+          <a:ln>
+            <a:noFill/>
+          </a:ln>
+          <a:effectLst/>
+        </p:spPr>
+        <p:style>
+          <a:lnRef idx="1">
+            <a:schemeClr val="accent1"/>
+          </a:lnRef>
+          <a:fillRef idx="3">
+            <a:schemeClr val="accent1"/>
+          </a:fillRef>
+          <a:effectRef idx="2">
+            <a:schemeClr val="accent1"/>
+          </a:effectRef>
+          <a:fontRef idx="minor">
+            <a:schemeClr val="lt1"/>
+          </a:fontRef>
+        </p:style>
+        <p:txBody>
+          <a:bodyPr rtlCol="0" anchor="ctr"/>
+          <a:lstStyle/>
+          <a:p>
+            <a:pPr algn="ctr"/>
+          </a:p>
+        </p:txBody>
+      </p:sp>
+      <p:sp>
+        <p:nvSpPr>
+          <p:cNvPr id="8" name="TextBox 7"/>
+          <p:cNvSpPr txBox="1"/>
+          <p:nvPr/>
+        </p:nvSpPr>
+        <p:spPr>
+          <a:xfrm>
+            <a:off x="502920" y="1874520"/>
+            <a:ext cx="1737360" cy="457200"/>
+          </a:xfrm>
+          <a:prstGeom prst="rect">
+            <a:avLst/>
+          </a:prstGeom>
+          <a:noFill/>
+        </p:spPr>
+        <p:txBody>
+          <a:bodyPr wrap="square" anchor="t" lIns="50800" rIns="50800" tIns="25400" bIns="25400">
+            <a:spAutoFit/>
+          </a:bodyPr>
+          <a:lstStyle/>
+          <a:p>
+            <a:pPr algn="ctr">
+              <a:lnSpc>
+                <a:spcPct val="108000"/>
+              </a:lnSpc>
+              <a:spcAft>
+                <a:spcPts val="400"/>
+              </a:spcAft>
+            </a:pPr>
+            <a:r>
+              <a:rPr sz="1500" b="1">
+                <a:solidFill>
+                  <a:srgbClr val="FFFFFF"/>
+                </a:solidFill>
+                <a:latin typeface="微软雅黑"/>
+                <a:ea typeface="微软雅黑"/>
+                <a:cs typeface="微软雅黑"/>
+              </a:rPr>
+              <a:t>下一期</a:t>
+            </a:r>
+          </a:p>
+        </p:txBody>
+      </p:sp>
+      <p:sp>
+        <p:nvSpPr>
+          <p:cNvPr id="9" name="TextBox 8"/>
+          <p:cNvSpPr txBox="1"/>
+          <p:nvPr/>
+        </p:nvSpPr>
+        <p:spPr>
+          <a:xfrm>
+            <a:off x="2468880" y="1682496"/>
+            <a:ext cx="9052560" cy="822960"/>
+          </a:xfrm>
+          <a:prstGeom prst="rect">
+            <a:avLst/>
+          </a:prstGeom>
+          <a:noFill/>
+        </p:spPr>
+        <p:txBody>
+          <a:bodyPr wrap="square" anchor="ctr" lIns="50800" rIns="50800" tIns="25400" bIns="25400">
+            <a:spAutoFit/>
+          </a:bodyPr>
+          <a:lstStyle/>
+          <a:p>
+            <a:pPr algn="l">
+              <a:lnSpc>
+                <a:spcPct val="108000"/>
+              </a:lnSpc>
+              <a:spcAft>
+                <a:spcPts val="400"/>
+              </a:spcAft>
+            </a:pPr>
+            <a:r>
+              <a:rPr sz="1350" b="0">
+                <a:solidFill>
+                  <a:srgbClr val="222A33"/>
+                </a:solidFill>
+                <a:latin typeface="微软雅黑"/>
+                <a:ea typeface="微软雅黑"/>
+                <a:cs typeface="微软雅黑"/>
+              </a:rPr>
+              <a:t>以联合主办、对等结构落地，签署《联合主办合作框架与对价清单》</a:t>
+            </a:r>
+          </a:p>
+        </p:txBody>
+      </p:sp>
+      <p:sp>
+        <p:nvSpPr>
+          <p:cNvPr id="10" name="Rectangle 9"/>
+          <p:cNvSpPr/>
+          <p:nvPr/>
+        </p:nvSpPr>
+        <p:spPr>
+          <a:xfrm>
+            <a:off x="457200" y="2788920"/>
+            <a:ext cx="11247120" cy="1051560"/>
+          </a:xfrm>
+          <a:prstGeom prst="rect">
+            <a:avLst/>
+          </a:prstGeom>
+          <a:solidFill>
+            <a:srgbClr val="EEF3F8"/>
+          </a:solidFill>
+          <a:ln w="12700">
+            <a:solidFill>
+              <a:srgbClr val="D5DEE8"/>
+            </a:solidFill>
+          </a:ln>
+          <a:effectLst/>
+        </p:spPr>
+        <p:style>
+          <a:lnRef idx="1">
+            <a:schemeClr val="accent1"/>
+          </a:lnRef>
+          <a:fillRef idx="3">
+            <a:schemeClr val="accent1"/>
+          </a:fillRef>
+          <a:effectRef idx="2">
+            <a:schemeClr val="accent1"/>
+          </a:effectRef>
+          <a:fontRef idx="minor">
+            <a:schemeClr val="lt1"/>
+          </a:fontRef>
+        </p:style>
+        <p:txBody>
+          <a:bodyPr rtlCol="0" anchor="ctr"/>
+          <a:lstStyle/>
+          <a:p>
+            <a:pPr algn="ctr"/>
+          </a:p>
+        </p:txBody>
+      </p:sp>
+      <p:sp>
+        <p:nvSpPr>
+          <p:cNvPr id="11" name="Rectangle 10"/>
+          <p:cNvSpPr/>
+          <p:nvPr/>
+        </p:nvSpPr>
+        <p:spPr>
+          <a:xfrm>
+            <a:off x="457200" y="2788920"/>
+            <a:ext cx="1828800" cy="1051560"/>
+          </a:xfrm>
+          <a:prstGeom prst="rect">
+            <a:avLst/>
+          </a:prstGeom>
+          <a:solidFill>
+            <a:srgbClr val="1F4E79"/>
+          </a:solidFill>
+          <a:ln>
+            <a:noFill/>
+          </a:ln>
+          <a:effectLst/>
+        </p:spPr>
+        <p:style>
+          <a:lnRef idx="1">
+            <a:schemeClr val="accent1"/>
+          </a:lnRef>
+          <a:fillRef idx="3">
+            <a:schemeClr val="accent1"/>
+          </a:fillRef>
+          <a:effectRef idx="2">
+            <a:schemeClr val="accent1"/>
+          </a:effectRef>
+          <a:fontRef idx="minor">
+            <a:schemeClr val="lt1"/>
+          </a:fontRef>
+        </p:style>
+        <p:txBody>
+          <a:bodyPr rtlCol="0" anchor="ctr"/>
+          <a:lstStyle/>
+          <a:p>
+            <a:pPr algn="ctr"/>
+          </a:p>
+        </p:txBody>
+      </p:sp>
+      <p:sp>
+        <p:nvSpPr>
+          <p:cNvPr id="12" name="TextBox 11"/>
+          <p:cNvSpPr txBox="1"/>
+          <p:nvPr/>
+        </p:nvSpPr>
+        <p:spPr>
+          <a:xfrm>
+            <a:off x="502920" y="3108960"/>
+            <a:ext cx="1737360" cy="457200"/>
+          </a:xfrm>
+          <a:prstGeom prst="rect">
+            <a:avLst/>
+          </a:prstGeom>
+          <a:noFill/>
+        </p:spPr>
+        <p:txBody>
+          <a:bodyPr wrap="square" anchor="t" lIns="50800" rIns="50800" tIns="25400" bIns="25400">
+            <a:spAutoFit/>
+          </a:bodyPr>
+          <a:lstStyle/>
+          <a:p>
+            <a:pPr algn="ctr">
+              <a:lnSpc>
+                <a:spcPct val="108000"/>
+              </a:lnSpc>
+              <a:spcAft>
+                <a:spcPts val="400"/>
+              </a:spcAft>
+            </a:pPr>
+            <a:r>
+              <a:rPr sz="1500" b="1">
+                <a:solidFill>
+                  <a:srgbClr val="FFFFFF"/>
+                </a:solidFill>
+                <a:latin typeface="微软雅黑"/>
+                <a:ea typeface="微软雅黑"/>
+                <a:cs typeface="微软雅黑"/>
+              </a:rPr>
+              <a:t>中期</a:t>
+            </a:r>
+          </a:p>
+        </p:txBody>
+      </p:sp>
+      <p:sp>
+        <p:nvSpPr>
+          <p:cNvPr id="13" name="TextBox 12"/>
+          <p:cNvSpPr txBox="1"/>
+          <p:nvPr/>
+        </p:nvSpPr>
+        <p:spPr>
+          <a:xfrm>
+            <a:off x="2468880" y="2916936"/>
+            <a:ext cx="9052560" cy="822960"/>
+          </a:xfrm>
+          <a:prstGeom prst="rect">
+            <a:avLst/>
+          </a:prstGeom>
+          <a:noFill/>
+        </p:spPr>
+        <p:txBody>
+          <a:bodyPr wrap="square" anchor="ctr" lIns="50800" rIns="50800" tIns="25400" bIns="25400">
+            <a:spAutoFit/>
+          </a:bodyPr>
+          <a:lstStyle/>
+          <a:p>
+            <a:pPr algn="l">
+              <a:lnSpc>
+                <a:spcPct val="108000"/>
+              </a:lnSpc>
+              <a:spcAft>
+                <a:spcPts val="400"/>
+              </a:spcAft>
+            </a:pPr>
+            <a:r>
+              <a:rPr sz="1350" b="0">
+                <a:solidFill>
+                  <a:srgbClr val="222A33"/>
+                </a:solidFill>
+                <a:latin typeface="微软雅黑"/>
+                <a:ea typeface="微软雅黑"/>
+                <a:cs typeface="微软雅黑"/>
+              </a:rPr>
+              <a:t>跑通会员转化分佣与撮合居间，形成清晰、可追溯的分成落位</a:t>
+            </a:r>
+          </a:p>
+        </p:txBody>
+      </p:sp>
+      <p:sp>
+        <p:nvSpPr>
+          <p:cNvPr id="14" name="Rectangle 13"/>
+          <p:cNvSpPr/>
+          <p:nvPr/>
+        </p:nvSpPr>
+        <p:spPr>
+          <a:xfrm>
+            <a:off x="457200" y="4023360"/>
+            <a:ext cx="11247120" cy="1051560"/>
+          </a:xfrm>
+          <a:prstGeom prst="rect">
+            <a:avLst/>
+          </a:prstGeom>
+          <a:solidFill>
+            <a:srgbClr val="EEF3F8"/>
+          </a:solidFill>
+          <a:ln w="12700">
+            <a:solidFill>
+              <a:srgbClr val="D5DEE8"/>
+            </a:solidFill>
+          </a:ln>
+          <a:effectLst/>
+        </p:spPr>
+        <p:style>
+          <a:lnRef idx="1">
+            <a:schemeClr val="accent1"/>
+          </a:lnRef>
+          <a:fillRef idx="3">
+            <a:schemeClr val="accent1"/>
+          </a:fillRef>
+          <a:effectRef idx="2">
+            <a:schemeClr val="accent1"/>
+          </a:effectRef>
+          <a:fontRef idx="minor">
+            <a:schemeClr val="lt1"/>
+          </a:fontRef>
+        </p:style>
+        <p:txBody>
+          <a:bodyPr rtlCol="0" anchor="ctr"/>
+          <a:lstStyle/>
+          <a:p>
+            <a:pPr algn="ctr"/>
+          </a:p>
+        </p:txBody>
+      </p:sp>
+      <p:sp>
+        <p:nvSpPr>
+          <p:cNvPr id="15" name="Rectangle 14"/>
+          <p:cNvSpPr/>
+          <p:nvPr/>
+        </p:nvSpPr>
+        <p:spPr>
+          <a:xfrm>
+            <a:off x="457200" y="4023360"/>
+            <a:ext cx="1828800" cy="1051560"/>
+          </a:xfrm>
+          <a:prstGeom prst="rect">
+            <a:avLst/>
+          </a:prstGeom>
+          <a:solidFill>
+            <a:srgbClr val="1F4E79"/>
+          </a:solidFill>
+          <a:ln>
+            <a:noFill/>
+          </a:ln>
+          <a:effectLst/>
+        </p:spPr>
+        <p:style>
+          <a:lnRef idx="1">
+            <a:schemeClr val="accent1"/>
+          </a:lnRef>
+          <a:fillRef idx="3">
+            <a:schemeClr val="accent1"/>
+          </a:fillRef>
+          <a:effectRef idx="2">
+            <a:schemeClr val="accent1"/>
+          </a:effectRef>
+          <a:fontRef idx="minor">
+            <a:schemeClr val="lt1"/>
+          </a:fontRef>
+        </p:style>
+        <p:txBody>
+          <a:bodyPr rtlCol="0" anchor="ctr"/>
+          <a:lstStyle/>
+          <a:p>
+            <a:pPr algn="ctr"/>
+          </a:p>
+        </p:txBody>
+      </p:sp>
+      <p:sp>
+        <p:nvSpPr>
+          <p:cNvPr id="16" name="TextBox 15"/>
+          <p:cNvSpPr txBox="1"/>
+          <p:nvPr/>
+        </p:nvSpPr>
+        <p:spPr>
+          <a:xfrm>
+            <a:off x="502920" y="4343400"/>
+            <a:ext cx="1737360" cy="457200"/>
+          </a:xfrm>
+          <a:prstGeom prst="rect">
+            <a:avLst/>
+          </a:prstGeom>
+          <a:noFill/>
+        </p:spPr>
+        <p:txBody>
+          <a:bodyPr wrap="square" anchor="t" lIns="50800" rIns="50800" tIns="25400" bIns="25400">
+            <a:spAutoFit/>
+          </a:bodyPr>
+          <a:lstStyle/>
+          <a:p>
+            <a:pPr algn="ctr">
+              <a:lnSpc>
+                <a:spcPct val="108000"/>
+              </a:lnSpc>
+              <a:spcAft>
+                <a:spcPts val="400"/>
+              </a:spcAft>
+            </a:pPr>
+            <a:r>
+              <a:rPr sz="1500" b="1">
+                <a:solidFill>
+                  <a:srgbClr val="FFFFFF"/>
+                </a:solidFill>
+                <a:latin typeface="微软雅黑"/>
+                <a:ea typeface="微软雅黑"/>
+                <a:cs typeface="微软雅黑"/>
+              </a:rPr>
+              <a:t>战略</a:t>
+            </a:r>
+          </a:p>
+        </p:txBody>
+      </p:sp>
+      <p:sp>
+        <p:nvSpPr>
+          <p:cNvPr id="17" name="TextBox 16"/>
+          <p:cNvSpPr txBox="1"/>
+          <p:nvPr/>
+        </p:nvSpPr>
+        <p:spPr>
+          <a:xfrm>
+            <a:off x="2468880" y="4151376"/>
+            <a:ext cx="9052560" cy="822960"/>
+          </a:xfrm>
+          <a:prstGeom prst="rect">
+            <a:avLst/>
+          </a:prstGeom>
+          <a:noFill/>
+        </p:spPr>
+        <p:txBody>
+          <a:bodyPr wrap="square" anchor="ctr" lIns="50800" rIns="50800" tIns="25400" bIns="25400">
+            <a:spAutoFit/>
+          </a:bodyPr>
+          <a:lstStyle/>
+          <a:p>
+            <a:pPr algn="l">
+              <a:lnSpc>
+                <a:spcPct val="108000"/>
+              </a:lnSpc>
+              <a:spcAft>
+                <a:spcPts val="400"/>
+              </a:spcAft>
+            </a:pPr>
+            <a:r>
+              <a:rPr sz="1350" b="0">
+                <a:solidFill>
+                  <a:srgbClr val="222A33"/>
+                </a:solidFill>
+                <a:latin typeface="微软雅黑"/>
+                <a:ea typeface="微软雅黑"/>
+                <a:cs typeface="微软雅黑"/>
+              </a:rPr>
+              <a:t>与中国钢铁工业协会（总会）签订上海及长三角总战略合作伙伴框架协议</a:t>
+            </a:r>
+          </a:p>
+        </p:txBody>
+      </p:sp>
+      <p:sp>
+        <p:nvSpPr>
+          <p:cNvPr id="18" name="Rectangle 17"/>
+          <p:cNvSpPr/>
+          <p:nvPr/>
+        </p:nvSpPr>
+        <p:spPr>
+          <a:xfrm>
+            <a:off x="457200" y="5486400"/>
+            <a:ext cx="11247120" cy="777240"/>
+          </a:xfrm>
+          <a:prstGeom prst="rect">
+            <a:avLst/>
+          </a:prstGeom>
+          <a:solidFill>
+            <a:srgbClr val="142B45"/>
+          </a:solidFill>
+          <a:ln>
+            <a:noFill/>
+          </a:ln>
+          <a:effectLst/>
+        </p:spPr>
+        <p:style>
+          <a:lnRef idx="1">
+            <a:schemeClr val="accent1"/>
+          </a:lnRef>
+          <a:fillRef idx="3">
+            <a:schemeClr val="accent1"/>
+          </a:fillRef>
+          <a:effectRef idx="2">
+            <a:schemeClr val="accent1"/>
+          </a:effectRef>
+          <a:fontRef idx="minor">
+            <a:schemeClr val="lt1"/>
+          </a:fontRef>
+        </p:style>
+        <p:txBody>
+          <a:bodyPr rtlCol="0" anchor="ctr"/>
+          <a:lstStyle/>
+          <a:p>
+            <a:pPr algn="ctr"/>
+          </a:p>
+        </p:txBody>
+      </p:sp>
+      <p:sp>
+        <p:nvSpPr>
+          <p:cNvPr id="19" name="TextBox 18"/>
+          <p:cNvSpPr txBox="1"/>
+          <p:nvPr/>
+        </p:nvSpPr>
+        <p:spPr>
+          <a:xfrm>
+            <a:off x="640080" y="5596128"/>
+            <a:ext cx="10881360" cy="594360"/>
+          </a:xfrm>
+          <a:prstGeom prst="rect">
+            <a:avLst/>
+          </a:prstGeom>
+          <a:noFill/>
+        </p:spPr>
+        <p:txBody>
+          <a:bodyPr wrap="square" anchor="ctr" lIns="50800" rIns="50800" tIns="25400" bIns="25400">
+            <a:spAutoFit/>
+          </a:bodyPr>
+          <a:lstStyle/>
+          <a:p>
+            <a:pPr algn="l">
+              <a:lnSpc>
+                <a:spcPct val="108000"/>
+              </a:lnSpc>
+              <a:spcAft>
+                <a:spcPts val="400"/>
+              </a:spcAft>
+            </a:pPr>
+            <a:r>
+              <a:rPr sz="1500" b="1">
+                <a:solidFill>
+                  <a:srgbClr val="E88A1A"/>
+                </a:solidFill>
+                <a:latin typeface="微软雅黑"/>
+                <a:ea typeface="微软雅黑"/>
+                <a:cs typeface="微软雅黑"/>
+              </a:rPr>
+              <a:t>面向未来，成为中国钢铁工业协会在上海及长三角区域统筹的【总战略合作伙伴】</a:t>
+            </a:r>
+          </a:p>
+        </p:txBody>
+      </p:sp>
+      <p:sp>
+        <p:nvSpPr>
+          <p:cNvPr id="20" name="TextBox 19"/>
+          <p:cNvSpPr txBox="1"/>
+          <p:nvPr/>
+        </p:nvSpPr>
+        <p:spPr>
+          <a:xfrm>
+            <a:off x="457200" y="6446520"/>
+            <a:ext cx="8229600" cy="320040"/>
+          </a:xfrm>
+          <a:prstGeom prst="rect">
+            <a:avLst/>
+          </a:prstGeom>
+          <a:noFill/>
+        </p:spPr>
+        <p:txBody>
+          <a:bodyPr wrap="square" anchor="t" lIns="50800" rIns="50800" tIns="25400" bIns="25400">
+            <a:spAutoFit/>
+          </a:bodyPr>
+          <a:lstStyle/>
+          <a:p>
+            <a:pPr algn="l">
+              <a:lnSpc>
+                <a:spcPct val="108000"/>
+              </a:lnSpc>
+              <a:spcAft>
+                <a:spcPts val="400"/>
+              </a:spcAft>
+            </a:pPr>
+            <a:r>
+              <a:rPr sz="900" b="0">
+                <a:solidFill>
+                  <a:srgbClr val="5A636E"/>
+                </a:solidFill>
+                <a:latin typeface="微软雅黑"/>
+                <a:ea typeface="微软雅黑"/>
+                <a:cs typeface="微软雅黑"/>
+              </a:rPr>
+              <a:t>钢铁 × 不动产 × 产业园区 · 跨产业撮合与游学转化平台</a:t>
+            </a:r>
+          </a:p>
+        </p:txBody>
+      </p:sp>
+      <p:sp>
+        <p:nvSpPr>
+          <p:cNvPr id="21" name="TextBox 20"/>
+          <p:cNvSpPr txBox="1"/>
+          <p:nvPr/>
+        </p:nvSpPr>
+        <p:spPr>
+          <a:xfrm>
+            <a:off x="10789920" y="6446520"/>
+            <a:ext cx="1097280" cy="320040"/>
+          </a:xfrm>
+          <a:prstGeom prst="rect">
+            <a:avLst/>
+          </a:prstGeom>
+          <a:noFill/>
+        </p:spPr>
+        <p:txBody>
+          <a:bodyPr wrap="square" anchor="t" lIns="50800" rIns="50800" tIns="25400" bIns="25400">
+            <a:spAutoFit/>
+          </a:bodyPr>
+          <a:lstStyle/>
+          <a:p>
+            <a:pPr algn="r">
+              <a:lnSpc>
+                <a:spcPct val="108000"/>
+              </a:lnSpc>
+              <a:spcAft>
+                <a:spcPts val="400"/>
+              </a:spcAft>
+            </a:pPr>
+            <a:r>
+              <a:rPr sz="900" b="0">
+                <a:solidFill>
+                  <a:srgbClr val="5A636E"/>
+                </a:solidFill>
+                <a:latin typeface="微软雅黑"/>
+                <a:ea typeface="微软雅黑"/>
+                <a:cs typeface="微软雅黑"/>
+              </a:rPr>
+              <a:t>15</a:t>
+            </a:r>
+          </a:p>
+        </p:txBody>
+      </p:sp>
+    </p:spTree>
+  </p:cSld>
+  <p:clrMapOvr>
+    <a:masterClrMapping/>
+  </p:clrMapOvr>
+</p:sld>
+</file>
+
+<file path=ppt/slides/slide16.xml><?xml version="1.0" encoding="utf-8"?>
+<p:sld xmlns:a="http://schemas.openxmlformats.org/drawingml/2006/main" xmlns:p="http://schemas.openxmlformats.org/presentationml/2006/main" xmlns:r="http://schemas.openxmlformats.org/officeDocument/2006/relationships">
+  <p:cSld>
+    <p:spTree>
+      <p:nvGrpSpPr>
+        <p:cNvPr id="1" name=""/>
+        <p:cNvGrpSpPr/>
+        <p:nvPr/>
+      </p:nvGrpSpPr>
+      <p:grpSpPr/>
+      <p:sp>
+        <p:nvSpPr>
+          <p:cNvPr id="2" name="Rectangle 1"/>
+          <p:cNvSpPr/>
+          <p:nvPr/>
+        </p:nvSpPr>
+        <p:spPr>
+          <a:xfrm>
+            <a:off x="0" y="0"/>
+            <a:ext cx="12191695" cy="6858000"/>
+          </a:xfrm>
+          <a:prstGeom prst="rect">
+            <a:avLst/>
+          </a:prstGeom>
+          <a:solidFill>
+            <a:srgbClr val="142B45"/>
+          </a:solidFill>
+          <a:ln>
+            <a:noFill/>
+          </a:ln>
+          <a:effectLst/>
+        </p:spPr>
+        <p:style>
+          <a:lnRef idx="1">
+            <a:schemeClr val="accent1"/>
+          </a:lnRef>
+          <a:fillRef idx="3">
+            <a:schemeClr val="accent1"/>
+          </a:fillRef>
+          <a:effectRef idx="2">
+            <a:schemeClr val="accent1"/>
+          </a:effectRef>
+          <a:fontRef idx="minor">
+            <a:schemeClr val="lt1"/>
+          </a:fontRef>
+        </p:style>
+        <p:txBody>
+          <a:bodyPr rtlCol="0" anchor="ctr"/>
+          <a:lstStyle/>
+          <a:p>
+            <a:pPr algn="ctr"/>
+          </a:p>
+        </p:txBody>
+      </p:sp>
+      <p:sp>
+        <p:nvSpPr>
+          <p:cNvPr id="3" name="Rectangle 2"/>
+          <p:cNvSpPr/>
+          <p:nvPr/>
+        </p:nvSpPr>
+        <p:spPr>
+          <a:xfrm>
+            <a:off x="0" y="3200400"/>
+            <a:ext cx="12191695" cy="38100"/>
+          </a:xfrm>
+          <a:prstGeom prst="rect">
+            <a:avLst/>
+          </a:prstGeom>
+          <a:solidFill>
+            <a:srgbClr val="E88A1A"/>
+          </a:solidFill>
+          <a:ln>
+            <a:noFill/>
+          </a:ln>
+          <a:effectLst/>
+        </p:spPr>
+        <p:style>
+          <a:lnRef idx="1">
+            <a:schemeClr val="accent1"/>
+          </a:lnRef>
+          <a:fillRef idx="3">
+            <a:schemeClr val="accent1"/>
+          </a:fillRef>
+          <a:effectRef idx="2">
+            <a:schemeClr val="accent1"/>
+          </a:effectRef>
+          <a:fontRef idx="minor">
+            <a:schemeClr val="lt1"/>
+          </a:fontRef>
+        </p:style>
+        <p:txBody>
+          <a:bodyPr rtlCol="0" anchor="ctr"/>
+          <a:lstStyle/>
+          <a:p>
+            <a:pPr algn="ctr"/>
+          </a:p>
+        </p:txBody>
+      </p:sp>
+      <p:sp>
+        <p:nvSpPr>
+          <p:cNvPr id="4" name="TextBox 3"/>
+          <p:cNvSpPr txBox="1"/>
+          <p:nvPr/>
+        </p:nvSpPr>
+        <p:spPr>
+          <a:xfrm>
+            <a:off x="914400" y="2103120"/>
             <a:ext cx="10332720" cy="914400"/>
           </a:xfrm>
           <a:prstGeom prst="rect">
@@ -5490,7 +8986,7 @@
               </a:spcAft>
             </a:pPr>
             <a:r>
-              <a:rPr sz="2200" b="1">
+              <a:rPr sz="2100" b="1">
                 <a:solidFill>
                   <a:srgbClr val="E88A1A"/>
                 </a:solidFill>
@@ -5498,7 +8994,7 @@
                 <a:ea typeface="微软雅黑"/>
                 <a:cs typeface="微软雅黑"/>
               </a:rPr>
-              <a:t>而是做钢铁产业与地产 / 园区之间的需求撮合与项目转化平台。</a:t>
+              <a:t>而是做钢铁产业与不动产 / 园区之间的需求撮合与项目转化平台。</a:t>
             </a:r>
           </a:p>
         </p:txBody>
@@ -5512,7 +9008,7 @@
         <p:spPr>
           <a:xfrm>
             <a:off x="914400" y="3657600"/>
-            <a:ext cx="10332720" cy="1097280"/>
+            <a:ext cx="10332720" cy="1280160"/>
           </a:xfrm>
           <a:prstGeom prst="rect">
             <a:avLst/>
@@ -5530,11 +9026,11 @@
                 <a:spcPct val="108000"/>
               </a:lnSpc>
               <a:spcAft>
-                <a:spcPts val="800"/>
+                <a:spcPts val="1000"/>
               </a:spcAft>
             </a:pPr>
             <a:r>
-              <a:rPr sz="1600" b="0">
+              <a:rPr sz="1500" b="0">
                 <a:solidFill>
                   <a:srgbClr val="C9D6E3"/>
                 </a:solidFill>
@@ -5542,7 +9038,7 @@
                 <a:ea typeface="微软雅黑"/>
                 <a:cs typeface="微软雅黑"/>
               </a:rPr>
-              <a:t>面向未来，成为中钢协在上海及长三角区域统筹的【总战略合作伙伴】</a:t>
+              <a:t>总会对总会 · 商务对商务 · 对等交流</a:t>
             </a:r>
           </a:p>
           <a:p>
@@ -5563,7 +9059,28 @@
                 <a:ea typeface="微软雅黑"/>
                 <a:cs typeface="微软雅黑"/>
               </a:rPr>
-              <a:t>中钢协流通分会 · 复旦大学住房政策研究中心（房地产研究中心） · 上海市杨浦区科技企业联合会</a:t>
+              <a:t>联合主办：复旦大学住房政策研究中心 · 上海市科技企业联合会 · 上海市杨浦区科技企业联合会</a:t>
+            </a:r>
+          </a:p>
+          <a:p>
+            <a:pPr algn="ctr">
+              <a:lnSpc>
+                <a:spcPct val="108000"/>
+              </a:lnSpc>
+              <a:spcAft>
+                <a:spcPts val="400"/>
+              </a:spcAft>
+            </a:pPr>
+            <a:r>
+              <a:rPr sz="1200" b="0">
+                <a:solidFill>
+                  <a:srgbClr val="C9D6E3"/>
+                </a:solidFill>
+                <a:latin typeface="微软雅黑"/>
+                <a:ea typeface="微软雅黑"/>
+                <a:cs typeface="微软雅黑"/>
+              </a:rPr>
+              <a:t>战略合作（总会对总会）：中国钢铁工业协会</a:t>
             </a:r>
           </a:p>
         </p:txBody>
@@ -5683,7 +9200,7 @@
         <p:spPr>
           <a:xfrm>
             <a:off x="457200" y="109728"/>
-            <a:ext cx="2743200" cy="365760"/>
+            <a:ext cx="5486400" cy="365760"/>
           </a:xfrm>
           <a:prstGeom prst="rect">
             <a:avLst/>
@@ -5814,7 +9331,7 @@
               </a:spcAft>
             </a:pPr>
             <a:r>
-              <a:rPr sz="1300" b="0">
+              <a:rPr sz="1250" b="0">
                 <a:solidFill>
                   <a:srgbClr val="222A33"/>
                 </a:solidFill>
@@ -5822,7 +9339,7 @@
                 <a:ea typeface="微软雅黑"/>
                 <a:cs typeface="微软雅黑"/>
               </a:rPr>
-              <a:t>由中钢协流通分会、复旦大学房地产研究中心与杨浦区科技企业联合会三方合作，以“考察 + 对接 + 项目转化”闭环，服务钢铁产业链与地产 / 园区 / 制造业的跨产业撮合。</a:t>
+              <a:t>由中国钢铁工业协会（供给 / 渠道方）与复旦大学住房政策研究中心、上海市科技企业联合会、上海市杨浦区科技企业联合会（联合主办 / 平台赋能方）以对等结构合作，把学术公信力与真实买方网络转化为可量化、可定价的商业筹码。</a:t>
             </a:r>
           </a:p>
         </p:txBody>
@@ -5835,8 +9352,8 @@
         </p:nvSpPr>
         <p:spPr>
           <a:xfrm>
-            <a:off x="457200" y="1874519"/>
-            <a:ext cx="2788920" cy="3383280"/>
+            <a:off x="457200" y="1965960"/>
+            <a:ext cx="2788920" cy="3291840"/>
           </a:xfrm>
           <a:prstGeom prst="rect">
             <a:avLst/>
@@ -5881,7 +9398,7 @@
         </p:nvSpPr>
         <p:spPr>
           <a:xfrm>
-            <a:off x="457200" y="1874519"/>
+            <a:off x="457200" y="1965960"/>
             <a:ext cx="2788920" cy="868680"/>
           </a:xfrm>
           <a:prstGeom prst="rect">
@@ -5925,7 +9442,7 @@
         </p:nvSpPr>
         <p:spPr>
           <a:xfrm>
-            <a:off x="566928" y="1947671"/>
+            <a:off x="566928" y="2039112"/>
             <a:ext cx="2569464" cy="777240"/>
           </a:xfrm>
           <a:prstGeom prst="rect">
@@ -5990,8 +9507,8 @@
         </p:nvSpPr>
         <p:spPr>
           <a:xfrm>
-            <a:off x="585216" y="2834639"/>
-            <a:ext cx="2532888" cy="2331720"/>
+            <a:off x="585216" y="2926080"/>
+            <a:ext cx="2532888" cy="2240280"/>
           </a:xfrm>
           <a:prstGeom prst="rect">
             <a:avLst/>
@@ -6021,7 +9538,7 @@
                 <a:ea typeface="微软雅黑"/>
                 <a:cs typeface="微软雅黑"/>
               </a:rPr>
-              <a:t>地产标杆 × 城市更新（存量盘活）</a:t>
+              <a:t>不动产标杆 × 城市更新（存量盘活）</a:t>
             </a:r>
           </a:p>
           <a:p>
@@ -6034,7 +9551,7 @@
               </a:spcAft>
             </a:pPr>
             <a:r>
-              <a:rPr sz="1000" b="0">
+              <a:rPr sz="950" b="0">
                 <a:solidFill>
                   <a:srgbClr val="5A636E"/>
                 </a:solidFill>
@@ -6042,7 +9559,7 @@
                 <a:ea typeface="微软雅黑"/>
                 <a:cs typeface="微软雅黑"/>
               </a:rPr>
-              <a:t>聚焦：对接烂尾楼盘、闲置地产（特殊资产重整）——帮房企盘活项目，钢材采购为配套</a:t>
+              <a:t>聚焦：对接烂尾楼盘、闲置不动产（特殊资产重整）——帮不动产项目方盘活项目，钢材采购为配套</a:t>
             </a:r>
           </a:p>
           <a:p>
@@ -6055,7 +9572,7 @@
               </a:spcAft>
             </a:pPr>
             <a:r>
-              <a:rPr sz="1000" b="1">
+              <a:rPr sz="950" b="1">
                 <a:solidFill>
                   <a:srgbClr val="2E6DA4"/>
                 </a:solidFill>
@@ -6076,8 +9593,8 @@
         </p:nvSpPr>
         <p:spPr>
           <a:xfrm>
-            <a:off x="3410712" y="1874519"/>
-            <a:ext cx="2788920" cy="3383280"/>
+            <a:off x="3410712" y="1965960"/>
+            <a:ext cx="2788920" cy="3291840"/>
           </a:xfrm>
           <a:prstGeom prst="rect">
             <a:avLst/>
@@ -6122,7 +9639,7 @@
         </p:nvSpPr>
         <p:spPr>
           <a:xfrm>
-            <a:off x="3410712" y="1874519"/>
+            <a:off x="3410712" y="1965960"/>
             <a:ext cx="2788920" cy="868680"/>
           </a:xfrm>
           <a:prstGeom prst="rect">
@@ -6166,7 +9683,7 @@
         </p:nvSpPr>
         <p:spPr>
           <a:xfrm>
-            <a:off x="3520440" y="1947671"/>
+            <a:off x="3520440" y="2039112"/>
             <a:ext cx="2569464" cy="777240"/>
           </a:xfrm>
           <a:prstGeom prst="rect">
@@ -6231,8 +9748,8 @@
         </p:nvSpPr>
         <p:spPr>
           <a:xfrm>
-            <a:off x="3538728" y="2834639"/>
-            <a:ext cx="2532888" cy="2331720"/>
+            <a:off x="3538728" y="2926080"/>
+            <a:ext cx="2532888" cy="2240280"/>
           </a:xfrm>
           <a:prstGeom prst="rect">
             <a:avLst/>
@@ -6275,7 +9792,7 @@
               </a:spcAft>
             </a:pPr>
             <a:r>
-              <a:rPr sz="1000" b="0">
+              <a:rPr sz="950" b="0">
                 <a:solidFill>
                   <a:srgbClr val="5A636E"/>
                 </a:solidFill>
@@ -6296,7 +9813,7 @@
               </a:spcAft>
             </a:pPr>
             <a:r>
-              <a:rPr sz="1000" b="1">
+              <a:rPr sz="950" b="1">
                 <a:solidFill>
                   <a:srgbClr val="2E6DA4"/>
                 </a:solidFill>
@@ -6317,8 +9834,8 @@
         </p:nvSpPr>
         <p:spPr>
           <a:xfrm>
-            <a:off x="6364224" y="1874519"/>
-            <a:ext cx="2788920" cy="3383280"/>
+            <a:off x="6364224" y="1965960"/>
+            <a:ext cx="2788920" cy="3291840"/>
           </a:xfrm>
           <a:prstGeom prst="rect">
             <a:avLst/>
@@ -6363,7 +9880,7 @@
         </p:nvSpPr>
         <p:spPr>
           <a:xfrm>
-            <a:off x="6364224" y="1874519"/>
+            <a:off x="6364224" y="1965960"/>
             <a:ext cx="2788920" cy="868680"/>
           </a:xfrm>
           <a:prstGeom prst="rect">
@@ -6407,7 +9924,7 @@
         </p:nvSpPr>
         <p:spPr>
           <a:xfrm>
-            <a:off x="6473952" y="1947671"/>
+            <a:off x="6473952" y="2039112"/>
             <a:ext cx="2569464" cy="777240"/>
           </a:xfrm>
           <a:prstGeom prst="rect">
@@ -6472,8 +9989,8 @@
         </p:nvSpPr>
         <p:spPr>
           <a:xfrm>
-            <a:off x="6492240" y="2834639"/>
-            <a:ext cx="2532888" cy="2331720"/>
+            <a:off x="6492240" y="2926080"/>
+            <a:ext cx="2532888" cy="2240280"/>
           </a:xfrm>
           <a:prstGeom prst="rect">
             <a:avLst/>
@@ -6516,7 +10033,7 @@
               </a:spcAft>
             </a:pPr>
             <a:r>
-              <a:rPr sz="1000" b="0">
+              <a:rPr sz="950" b="0">
                 <a:solidFill>
                   <a:srgbClr val="5A636E"/>
                 </a:solidFill>
@@ -6537,7 +10054,7 @@
               </a:spcAft>
             </a:pPr>
             <a:r>
-              <a:rPr sz="1000" b="1">
+              <a:rPr sz="950" b="1">
                 <a:solidFill>
                   <a:srgbClr val="2E6DA4"/>
                 </a:solidFill>
@@ -6558,8 +10075,8 @@
         </p:nvSpPr>
         <p:spPr>
           <a:xfrm>
-            <a:off x="9317736" y="1874519"/>
-            <a:ext cx="2788920" cy="3383280"/>
+            <a:off x="9317736" y="1965960"/>
+            <a:ext cx="2788920" cy="3291840"/>
           </a:xfrm>
           <a:prstGeom prst="rect">
             <a:avLst/>
@@ -6604,7 +10121,7 @@
         </p:nvSpPr>
         <p:spPr>
           <a:xfrm>
-            <a:off x="9317736" y="1874519"/>
+            <a:off x="9317736" y="1965960"/>
             <a:ext cx="2788920" cy="868680"/>
           </a:xfrm>
           <a:prstGeom prst="rect">
@@ -6648,7 +10165,7 @@
         </p:nvSpPr>
         <p:spPr>
           <a:xfrm>
-            <a:off x="9427464" y="1947671"/>
+            <a:off x="9427464" y="2039112"/>
             <a:ext cx="2569464" cy="777240"/>
           </a:xfrm>
           <a:prstGeom prst="rect">
@@ -6713,8 +10230,8 @@
         </p:nvSpPr>
         <p:spPr>
           <a:xfrm>
-            <a:off x="9445752" y="2834639"/>
-            <a:ext cx="2532888" cy="2331720"/>
+            <a:off x="9445752" y="2926080"/>
+            <a:ext cx="2532888" cy="2240280"/>
           </a:xfrm>
           <a:prstGeom prst="rect">
             <a:avLst/>
@@ -6757,7 +10274,7 @@
               </a:spcAft>
             </a:pPr>
             <a:r>
-              <a:rPr sz="1000" b="0">
+              <a:rPr sz="950" b="0">
                 <a:solidFill>
                   <a:srgbClr val="5A636E"/>
                 </a:solidFill>
@@ -6778,7 +10295,7 @@
               </a:spcAft>
             </a:pPr>
             <a:r>
-              <a:rPr sz="1000" b="1">
+              <a:rPr sz="950" b="1">
                 <a:solidFill>
                   <a:srgbClr val="2E6DA4"/>
                 </a:solidFill>
@@ -6800,7 +10317,7 @@
         <p:spPr>
           <a:xfrm>
             <a:off x="457200" y="5486400"/>
-            <a:ext cx="11247120" cy="731520"/>
+            <a:ext cx="11247120" cy="777240"/>
           </a:xfrm>
           <a:prstGeom prst="rect">
             <a:avLst/>
@@ -6830,7 +10347,7 @@
                 <a:ea typeface="微软雅黑"/>
                 <a:cs typeface="微软雅黑"/>
               </a:rPr>
-              <a:t>规模：每期 10–15 人 · 小规模高质量闭门　|　保障：主办方统一安排考察用车、工作餐与会务（费用计入组织成本）</a:t>
+              <a:t>规模：每期 10–15 人 · 小规模高质量闭门　|　成本口径：会务与接待等直接运营成本可各自独立核算；品牌与资源赋能须按对价回流</a:t>
             </a:r>
           </a:p>
           <a:p>
@@ -6851,7 +10368,7 @@
                 <a:ea typeface="微软雅黑"/>
                 <a:cs typeface="微软雅黑"/>
               </a:rPr>
-              <a:t>战略目标：面向未来，成为中钢协在上海及长三角区域统筹的【总战略合作伙伴】</a:t>
+              <a:t>战略目标：面向未来，成为中国钢铁工业协会在上海及长三角区域统筹的【总战略合作伙伴】</a:t>
             </a:r>
           </a:p>
         </p:txBody>
@@ -6895,7 +10412,7 @@
                 <a:ea typeface="微软雅黑"/>
                 <a:cs typeface="微软雅黑"/>
               </a:rPr>
-              <a:t>钢铁 × 地产 × 产业园区 · 跨产业撮合与游学转化平台</a:t>
+              <a:t>钢铁 × 不动产 × 产业园区 · 跨产业撮合与游学转化平台</a:t>
             </a:r>
           </a:p>
         </p:txBody>
@@ -7059,7 +10576,7 @@
         <p:spPr>
           <a:xfrm>
             <a:off x="457200" y="109728"/>
-            <a:ext cx="2743200" cy="365760"/>
+            <a:ext cx="5486400" cy="365760"/>
           </a:xfrm>
           <a:prstGeom prst="rect">
             <a:avLst/>
@@ -7133,7 +10650,7 @@
                 <a:ea typeface="微软雅黑"/>
                 <a:cs typeface="微软雅黑"/>
               </a:rPr>
-              <a:t>地产标杆 × 城市更新（存量盘活）</a:t>
+              <a:t>不动产标杆 × 城市更新（存量盘活）</a:t>
             </a:r>
           </a:p>
         </p:txBody>
@@ -7177,7 +10694,7 @@
                 <a:ea typeface="微软雅黑"/>
                 <a:cs typeface="微软雅黑"/>
               </a:rPr>
-              <a:t>聚焦：对接烂尾楼盘、闲置地产（特殊资产重整）——帮房企盘活项目，钢材采购为配套</a:t>
+              <a:t>聚焦：对接烂尾楼盘、闲置不动产（特殊资产重整）——帮不动产项目方盘活项目，钢材采购为配套</a:t>
             </a:r>
           </a:p>
           <a:p>
@@ -7198,7 +10715,7 @@
                 <a:ea typeface="微软雅黑"/>
                 <a:cs typeface="微软雅黑"/>
               </a:rPr>
-              <a:t>主题课：《存量时代地产项目盘活与建材成本重构》— 复旦大学住房政策研究中心</a:t>
+              <a:t>主题课：《存量时代不动产项目盘活与建材成本重构》— 复旦大学住房政策研究中心</a:t>
             </a:r>
           </a:p>
           <a:p>
@@ -7253,7 +10770,6 @@
                     <a:bodyPr/>
                     <a:lstStyle/>
                     <a:p>
-                      <a:pPr algn="l"/>
                       <a:r>
                         <a:rPr sz="1200" b="1">
                           <a:solidFill>
@@ -7278,7 +10794,6 @@
                     <a:bodyPr/>
                     <a:lstStyle/>
                     <a:p>
-                      <a:pPr algn="l"/>
                       <a:r>
                         <a:rPr sz="1200" b="1">
                           <a:solidFill>
@@ -7303,7 +10818,6 @@
                     <a:bodyPr/>
                     <a:lstStyle/>
                     <a:p>
-                      <a:pPr algn="l"/>
                       <a:r>
                         <a:rPr sz="1200" b="1">
                           <a:solidFill>
@@ -7330,7 +10844,6 @@
                     <a:bodyPr/>
                     <a:lstStyle/>
                     <a:p>
-                      <a:pPr algn="l"/>
                       <a:r>
                         <a:rPr sz="1100" b="1">
                           <a:solidFill>
@@ -7355,7 +10868,6 @@
                     <a:bodyPr/>
                     <a:lstStyle/>
                     <a:p>
-                      <a:pPr algn="l"/>
                       <a:r>
                         <a:rPr sz="1100" b="1">
                           <a:solidFill>
@@ -7380,7 +10892,6 @@
                     <a:bodyPr/>
                     <a:lstStyle/>
                     <a:p>
-                      <a:pPr algn="l"/>
                       <a:r>
                         <a:rPr sz="1100" b="0">
                           <a:solidFill>
@@ -7407,7 +10918,6 @@
                     <a:bodyPr/>
                     <a:lstStyle/>
                     <a:p>
-                      <a:pPr algn="l"/>
                       <a:r>
                         <a:rPr sz="1100" b="1">
                           <a:solidFill>
@@ -7432,7 +10942,6 @@
                     <a:bodyPr/>
                     <a:lstStyle/>
                     <a:p>
-                      <a:pPr algn="l"/>
                       <a:r>
                         <a:rPr sz="1100" b="1">
                           <a:solidFill>
@@ -7457,7 +10966,6 @@
                     <a:bodyPr/>
                     <a:lstStyle/>
                     <a:p>
-                      <a:pPr algn="l"/>
                       <a:r>
                         <a:rPr sz="1100" b="0">
                           <a:solidFill>
@@ -7484,7 +10992,6 @@
                     <a:bodyPr/>
                     <a:lstStyle/>
                     <a:p>
-                      <a:pPr algn="l"/>
                       <a:r>
                         <a:rPr sz="1100" b="1">
                           <a:solidFill>
@@ -7509,7 +11016,6 @@
                     <a:bodyPr/>
                     <a:lstStyle/>
                     <a:p>
-                      <a:pPr algn="l"/>
                       <a:r>
                         <a:rPr sz="1100" b="1">
                           <a:solidFill>
@@ -7534,7 +11040,6 @@
                     <a:bodyPr/>
                     <a:lstStyle/>
                     <a:p>
-                      <a:pPr algn="l"/>
                       <a:r>
                         <a:rPr sz="1100" b="0">
                           <a:solidFill>
@@ -7561,7 +11066,6 @@
                     <a:bodyPr/>
                     <a:lstStyle/>
                     <a:p>
-                      <a:pPr algn="l"/>
                       <a:r>
                         <a:rPr sz="1100" b="1">
                           <a:solidFill>
@@ -7586,7 +11090,6 @@
                     <a:bodyPr/>
                     <a:lstStyle/>
                     <a:p>
-                      <a:pPr algn="l"/>
                       <a:r>
                         <a:rPr sz="1100" b="1">
                           <a:solidFill>
@@ -7611,7 +11114,6 @@
                     <a:bodyPr/>
                     <a:lstStyle/>
                     <a:p>
-                      <a:pPr algn="l"/>
                       <a:r>
                         <a:rPr sz="1100" b="0">
                           <a:solidFill>
@@ -7621,7 +11123,7 @@
                           <a:ea typeface="微软雅黑"/>
                           <a:cs typeface="微软雅黑"/>
                         </a:rPr>
-                        <a:t>老工业厂房 → 双创示范园区，杨浦科企联合会资源</a:t>
+                        <a:t>老工业厂房 → 双创示范园区，上海市杨浦区科技企业联合会资源</a:t>
                       </a:r>
                     </a:p>
                   </a:txBody>
@@ -7638,7 +11140,6 @@
                     <a:bodyPr/>
                     <a:lstStyle/>
                     <a:p>
-                      <a:pPr algn="l"/>
                       <a:r>
                         <a:rPr sz="1100" b="1">
                           <a:solidFill>
@@ -7663,7 +11164,6 @@
                     <a:bodyPr/>
                     <a:lstStyle/>
                     <a:p>
-                      <a:pPr algn="l"/>
                       <a:r>
                         <a:rPr sz="1100" b="1">
                           <a:solidFill>
@@ -7688,7 +11188,6 @@
                     <a:bodyPr/>
                     <a:lstStyle/>
                     <a:p>
-                      <a:pPr algn="l"/>
                       <a:r>
                         <a:rPr sz="1100" b="0">
                           <a:solidFill>
@@ -7752,7 +11251,7 @@
                 <a:ea typeface="微软雅黑"/>
                 <a:cs typeface="微软雅黑"/>
               </a:rPr>
-              <a:t>钢铁 × 地产 × 产业园区 · 跨产业撮合与游学转化平台</a:t>
+              <a:t>钢铁 × 不动产 × 产业园区 · 跨产业撮合与游学转化平台</a:t>
             </a:r>
           </a:p>
         </p:txBody>
@@ -7916,7 +11415,7 @@
         <p:spPr>
           <a:xfrm>
             <a:off x="457200" y="109728"/>
-            <a:ext cx="2743200" cy="365760"/>
+            <a:ext cx="5486400" cy="365760"/>
           </a:xfrm>
           <a:prstGeom prst="rect">
             <a:avLst/>
@@ -8055,7 +11554,7 @@
                 <a:ea typeface="微软雅黑"/>
                 <a:cs typeface="微软雅黑"/>
               </a:rPr>
-              <a:t>主题课：《城市更新与园区存量改造中的产业协同》— 复旦 + 杨浦区科技企业联合会</a:t>
+              <a:t>主题课：《城市更新与园区存量改造中的产业协同》— 复旦大学住房政策研究中心 + 上海市科技企业联合会</a:t>
             </a:r>
           </a:p>
           <a:p>
@@ -8110,7 +11609,6 @@
                     <a:bodyPr/>
                     <a:lstStyle/>
                     <a:p>
-                      <a:pPr algn="l"/>
                       <a:r>
                         <a:rPr sz="1200" b="1">
                           <a:solidFill>
@@ -8135,7 +11633,6 @@
                     <a:bodyPr/>
                     <a:lstStyle/>
                     <a:p>
-                      <a:pPr algn="l"/>
                       <a:r>
                         <a:rPr sz="1200" b="1">
                           <a:solidFill>
@@ -8160,7 +11657,6 @@
                     <a:bodyPr/>
                     <a:lstStyle/>
                     <a:p>
-                      <a:pPr algn="l"/>
                       <a:r>
                         <a:rPr sz="1200" b="1">
                           <a:solidFill>
@@ -8187,7 +11683,6 @@
                     <a:bodyPr/>
                     <a:lstStyle/>
                     <a:p>
-                      <a:pPr algn="l"/>
                       <a:r>
                         <a:rPr sz="1100" b="1">
                           <a:solidFill>
@@ -8212,7 +11707,6 @@
                     <a:bodyPr/>
                     <a:lstStyle/>
                     <a:p>
-                      <a:pPr algn="l"/>
                       <a:r>
                         <a:rPr sz="1100" b="1">
                           <a:solidFill>
@@ -8237,7 +11731,6 @@
                     <a:bodyPr/>
                     <a:lstStyle/>
                     <a:p>
-                      <a:pPr algn="l"/>
                       <a:r>
                         <a:rPr sz="1100" b="0">
                           <a:solidFill>
@@ -8264,7 +11757,6 @@
                     <a:bodyPr/>
                     <a:lstStyle/>
                     <a:p>
-                      <a:pPr algn="l"/>
                       <a:r>
                         <a:rPr sz="1100" b="1">
                           <a:solidFill>
@@ -8289,7 +11781,6 @@
                     <a:bodyPr/>
                     <a:lstStyle/>
                     <a:p>
-                      <a:pPr algn="l"/>
                       <a:r>
                         <a:rPr sz="1100" b="1">
                           <a:solidFill>
@@ -8314,7 +11805,6 @@
                     <a:bodyPr/>
                     <a:lstStyle/>
                     <a:p>
-                      <a:pPr algn="l"/>
                       <a:r>
                         <a:rPr sz="1100" b="0">
                           <a:solidFill>
@@ -8341,7 +11831,6 @@
                     <a:bodyPr/>
                     <a:lstStyle/>
                     <a:p>
-                      <a:pPr algn="l"/>
                       <a:r>
                         <a:rPr sz="1100" b="1">
                           <a:solidFill>
@@ -8366,7 +11855,6 @@
                     <a:bodyPr/>
                     <a:lstStyle/>
                     <a:p>
-                      <a:pPr algn="l"/>
                       <a:r>
                         <a:rPr sz="1100" b="1">
                           <a:solidFill>
@@ -8391,7 +11879,6 @@
                     <a:bodyPr/>
                     <a:lstStyle/>
                     <a:p>
-                      <a:pPr algn="l"/>
                       <a:r>
                         <a:rPr sz="1100" b="0">
                           <a:solidFill>
@@ -8418,7 +11905,6 @@
                     <a:bodyPr/>
                     <a:lstStyle/>
                     <a:p>
-                      <a:pPr algn="l"/>
                       <a:r>
                         <a:rPr sz="1100" b="1">
                           <a:solidFill>
@@ -8443,7 +11929,6 @@
                     <a:bodyPr/>
                     <a:lstStyle/>
                     <a:p>
-                      <a:pPr algn="l"/>
                       <a:r>
                         <a:rPr sz="1100" b="1">
                           <a:solidFill>
@@ -8468,7 +11953,6 @@
                     <a:bodyPr/>
                     <a:lstStyle/>
                     <a:p>
-                      <a:pPr algn="l"/>
                       <a:r>
                         <a:rPr sz="1100" b="0">
                           <a:solidFill>
@@ -8495,7 +11979,6 @@
                     <a:bodyPr/>
                     <a:lstStyle/>
                     <a:p>
-                      <a:pPr algn="l"/>
                       <a:r>
                         <a:rPr sz="1100" b="1">
                           <a:solidFill>
@@ -8520,7 +12003,6 @@
                     <a:bodyPr/>
                     <a:lstStyle/>
                     <a:p>
-                      <a:pPr algn="l"/>
                       <a:r>
                         <a:rPr sz="1100" b="1">
                           <a:solidFill>
@@ -8545,7 +12027,6 @@
                     <a:bodyPr/>
                     <a:lstStyle/>
                     <a:p>
-                      <a:pPr algn="l"/>
                       <a:r>
                         <a:rPr sz="1100" b="0">
                           <a:solidFill>
@@ -8609,7 +12090,7 @@
                 <a:ea typeface="微软雅黑"/>
                 <a:cs typeface="微软雅黑"/>
               </a:rPr>
-              <a:t>钢铁 × 地产 × 产业园区 · 跨产业撮合与游学转化平台</a:t>
+              <a:t>钢铁 × 不动产 × 产业园区 · 跨产业撮合与游学转化平台</a:t>
             </a:r>
           </a:p>
         </p:txBody>
@@ -8773,7 +12254,7 @@
         <p:spPr>
           <a:xfrm>
             <a:off x="457200" y="109728"/>
-            <a:ext cx="2743200" cy="365760"/>
+            <a:ext cx="5486400" cy="365760"/>
           </a:xfrm>
           <a:prstGeom prst="rect">
             <a:avLst/>
@@ -8967,7 +12448,6 @@
                     <a:bodyPr/>
                     <a:lstStyle/>
                     <a:p>
-                      <a:pPr algn="l"/>
                       <a:r>
                         <a:rPr sz="1200" b="1">
                           <a:solidFill>
@@ -8992,7 +12472,6 @@
                     <a:bodyPr/>
                     <a:lstStyle/>
                     <a:p>
-                      <a:pPr algn="l"/>
                       <a:r>
                         <a:rPr sz="1200" b="1">
                           <a:solidFill>
@@ -9017,7 +12496,6 @@
                     <a:bodyPr/>
                     <a:lstStyle/>
                     <a:p>
-                      <a:pPr algn="l"/>
                       <a:r>
                         <a:rPr sz="1200" b="1">
                           <a:solidFill>
@@ -9044,7 +12522,6 @@
                     <a:bodyPr/>
                     <a:lstStyle/>
                     <a:p>
-                      <a:pPr algn="l"/>
                       <a:r>
                         <a:rPr sz="1100" b="1">
                           <a:solidFill>
@@ -9069,7 +12546,6 @@
                     <a:bodyPr/>
                     <a:lstStyle/>
                     <a:p>
-                      <a:pPr algn="l"/>
                       <a:r>
                         <a:rPr sz="1100" b="1">
                           <a:solidFill>
@@ -9094,7 +12570,6 @@
                     <a:bodyPr/>
                     <a:lstStyle/>
                     <a:p>
-                      <a:pPr algn="l"/>
                       <a:r>
                         <a:rPr sz="1100" b="0">
                           <a:solidFill>
@@ -9121,7 +12596,6 @@
                     <a:bodyPr/>
                     <a:lstStyle/>
                     <a:p>
-                      <a:pPr algn="l"/>
                       <a:r>
                         <a:rPr sz="1100" b="1">
                           <a:solidFill>
@@ -9146,7 +12620,6 @@
                     <a:bodyPr/>
                     <a:lstStyle/>
                     <a:p>
-                      <a:pPr algn="l"/>
                       <a:r>
                         <a:rPr sz="1100" b="1">
                           <a:solidFill>
@@ -9171,7 +12644,6 @@
                     <a:bodyPr/>
                     <a:lstStyle/>
                     <a:p>
-                      <a:pPr algn="l"/>
                       <a:r>
                         <a:rPr sz="1100" b="0">
                           <a:solidFill>
@@ -9198,7 +12670,6 @@
                     <a:bodyPr/>
                     <a:lstStyle/>
                     <a:p>
-                      <a:pPr algn="l"/>
                       <a:r>
                         <a:rPr sz="1100" b="1">
                           <a:solidFill>
@@ -9223,7 +12694,6 @@
                     <a:bodyPr/>
                     <a:lstStyle/>
                     <a:p>
-                      <a:pPr algn="l"/>
                       <a:r>
                         <a:rPr sz="1100" b="1">
                           <a:solidFill>
@@ -9248,7 +12718,6 @@
                     <a:bodyPr/>
                     <a:lstStyle/>
                     <a:p>
-                      <a:pPr algn="l"/>
                       <a:r>
                         <a:rPr sz="1100" b="0">
                           <a:solidFill>
@@ -9275,7 +12744,6 @@
                     <a:bodyPr/>
                     <a:lstStyle/>
                     <a:p>
-                      <a:pPr algn="l"/>
                       <a:r>
                         <a:rPr sz="1100" b="1">
                           <a:solidFill>
@@ -9300,7 +12768,6 @@
                     <a:bodyPr/>
                     <a:lstStyle/>
                     <a:p>
-                      <a:pPr algn="l"/>
                       <a:r>
                         <a:rPr sz="1100" b="1">
                           <a:solidFill>
@@ -9325,7 +12792,6 @@
                     <a:bodyPr/>
                     <a:lstStyle/>
                     <a:p>
-                      <a:pPr algn="l"/>
                       <a:r>
                         <a:rPr sz="1100" b="0">
                           <a:solidFill>
@@ -9352,7 +12818,6 @@
                     <a:bodyPr/>
                     <a:lstStyle/>
                     <a:p>
-                      <a:pPr algn="l"/>
                       <a:r>
                         <a:rPr sz="1100" b="1">
                           <a:solidFill>
@@ -9377,7 +12842,6 @@
                     <a:bodyPr/>
                     <a:lstStyle/>
                     <a:p>
-                      <a:pPr algn="l"/>
                       <a:r>
                         <a:rPr sz="1100" b="1">
                           <a:solidFill>
@@ -9402,7 +12866,6 @@
                     <a:bodyPr/>
                     <a:lstStyle/>
                     <a:p>
-                      <a:pPr algn="l"/>
                       <a:r>
                         <a:rPr sz="1100" b="0">
                           <a:solidFill>
@@ -9466,7 +12929,7 @@
                 <a:ea typeface="微软雅黑"/>
                 <a:cs typeface="微软雅黑"/>
               </a:rPr>
-              <a:t>钢铁 × 地产 × 产业园区 · 跨产业撮合与游学转化平台</a:t>
+              <a:t>钢铁 × 不动产 × 产业园区 · 跨产业撮合与游学转化平台</a:t>
             </a:r>
           </a:p>
         </p:txBody>
@@ -9630,7 +13093,7 @@
         <p:spPr>
           <a:xfrm>
             <a:off x="457200" y="109728"/>
-            <a:ext cx="2743200" cy="365760"/>
+            <a:ext cx="5486400" cy="365760"/>
           </a:xfrm>
           <a:prstGeom prst="rect">
             <a:avLst/>
@@ -9824,7 +13287,6 @@
                     <a:bodyPr/>
                     <a:lstStyle/>
                     <a:p>
-                      <a:pPr algn="l"/>
                       <a:r>
                         <a:rPr sz="1200" b="1">
                           <a:solidFill>
@@ -9849,7 +13311,6 @@
                     <a:bodyPr/>
                     <a:lstStyle/>
                     <a:p>
-                      <a:pPr algn="l"/>
                       <a:r>
                         <a:rPr sz="1200" b="1">
                           <a:solidFill>
@@ -9874,7 +13335,6 @@
                     <a:bodyPr/>
                     <a:lstStyle/>
                     <a:p>
-                      <a:pPr algn="l"/>
                       <a:r>
                         <a:rPr sz="1200" b="1">
                           <a:solidFill>
@@ -9901,7 +13361,6 @@
                     <a:bodyPr/>
                     <a:lstStyle/>
                     <a:p>
-                      <a:pPr algn="l"/>
                       <a:r>
                         <a:rPr sz="1100" b="1">
                           <a:solidFill>
@@ -9926,7 +13385,6 @@
                     <a:bodyPr/>
                     <a:lstStyle/>
                     <a:p>
-                      <a:pPr algn="l"/>
                       <a:r>
                         <a:rPr sz="1100" b="1">
                           <a:solidFill>
@@ -9951,7 +13409,6 @@
                     <a:bodyPr/>
                     <a:lstStyle/>
                     <a:p>
-                      <a:pPr algn="l"/>
                       <a:r>
                         <a:rPr sz="1100" b="0">
                           <a:solidFill>
@@ -9978,7 +13435,6 @@
                     <a:bodyPr/>
                     <a:lstStyle/>
                     <a:p>
-                      <a:pPr algn="l"/>
                       <a:r>
                         <a:rPr sz="1100" b="1">
                           <a:solidFill>
@@ -10003,7 +13459,6 @@
                     <a:bodyPr/>
                     <a:lstStyle/>
                     <a:p>
-                      <a:pPr algn="l"/>
                       <a:r>
                         <a:rPr sz="1100" b="1">
                           <a:solidFill>
@@ -10028,7 +13483,6 @@
                     <a:bodyPr/>
                     <a:lstStyle/>
                     <a:p>
-                      <a:pPr algn="l"/>
                       <a:r>
                         <a:rPr sz="1100" b="0">
                           <a:solidFill>
@@ -10055,7 +13509,6 @@
                     <a:bodyPr/>
                     <a:lstStyle/>
                     <a:p>
-                      <a:pPr algn="l"/>
                       <a:r>
                         <a:rPr sz="1100" b="1">
                           <a:solidFill>
@@ -10080,7 +13533,6 @@
                     <a:bodyPr/>
                     <a:lstStyle/>
                     <a:p>
-                      <a:pPr algn="l"/>
                       <a:r>
                         <a:rPr sz="1100" b="1">
                           <a:solidFill>
@@ -10105,7 +13557,6 @@
                     <a:bodyPr/>
                     <a:lstStyle/>
                     <a:p>
-                      <a:pPr algn="l"/>
                       <a:r>
                         <a:rPr sz="1100" b="0">
                           <a:solidFill>
@@ -10132,7 +13583,6 @@
                     <a:bodyPr/>
                     <a:lstStyle/>
                     <a:p>
-                      <a:pPr algn="l"/>
                       <a:r>
                         <a:rPr sz="1100" b="1">
                           <a:solidFill>
@@ -10157,7 +13607,6 @@
                     <a:bodyPr/>
                     <a:lstStyle/>
                     <a:p>
-                      <a:pPr algn="l"/>
                       <a:r>
                         <a:rPr sz="1100" b="1">
                           <a:solidFill>
@@ -10182,7 +13631,6 @@
                     <a:bodyPr/>
                     <a:lstStyle/>
                     <a:p>
-                      <a:pPr algn="l"/>
                       <a:r>
                         <a:rPr sz="1100" b="0">
                           <a:solidFill>
@@ -10209,7 +13657,6 @@
                     <a:bodyPr/>
                     <a:lstStyle/>
                     <a:p>
-                      <a:pPr algn="l"/>
                       <a:r>
                         <a:rPr sz="1100" b="1">
                           <a:solidFill>
@@ -10234,7 +13681,6 @@
                     <a:bodyPr/>
                     <a:lstStyle/>
                     <a:p>
-                      <a:pPr algn="l"/>
                       <a:r>
                         <a:rPr sz="1100" b="1">
                           <a:solidFill>
@@ -10259,7 +13705,6 @@
                     <a:bodyPr/>
                     <a:lstStyle/>
                     <a:p>
-                      <a:pPr algn="l"/>
                       <a:r>
                         <a:rPr sz="1100" b="0">
                           <a:solidFill>
@@ -10323,7 +13768,7 @@
                 <a:ea typeface="微软雅黑"/>
                 <a:cs typeface="微软雅黑"/>
               </a:rPr>
-              <a:t>钢铁 × 地产 × 产业园区 · 跨产业撮合与游学转化平台</a:t>
+              <a:t>钢铁 × 不动产 × 产业园区 · 跨产业撮合与游学转化平台</a:t>
             </a:r>
           </a:p>
         </p:txBody>
@@ -10487,7 +13932,7 @@
         <p:spPr>
           <a:xfrm>
             <a:off x="457200" y="109728"/>
-            <a:ext cx="2743200" cy="365760"/>
+            <a:ext cx="5486400" cy="365760"/>
           </a:xfrm>
           <a:prstGeom prst="rect">
             <a:avLst/>
@@ -10796,7 +14241,7 @@
                           <a:ea typeface="微软雅黑"/>
                           <a:cs typeface="微软雅黑"/>
                         </a:rPr>
-                        <a:t>主办三方致辞，发放行程与考察手册</a:t>
+                        <a:t>联合主办与战略合作方致辞，发放行程与考察手册</a:t>
                       </a:r>
                     </a:p>
                   </a:txBody>
@@ -11090,7 +14535,7 @@
                           <a:ea typeface="微软雅黑"/>
                           <a:cs typeface="微软雅黑"/>
                         </a:rPr>
-                        <a:t>主办方统一安排</a:t>
+                        <a:t>会务接待成本各自核算</a:t>
                       </a:r>
                     </a:p>
                   </a:txBody>
@@ -11580,7 +15025,7 @@
                           <a:ea typeface="微软雅黑"/>
                           <a:cs typeface="微软雅黑"/>
                         </a:rPr>
-                        <a:t>主办方统一安排</a:t>
+                        <a:t>会务接待成本各自核算</a:t>
                       </a:r>
                     </a:p>
                   </a:txBody>
@@ -11874,7 +15319,7 @@
                           <a:ea typeface="微软雅黑"/>
                           <a:cs typeface="微软雅黑"/>
                         </a:rPr>
-                        <a:t>供需端定向撮合</a:t>
+                        <a:t>供需端定向撮合，纳入名单共管库</a:t>
                       </a:r>
                     </a:p>
                   </a:txBody>
@@ -12070,7 +15515,7 @@
                           <a:ea typeface="微软雅黑"/>
                           <a:cs typeface="微软雅黑"/>
                         </a:rPr>
-                        <a:t>形成交易线索，转入项目池跟踪</a:t>
+                        <a:t>形成交易线索，转入项目池与分成落位</a:t>
                       </a:r>
                     </a:p>
                   </a:txBody>
@@ -12320,7 +15765,7 @@
                 <a:ea typeface="微软雅黑"/>
                 <a:cs typeface="微软雅黑"/>
               </a:rPr>
-              <a:t>钢铁 × 地产 × 产业园区 · 跨产业撮合与游学转化平台</a:t>
+              <a:t>钢铁 × 不动产 × 产业园区 · 跨产业撮合与游学转化平台</a:t>
             </a:r>
           </a:p>
         </p:txBody>
@@ -12484,7 +15929,7 @@
         <p:spPr>
           <a:xfrm>
             <a:off x="457200" y="109728"/>
-            <a:ext cx="2743200" cy="365760"/>
+            <a:ext cx="5486400" cy="365760"/>
           </a:xfrm>
           <a:prstGeom prst="rect">
             <a:avLst/>
@@ -12514,7 +15959,7 @@
                 <a:ea typeface="微软雅黑"/>
                 <a:cs typeface="微软雅黑"/>
               </a:rPr>
-              <a:t>合作框架</a:t>
+              <a:t>合作定位</a:t>
             </a:r>
           </a:p>
         </p:txBody>
@@ -12558,7 +16003,7 @@
                 <a:ea typeface="微软雅黑"/>
                 <a:cs typeface="微软雅黑"/>
               </a:rPr>
-              <a:t>统筹合作框架 · 总览</a:t>
+              <a:t>总会对总会 · 商务对商务 · 对等交流</a:t>
             </a:r>
           </a:p>
           <a:p>
@@ -12579,7 +16024,7 @@
                 <a:ea typeface="微软雅黑"/>
                 <a:cs typeface="微软雅黑"/>
               </a:rPr>
-              <a:t>中钢协流通分会 × 复旦房地产研究中心 × 杨浦区科技企业联合会</a:t>
+              <a:t>把学术公信力与买方网络，转化为可量化、可定价的商业筹码</a:t>
             </a:r>
           </a:p>
         </p:txBody>
@@ -12592,8 +16037,8 @@
         </p:nvSpPr>
         <p:spPr>
           <a:xfrm>
-            <a:off x="457200" y="1280160"/>
-            <a:ext cx="11247120" cy="731520"/>
+            <a:off x="457200" y="1234440"/>
+            <a:ext cx="11247120" cy="502920"/>
           </a:xfrm>
           <a:prstGeom prst="rect">
             <a:avLst/>
@@ -12615,7 +16060,7 @@
               </a:spcAft>
             </a:pPr>
             <a:r>
-              <a:rPr sz="1300" b="0">
+              <a:rPr sz="1200" b="0">
                 <a:solidFill>
                   <a:srgbClr val="222A33"/>
                 </a:solidFill>
@@ -12623,7 +16068,7 @@
                 <a:ea typeface="微软雅黑"/>
                 <a:cs typeface="微软雅黑"/>
               </a:rPr>
-              <a:t>由中钢协流通分会、复旦大学房地产研究中心与杨浦区科技企业联合会三方合作，以“考察 + 对接 + 项目转化”闭环，服务钢铁产业链与地产 / 园区 / 制造业的跨产业撮合。</a:t>
+              <a:t>由中国钢铁工业协会（供给 / 渠道方）与复旦大学住房政策研究中心、上海市科技企业联合会、上海市杨浦区科技企业联合会（联合主办 / 平台赋能方）以对等结构合作，把学术公信力与真实买方网络转化为可量化、可定价的商业筹码。</a:t>
             </a:r>
           </a:p>
         </p:txBody>
@@ -12636,8 +16081,8 @@
         </p:nvSpPr>
         <p:spPr>
           <a:xfrm>
-            <a:off x="457200" y="2148840"/>
-            <a:ext cx="3657600" cy="2194560"/>
+            <a:off x="457200" y="1828800"/>
+            <a:ext cx="5486400" cy="1600200"/>
           </a:xfrm>
           <a:prstGeom prst="rect">
             <a:avLst/>
@@ -12682,14 +16127,14 @@
         </p:nvSpPr>
         <p:spPr>
           <a:xfrm>
-            <a:off x="457200" y="2148840"/>
-            <a:ext cx="3657600" cy="548640"/>
+            <a:off x="457200" y="1828800"/>
+            <a:ext cx="5486400" cy="502920"/>
           </a:xfrm>
           <a:prstGeom prst="rect">
             <a:avLst/>
           </a:prstGeom>
           <a:solidFill>
-            <a:srgbClr val="1F4E79"/>
+            <a:srgbClr val="2E6DA4"/>
           </a:solidFill>
           <a:ln>
             <a:noFill/>
@@ -12726,8 +16171,8 @@
         </p:nvSpPr>
         <p:spPr>
           <a:xfrm>
-            <a:off x="585216" y="2240280"/>
-            <a:ext cx="3401568" cy="457200"/>
+            <a:off x="603504" y="1920240"/>
+            <a:ext cx="5193792" cy="457200"/>
           </a:xfrm>
           <a:prstGeom prst="rect">
             <a:avLst/>
@@ -12757,7 +16202,7 @@
                 <a:ea typeface="微软雅黑"/>
                 <a:cs typeface="微软雅黑"/>
               </a:rPr>
-              <a:t>主导 / 控盘方</a:t>
+              <a:t>甲方 · 供给 / 渠道方</a:t>
             </a:r>
           </a:p>
         </p:txBody>
@@ -12770,8 +16215,8 @@
         </p:nvSpPr>
         <p:spPr>
           <a:xfrm>
-            <a:off x="603504" y="2834640"/>
-            <a:ext cx="3364992" cy="1371600"/>
+            <a:off x="621792" y="2423160"/>
+            <a:ext cx="5157216" cy="914400"/>
           </a:xfrm>
           <a:prstGeom prst="rect">
             <a:avLst/>
@@ -12789,11 +16234,11 @@
                 <a:spcPct val="108000"/>
               </a:lnSpc>
               <a:spcAft>
-                <a:spcPts val="800"/>
+                <a:spcPts val="600"/>
               </a:spcAft>
             </a:pPr>
             <a:r>
-              <a:rPr sz="1350" b="1">
+              <a:rPr sz="1300" b="1">
                 <a:solidFill>
                   <a:srgbClr val="142B45"/>
                 </a:solidFill>
@@ -12801,7 +16246,7 @@
                 <a:ea typeface="微软雅黑"/>
                 <a:cs typeface="微软雅黑"/>
               </a:rPr>
-              <a:t>复旦大学房地产研究中心 + 杨浦区科技企业联合会</a:t>
+              <a:t>中国钢铁工业协会（总会层面）</a:t>
             </a:r>
           </a:p>
           <a:p>
@@ -12822,7 +16267,7 @@
                 <a:ea typeface="微软雅黑"/>
                 <a:cs typeface="微软雅黑"/>
               </a:rPr>
-              <a:t>品牌 · 规则 · 内容 · 收费权 · 政府与园区资源</a:t>
+              <a:t>上游钢铁企业资源 · 组织参与 · 协助邀约</a:t>
             </a:r>
           </a:p>
         </p:txBody>
@@ -12835,8 +16280,8 @@
         </p:nvSpPr>
         <p:spPr>
           <a:xfrm>
-            <a:off x="4251960" y="2148840"/>
-            <a:ext cx="3657600" cy="2194560"/>
+            <a:off x="6217920" y="1828800"/>
+            <a:ext cx="5486400" cy="1600200"/>
           </a:xfrm>
           <a:prstGeom prst="rect">
             <a:avLst/>
@@ -12881,14 +16326,14 @@
         </p:nvSpPr>
         <p:spPr>
           <a:xfrm>
-            <a:off x="4251960" y="2148840"/>
-            <a:ext cx="3657600" cy="548640"/>
+            <a:off x="6217920" y="1828800"/>
+            <a:ext cx="5486400" cy="502920"/>
           </a:xfrm>
           <a:prstGeom prst="rect">
             <a:avLst/>
           </a:prstGeom>
           <a:solidFill>
-            <a:srgbClr val="1F4E79"/>
+            <a:srgbClr val="E88A1A"/>
           </a:solidFill>
           <a:ln>
             <a:noFill/>
@@ -12925,8 +16370,8 @@
         </p:nvSpPr>
         <p:spPr>
           <a:xfrm>
-            <a:off x="4379976" y="2240280"/>
-            <a:ext cx="3401568" cy="457200"/>
+            <a:off x="6364224" y="1920240"/>
+            <a:ext cx="5193792" cy="457200"/>
           </a:xfrm>
           <a:prstGeom prst="rect">
             <a:avLst/>
@@ -12956,7 +16401,7 @@
                 <a:ea typeface="微软雅黑"/>
                 <a:cs typeface="微软雅黑"/>
               </a:rPr>
-              <a:t>战略协同 / 渠道方</a:t>
+              <a:t>乙方 · 联合主办 / 平台赋能方</a:t>
             </a:r>
           </a:p>
         </p:txBody>
@@ -12969,8 +16414,117 @@
         </p:nvSpPr>
         <p:spPr>
           <a:xfrm>
-            <a:off x="4398264" y="2834640"/>
-            <a:ext cx="3364992" cy="1371600"/>
+            <a:off x="6382512" y="2423160"/>
+            <a:ext cx="5157216" cy="914400"/>
+          </a:xfrm>
+          <a:prstGeom prst="rect">
+            <a:avLst/>
+          </a:prstGeom>
+          <a:noFill/>
+        </p:spPr>
+        <p:txBody>
+          <a:bodyPr wrap="square" anchor="t" lIns="50800" rIns="50800" tIns="25400" bIns="25400">
+            <a:spAutoFit/>
+          </a:bodyPr>
+          <a:lstStyle/>
+          <a:p>
+            <a:pPr algn="l">
+              <a:lnSpc>
+                <a:spcPct val="108000"/>
+              </a:lnSpc>
+              <a:spcAft>
+                <a:spcPts val="600"/>
+              </a:spcAft>
+            </a:pPr>
+            <a:r>
+              <a:rPr sz="1300" b="1">
+                <a:solidFill>
+                  <a:srgbClr val="142B45"/>
+                </a:solidFill>
+                <a:latin typeface="微软雅黑"/>
+                <a:ea typeface="微软雅黑"/>
+                <a:cs typeface="微软雅黑"/>
+              </a:rPr>
+              <a:t>复旦大学住房政策研究中心 · 上海市科技企业联合会 · 上海市杨浦区科技企业联合会</a:t>
+            </a:r>
+          </a:p>
+          <a:p>
+            <a:pPr algn="l">
+              <a:lnSpc>
+                <a:spcPct val="108000"/>
+              </a:lnSpc>
+              <a:spcAft>
+                <a:spcPts val="400"/>
+              </a:spcAft>
+            </a:pPr>
+            <a:r>
+              <a:rPr sz="1100" b="0">
+                <a:solidFill>
+                  <a:srgbClr val="5A636E"/>
+                </a:solidFill>
+                <a:latin typeface="微软雅黑"/>
+                <a:ea typeface="微软雅黑"/>
+                <a:cs typeface="微软雅黑"/>
+              </a:rPr>
+              <a:t>品牌背书 · 需求端（买方 / 场景）资源 · 议程赋能 · 产品设计与规则</a:t>
+            </a:r>
+          </a:p>
+        </p:txBody>
+      </p:sp>
+      <p:sp>
+        <p:nvSpPr>
+          <p:cNvPr id="15" name="TextBox 14"/>
+          <p:cNvSpPr txBox="1"/>
+          <p:nvPr/>
+        </p:nvSpPr>
+        <p:spPr>
+          <a:xfrm>
+            <a:off x="457200" y="3611880"/>
+            <a:ext cx="11247120" cy="365760"/>
+          </a:xfrm>
+          <a:prstGeom prst="rect">
+            <a:avLst/>
+          </a:prstGeom>
+          <a:noFill/>
+        </p:spPr>
+        <p:txBody>
+          <a:bodyPr wrap="square" anchor="t" lIns="50800" rIns="50800" tIns="25400" bIns="25400">
+            <a:spAutoFit/>
+          </a:bodyPr>
+          <a:lstStyle/>
+          <a:p>
+            <a:pPr algn="l">
+              <a:lnSpc>
+                <a:spcPct val="108000"/>
+              </a:lnSpc>
+              <a:spcAft>
+                <a:spcPts val="400"/>
+              </a:spcAft>
+            </a:pPr>
+            <a:r>
+              <a:rPr sz="1300" b="1">
+                <a:solidFill>
+                  <a:srgbClr val="B03A2E"/>
+                </a:solidFill>
+                <a:latin typeface="微软雅黑"/>
+                <a:ea typeface="微软雅黑"/>
+                <a:cs typeface="微软雅黑"/>
+              </a:rPr>
+              <a:t>针对对方“各收各钱、自负盈亏”方案的指导性立场（红线）：</a:t>
+            </a:r>
+          </a:p>
+        </p:txBody>
+      </p:sp>
+      <p:sp>
+        <p:nvSpPr>
+          <p:cNvPr id="16" name="TextBox 15"/>
+          <p:cNvSpPr txBox="1"/>
+          <p:nvPr/>
+        </p:nvSpPr>
+        <p:spPr>
+          <a:xfrm>
+            <a:off x="548640" y="4023360"/>
+            <a:ext cx="11155680" cy="2103120"/>
           </a:xfrm>
           <a:prstGeom prst="rect">
             <a:avLst/>
@@ -12992,17 +16546,103 @@
               </a:spcAft>
             </a:pPr>
             <a:r>
-              <a:rPr sz="1350" b="1">
-                <a:solidFill>
-                  <a:srgbClr val="142B45"/>
+              <a:rPr sz="1250" b="0">
+                <a:solidFill>
+                  <a:srgbClr val="222A33"/>
                 </a:solidFill>
                 <a:latin typeface="微软雅黑"/>
                 <a:ea typeface="微软雅黑"/>
                 <a:cs typeface="微软雅黑"/>
               </a:rPr>
-              <a:t>中钢协流通分会</a:t>
-            </a:r>
-          </a:p>
+              <a:t>• 仅“各自直接运营成本（会务、接待）”可独立核算；平台赋能层面必须有对价回流。</a:t>
+            </a:r>
+          </a:p>
+          <a:p>
+            <a:pPr algn="l">
+              <a:lnSpc>
+                <a:spcPct val="108000"/>
+              </a:lnSpc>
+              <a:spcAft>
+                <a:spcPts val="800"/>
+              </a:spcAft>
+            </a:pPr>
+            <a:r>
+              <a:rPr sz="1250" b="0">
+                <a:solidFill>
+                  <a:srgbClr val="222A33"/>
+                </a:solidFill>
+                <a:latin typeface="微软雅黑"/>
+                <a:ea typeface="微软雅黑"/>
+                <a:cs typeface="微软雅黑"/>
+              </a:rPr>
+              <a:t>• 不接受“各收各钱”：对方有会员制沉淀长尾收益、我方无会员体系，各收各钱等于我方单向输出资源、拿不到产业链利润，属不对等。</a:t>
+            </a:r>
+          </a:p>
+          <a:p>
+            <a:pPr algn="l">
+              <a:lnSpc>
+                <a:spcPct val="108000"/>
+              </a:lnSpc>
+              <a:spcAft>
+                <a:spcPts val="800"/>
+              </a:spcAft>
+            </a:pPr>
+            <a:r>
+              <a:rPr sz="1250" b="0">
+                <a:solidFill>
+                  <a:srgbClr val="222A33"/>
+                </a:solidFill>
+                <a:latin typeface="微软雅黑"/>
+                <a:ea typeface="微软雅黑"/>
+                <a:cs typeface="微软雅黑"/>
+              </a:rPr>
+              <a:t>• 定性升级：从“各自办活动” → “联合产品 / 联合主办合作”。</a:t>
+            </a:r>
+          </a:p>
+          <a:p>
+            <a:pPr algn="l">
+              <a:lnSpc>
+                <a:spcPct val="108000"/>
+              </a:lnSpc>
+              <a:spcAft>
+                <a:spcPts val="800"/>
+              </a:spcAft>
+            </a:pPr>
+            <a:r>
+              <a:rPr sz="1250" b="0">
+                <a:solidFill>
+                  <a:srgbClr val="222A33"/>
+                </a:solidFill>
+                <a:latin typeface="微软雅黑"/>
+                <a:ea typeface="微软雅黑"/>
+                <a:cs typeface="微软雅黑"/>
+              </a:rPr>
+              <a:t>• 对等交流、商务对商务、总会对总会；不以“免费 / 初期不计营收”开场。</a:t>
+            </a:r>
+          </a:p>
+        </p:txBody>
+      </p:sp>
+      <p:sp>
+        <p:nvSpPr>
+          <p:cNvPr id="17" name="TextBox 16"/>
+          <p:cNvSpPr txBox="1"/>
+          <p:nvPr/>
+        </p:nvSpPr>
+        <p:spPr>
+          <a:xfrm>
+            <a:off x="457200" y="6446520"/>
+            <a:ext cx="8229600" cy="320040"/>
+          </a:xfrm>
+          <a:prstGeom prst="rect">
+            <a:avLst/>
+          </a:prstGeom>
+          <a:noFill/>
+        </p:spPr>
+        <p:txBody>
+          <a:bodyPr wrap="square" anchor="t" lIns="50800" rIns="50800" tIns="25400" bIns="25400">
+            <a:spAutoFit/>
+          </a:bodyPr>
+          <a:lstStyle/>
           <a:p>
             <a:pPr algn="l">
               <a:lnSpc>
@@ -13013,7 +16653,7 @@
               </a:spcAft>
             </a:pPr>
             <a:r>
-              <a:rPr sz="1100" b="0">
+              <a:rPr sz="900" b="0">
                 <a:solidFill>
                   <a:srgbClr val="5A636E"/>
                 </a:solidFill>
@@ -13021,141 +16661,7 @@
                 <a:ea typeface="微软雅黑"/>
                 <a:cs typeface="微软雅黑"/>
               </a:rPr>
-              <a:t>钢铁企业资源 · 组织参与 · 协助邀约</a:t>
-            </a:r>
-          </a:p>
-        </p:txBody>
-      </p:sp>
-      <p:sp>
-        <p:nvSpPr>
-          <p:cNvPr id="15" name="Rectangle 14"/>
-          <p:cNvSpPr/>
-          <p:nvPr/>
-        </p:nvSpPr>
-        <p:spPr>
-          <a:xfrm>
-            <a:off x="8046720" y="2148840"/>
-            <a:ext cx="3657600" cy="2194560"/>
-          </a:xfrm>
-          <a:prstGeom prst="rect">
-            <a:avLst/>
-          </a:prstGeom>
-          <a:solidFill>
-            <a:srgbClr val="EEF3F8"/>
-          </a:solidFill>
-          <a:ln w="12700">
-            <a:solidFill>
-              <a:srgbClr val="D5DEE8"/>
-            </a:solidFill>
-          </a:ln>
-          <a:effectLst/>
-        </p:spPr>
-        <p:style>
-          <a:lnRef idx="1">
-            <a:schemeClr val="accent1"/>
-          </a:lnRef>
-          <a:fillRef idx="3">
-            <a:schemeClr val="accent1"/>
-          </a:fillRef>
-          <a:effectRef idx="2">
-            <a:schemeClr val="accent1"/>
-          </a:effectRef>
-          <a:fontRef idx="minor">
-            <a:schemeClr val="lt1"/>
-          </a:fontRef>
-        </p:style>
-        <p:txBody>
-          <a:bodyPr rtlCol="0" anchor="ctr"/>
-          <a:lstStyle/>
-          <a:p>
-            <a:pPr algn="ctr"/>
-          </a:p>
-        </p:txBody>
-      </p:sp>
-      <p:sp>
-        <p:nvSpPr>
-          <p:cNvPr id="16" name="Rectangle 15"/>
-          <p:cNvSpPr/>
-          <p:nvPr/>
-        </p:nvSpPr>
-        <p:spPr>
-          <a:xfrm>
-            <a:off x="8046720" y="2148840"/>
-            <a:ext cx="3657600" cy="548640"/>
-          </a:xfrm>
-          <a:prstGeom prst="rect">
-            <a:avLst/>
-          </a:prstGeom>
-          <a:solidFill>
-            <a:srgbClr val="E88A1A"/>
-          </a:solidFill>
-          <a:ln>
-            <a:noFill/>
-          </a:ln>
-          <a:effectLst/>
-        </p:spPr>
-        <p:style>
-          <a:lnRef idx="1">
-            <a:schemeClr val="accent1"/>
-          </a:lnRef>
-          <a:fillRef idx="3">
-            <a:schemeClr val="accent1"/>
-          </a:fillRef>
-          <a:effectRef idx="2">
-            <a:schemeClr val="accent1"/>
-          </a:effectRef>
-          <a:fontRef idx="minor">
-            <a:schemeClr val="lt1"/>
-          </a:fontRef>
-        </p:style>
-        <p:txBody>
-          <a:bodyPr rtlCol="0" anchor="ctr"/>
-          <a:lstStyle/>
-          <a:p>
-            <a:pPr algn="ctr"/>
-          </a:p>
-        </p:txBody>
-      </p:sp>
-      <p:sp>
-        <p:nvSpPr>
-          <p:cNvPr id="17" name="TextBox 16"/>
-          <p:cNvSpPr txBox="1"/>
-          <p:nvPr/>
-        </p:nvSpPr>
-        <p:spPr>
-          <a:xfrm>
-            <a:off x="8174736" y="2240280"/>
-            <a:ext cx="3401568" cy="457200"/>
-          </a:xfrm>
-          <a:prstGeom prst="rect">
-            <a:avLst/>
-          </a:prstGeom>
-          <a:noFill/>
-        </p:spPr>
-        <p:txBody>
-          <a:bodyPr wrap="square" anchor="t" lIns="50800" rIns="50800" tIns="25400" bIns="25400">
-            <a:spAutoFit/>
-          </a:bodyPr>
-          <a:lstStyle/>
-          <a:p>
-            <a:pPr algn="l">
-              <a:lnSpc>
-                <a:spcPct val="108000"/>
-              </a:lnSpc>
-              <a:spcAft>
-                <a:spcPts val="400"/>
-              </a:spcAft>
-            </a:pPr>
-            <a:r>
-              <a:rPr sz="1300" b="1">
-                <a:solidFill>
-                  <a:srgbClr val="FFFFFF"/>
-                </a:solidFill>
-                <a:latin typeface="微软雅黑"/>
-                <a:ea typeface="微软雅黑"/>
-                <a:cs typeface="微软雅黑"/>
-              </a:rPr>
-              <a:t>我方目标定位</a:t>
+              <a:t>钢铁 × 不动产 × 产业园区 · 跨产业撮合与游学转化平台</a:t>
             </a:r>
           </a:p>
         </p:txBody>
@@ -13163,264 +16669,6 @@
       <p:sp>
         <p:nvSpPr>
           <p:cNvPr id="18" name="TextBox 17"/>
-          <p:cNvSpPr txBox="1"/>
-          <p:nvPr/>
-        </p:nvSpPr>
-        <p:spPr>
-          <a:xfrm>
-            <a:off x="8193024" y="2834640"/>
-            <a:ext cx="3364992" cy="1371600"/>
-          </a:xfrm>
-          <a:prstGeom prst="rect">
-            <a:avLst/>
-          </a:prstGeom>
-          <a:noFill/>
-        </p:spPr>
-        <p:txBody>
-          <a:bodyPr wrap="square" anchor="t" lIns="50800" rIns="50800" tIns="25400" bIns="25400">
-            <a:spAutoFit/>
-          </a:bodyPr>
-          <a:lstStyle/>
-          <a:p>
-            <a:pPr algn="l">
-              <a:lnSpc>
-                <a:spcPct val="108000"/>
-              </a:lnSpc>
-              <a:spcAft>
-                <a:spcPts val="800"/>
-              </a:spcAft>
-            </a:pPr>
-            <a:r>
-              <a:rPr sz="1350" b="1">
-                <a:solidFill>
-                  <a:srgbClr val="142B45"/>
-                </a:solidFill>
-                <a:latin typeface="微软雅黑"/>
-                <a:ea typeface="微软雅黑"/>
-                <a:cs typeface="微软雅黑"/>
-              </a:rPr>
-              <a:t>上海及长三角总战略合作伙伴</a:t>
-            </a:r>
-          </a:p>
-          <a:p>
-            <a:pPr algn="l">
-              <a:lnSpc>
-                <a:spcPct val="108000"/>
-              </a:lnSpc>
-              <a:spcAft>
-                <a:spcPts val="400"/>
-              </a:spcAft>
-            </a:pPr>
-            <a:r>
-              <a:rPr sz="1100" b="0">
-                <a:solidFill>
-                  <a:srgbClr val="5A636E"/>
-                </a:solidFill>
-                <a:latin typeface="微软雅黑"/>
-                <a:ea typeface="微软雅黑"/>
-                <a:cs typeface="微软雅黑"/>
-              </a:rPr>
-              <a:t>独家 / 优先承接中钢协在沪及长三角研学、撮合与项目转化</a:t>
-            </a:r>
-          </a:p>
-        </p:txBody>
-      </p:sp>
-      <p:sp>
-        <p:nvSpPr>
-          <p:cNvPr id="19" name="TextBox 18"/>
-          <p:cNvSpPr txBox="1"/>
-          <p:nvPr/>
-        </p:nvSpPr>
-        <p:spPr>
-          <a:xfrm>
-            <a:off x="457200" y="4572000"/>
-            <a:ext cx="11247120" cy="1463040"/>
-          </a:xfrm>
-          <a:prstGeom prst="rect">
-            <a:avLst/>
-          </a:prstGeom>
-          <a:noFill/>
-        </p:spPr>
-        <p:txBody>
-          <a:bodyPr wrap="square" anchor="t" lIns="50800" rIns="50800" tIns="25400" bIns="25400">
-            <a:spAutoFit/>
-          </a:bodyPr>
-          <a:lstStyle/>
-          <a:p>
-            <a:pPr algn="l">
-              <a:lnSpc>
-                <a:spcPct val="108000"/>
-              </a:lnSpc>
-              <a:spcAft>
-                <a:spcPts val="600"/>
-              </a:spcAft>
-            </a:pPr>
-            <a:r>
-              <a:rPr sz="1300" b="1">
-                <a:solidFill>
-                  <a:srgbClr val="142B45"/>
-                </a:solidFill>
-                <a:latin typeface="微软雅黑"/>
-                <a:ea typeface="微软雅黑"/>
-                <a:cs typeface="微软雅黑"/>
-              </a:rPr>
-              <a:t>对方顾虑与我方应对：</a:t>
-            </a:r>
-          </a:p>
-          <a:p>
-            <a:pPr algn="l">
-              <a:lnSpc>
-                <a:spcPct val="108000"/>
-              </a:lnSpc>
-              <a:spcAft>
-                <a:spcPts val="300"/>
-              </a:spcAft>
-            </a:pPr>
-            <a:r>
-              <a:rPr sz="1050" b="0">
-                <a:solidFill>
-                  <a:srgbClr val="222A33"/>
-                </a:solidFill>
-                <a:latin typeface="微软雅黑"/>
-                <a:ea typeface="微软雅黑"/>
-                <a:cs typeface="微软雅黑"/>
-              </a:rPr>
-              <a:t>• 钢厂决策慢 / 中小钢厂动员难 → 初期不收费 + 真政策真资源，降低门槛、精准筛客，用小规模闭门锁定决策人。</a:t>
-            </a:r>
-          </a:p>
-          <a:p>
-            <a:pPr algn="l">
-              <a:lnSpc>
-                <a:spcPct val="108000"/>
-              </a:lnSpc>
-              <a:spcAft>
-                <a:spcPts val="300"/>
-              </a:spcAft>
-            </a:pPr>
-            <a:r>
-              <a:rPr sz="1050" b="0">
-                <a:solidFill>
-                  <a:srgbClr val="222A33"/>
-                </a:solidFill>
-                <a:latin typeface="微软雅黑"/>
-                <a:ea typeface="微软雅黑"/>
-                <a:cs typeface="微软雅黑"/>
-              </a:rPr>
-              <a:t>• 地产 / 园区收缩、无预算 → 商业模式转向存量盘活 / 特殊资产重整——帮房企盘活烂尾、闲置项目，钢材采购为配套，意愿强、订单大且持续。</a:t>
-            </a:r>
-          </a:p>
-          <a:p>
-            <a:pPr algn="l">
-              <a:lnSpc>
-                <a:spcPct val="108000"/>
-              </a:lnSpc>
-              <a:spcAft>
-                <a:spcPts val="300"/>
-              </a:spcAft>
-            </a:pPr>
-            <a:r>
-              <a:rPr sz="1050" b="0">
-                <a:solidFill>
-                  <a:srgbClr val="222A33"/>
-                </a:solidFill>
-                <a:latin typeface="微软雅黑"/>
-                <a:ea typeface="微软雅黑"/>
-                <a:cs typeface="微软雅黑"/>
-              </a:rPr>
-              <a:t>• 两边都怕被白嫖 / 跳单 → 撮合位置写进协议，服务费 / 项目费 / 会员制绑定，建立项目池与成交确认机制。</a:t>
-            </a:r>
-          </a:p>
-          <a:p>
-            <a:pPr algn="l">
-              <a:lnSpc>
-                <a:spcPct val="108000"/>
-              </a:lnSpc>
-              <a:spcAft>
-                <a:spcPts val="300"/>
-              </a:spcAft>
-            </a:pPr>
-            <a:r>
-              <a:rPr sz="1050" b="0">
-                <a:solidFill>
-                  <a:srgbClr val="222A33"/>
-                </a:solidFill>
-                <a:latin typeface="微软雅黑"/>
-                <a:ea typeface="微软雅黑"/>
-                <a:cs typeface="微软雅黑"/>
-              </a:rPr>
-              <a:t>• 抽成合规风险（国企审计严） → 以咨询 / 项目服务费名义、正规主体开票，不走按成交额的第三方居间分成账。</a:t>
-            </a:r>
-          </a:p>
-          <a:p>
-            <a:pPr algn="l">
-              <a:lnSpc>
-                <a:spcPct val="108000"/>
-              </a:lnSpc>
-              <a:spcAft>
-                <a:spcPts val="300"/>
-              </a:spcAft>
-            </a:pPr>
-            <a:r>
-              <a:rPr sz="1050" b="0">
-                <a:solidFill>
-                  <a:srgbClr val="222A33"/>
-                </a:solidFill>
-                <a:latin typeface="微软雅黑"/>
-                <a:ea typeface="微软雅黑"/>
-                <a:cs typeface="微软雅黑"/>
-              </a:rPr>
-              <a:t>• 钢厂不知产品新场景 → 第三、四期专程带钢厂销售 / 研发去发那科、特斯拉、光伏 / 储能企业，实地看智能装备与新能源到底要什么钢。</a:t>
-            </a:r>
-          </a:p>
-        </p:txBody>
-      </p:sp>
-      <p:sp>
-        <p:nvSpPr>
-          <p:cNvPr id="20" name="TextBox 19"/>
-          <p:cNvSpPr txBox="1"/>
-          <p:nvPr/>
-        </p:nvSpPr>
-        <p:spPr>
-          <a:xfrm>
-            <a:off x="457200" y="6446520"/>
-            <a:ext cx="8229600" cy="320040"/>
-          </a:xfrm>
-          <a:prstGeom prst="rect">
-            <a:avLst/>
-          </a:prstGeom>
-          <a:noFill/>
-        </p:spPr>
-        <p:txBody>
-          <a:bodyPr wrap="square" anchor="t" lIns="50800" rIns="50800" tIns="25400" bIns="25400">
-            <a:spAutoFit/>
-          </a:bodyPr>
-          <a:lstStyle/>
-          <a:p>
-            <a:pPr algn="l">
-              <a:lnSpc>
-                <a:spcPct val="108000"/>
-              </a:lnSpc>
-              <a:spcAft>
-                <a:spcPts val="400"/>
-              </a:spcAft>
-            </a:pPr>
-            <a:r>
-              <a:rPr sz="900" b="0">
-                <a:solidFill>
-                  <a:srgbClr val="5A636E"/>
-                </a:solidFill>
-                <a:latin typeface="微软雅黑"/>
-                <a:ea typeface="微软雅黑"/>
-                <a:cs typeface="微软雅黑"/>
-              </a:rPr>
-              <a:t>钢铁 × 地产 × 产业园区 · 跨产业撮合与游学转化平台</a:t>
-            </a:r>
-          </a:p>
-        </p:txBody>
-      </p:sp>
-      <p:sp>
-        <p:nvSpPr>
-          <p:cNvPr id="21" name="TextBox 20"/>
           <p:cNvSpPr txBox="1"/>
           <p:nvPr/>
         </p:nvSpPr>
@@ -13577,7 +16825,7 @@
         <p:spPr>
           <a:xfrm>
             <a:off x="457200" y="109728"/>
-            <a:ext cx="2743200" cy="365760"/>
+            <a:ext cx="5486400" cy="365760"/>
           </a:xfrm>
           <a:prstGeom prst="rect">
             <a:avLst/>
@@ -13607,7 +16855,7 @@
                 <a:ea typeface="微软雅黑"/>
                 <a:cs typeface="微软雅黑"/>
               </a:rPr>
-              <a:t>合作节奏</a:t>
+              <a:t>商业资产</a:t>
             </a:r>
           </a:p>
         </p:txBody>
@@ -13651,7 +16899,7 @@
                 <a:ea typeface="微软雅黑"/>
                 <a:cs typeface="微软雅黑"/>
               </a:rPr>
-              <a:t>两阶段合作设计</a:t>
+              <a:t>我方输出的商业资产界定</a:t>
             </a:r>
           </a:p>
           <a:p>
@@ -13672,7 +16920,7 @@
                 <a:ea typeface="微软雅黑"/>
                 <a:cs typeface="微软雅黑"/>
               </a:rPr>
-              <a:t>先共建、后盈利：初期不计营收，跑通后按比例提成</a:t>
+              <a:t>谈判开场先锚定：并非“帮忙”，而是高壁垒的商业资产</a:t>
             </a:r>
           </a:p>
         </p:txBody>
@@ -13685,8 +16933,8 @@
         </p:nvSpPr>
         <p:spPr>
           <a:xfrm>
-            <a:off x="457200" y="1463040"/>
-            <a:ext cx="5486400" cy="4480560"/>
+            <a:off x="457200" y="1371600"/>
+            <a:ext cx="3657600" cy="4480560"/>
           </a:xfrm>
           <a:prstGeom prst="rect">
             <a:avLst/>
@@ -13731,8 +16979,8 @@
         </p:nvSpPr>
         <p:spPr>
           <a:xfrm>
-            <a:off x="457200" y="1463040"/>
-            <a:ext cx="5486400" cy="685800"/>
+            <a:off x="457200" y="1371600"/>
+            <a:ext cx="3657600" cy="914400"/>
           </a:xfrm>
           <a:prstGeom prst="rect">
             <a:avLst/>
@@ -13775,8 +17023,8 @@
         </p:nvSpPr>
         <p:spPr>
           <a:xfrm>
-            <a:off x="621792" y="1591056"/>
-            <a:ext cx="5157216" cy="548640"/>
+            <a:off x="585216" y="1481328"/>
+            <a:ext cx="3401568" cy="822960"/>
           </a:xfrm>
           <a:prstGeom prst="rect">
             <a:avLst/>
@@ -13798,7 +17046,7 @@
               </a:spcAft>
             </a:pPr>
             <a:r>
-              <a:rPr sz="1500" b="1">
+              <a:rPr sz="1350" b="1">
                 <a:solidFill>
                   <a:srgbClr val="FFFFFF"/>
                 </a:solidFill>
@@ -13806,7 +17054,7 @@
                 <a:ea typeface="微软雅黑"/>
                 <a:cs typeface="微软雅黑"/>
               </a:rPr>
-              <a:t>阶段一 · 共建期（前 1–2 期，8–9 月）</a:t>
+              <a:t>顶级信任背书（品牌资产）</a:t>
             </a:r>
           </a:p>
         </p:txBody>
@@ -13819,8 +17067,8 @@
         </p:nvSpPr>
         <p:spPr>
           <a:xfrm>
-            <a:off x="658368" y="2331720"/>
-            <a:ext cx="5084064" cy="3474720"/>
+            <a:off x="603504" y="2423160"/>
+            <a:ext cx="3364992" cy="3291840"/>
           </a:xfrm>
           <a:prstGeom prst="rect">
             <a:avLst/>
@@ -13842,15 +17090,15 @@
               </a:spcAft>
             </a:pPr>
             <a:r>
-              <a:rPr sz="1300" b="0">
-                <a:solidFill>
-                  <a:srgbClr val="222A33"/>
+              <a:rPr sz="1200" b="1">
+                <a:solidFill>
+                  <a:srgbClr val="142B45"/>
                 </a:solidFill>
                 <a:latin typeface="微软雅黑"/>
                 <a:ea typeface="微软雅黑"/>
                 <a:cs typeface="微软雅黑"/>
               </a:rPr>
-              <a:t>• 前几次活动【不计营收】与中钢协共同开展，双方各自承担部分组织成本；</a:t>
+              <a:t>复旦大学住房政策研究中心 + 上海市科技企业联合会 + 上海市杨浦区科技企业联合会 联合主办身份</a:t>
             </a:r>
           </a:p>
           <a:p>
@@ -13859,11 +17107,11 @@
                 <a:spcPct val="108000"/>
               </a:lnSpc>
               <a:spcAft>
-                <a:spcPts val="1000"/>
+                <a:spcPts val="400"/>
               </a:spcAft>
             </a:pPr>
             <a:r>
-              <a:rPr sz="1300" b="0">
+              <a:rPr sz="1150" b="0">
                 <a:solidFill>
                   <a:srgbClr val="222A33"/>
                 </a:solidFill>
@@ -13871,49 +17119,7 @@
                 <a:ea typeface="微软雅黑"/>
                 <a:cs typeface="微软雅黑"/>
               </a:rPr>
-              <a:t>• 目的：建立互信、验证模式、沉淀标杆案例、打磨供需撮合闭环；</a:t>
-            </a:r>
-          </a:p>
-          <a:p>
-            <a:pPr algn="l">
-              <a:lnSpc>
-                <a:spcPct val="108000"/>
-              </a:lnSpc>
-              <a:spcAft>
-                <a:spcPts val="1000"/>
-              </a:spcAft>
-            </a:pPr>
-            <a:r>
-              <a:rPr sz="1300" b="0">
-                <a:solidFill>
-                  <a:srgbClr val="222A33"/>
-                </a:solidFill>
-                <a:latin typeface="微软雅黑"/>
-                <a:ea typeface="微软雅黑"/>
-                <a:cs typeface="微软雅黑"/>
-              </a:rPr>
-              <a:t>• 中钢协向协会会员收费、我方向自有校友 / 资源收费，各自收益归各自所有；</a:t>
-            </a:r>
-          </a:p>
-          <a:p>
-            <a:pPr algn="l">
-              <a:lnSpc>
-                <a:spcPct val="108000"/>
-              </a:lnSpc>
-              <a:spcAft>
-                <a:spcPts val="1000"/>
-              </a:spcAft>
-            </a:pPr>
-            <a:r>
-              <a:rPr sz="1300" b="0">
-                <a:solidFill>
-                  <a:srgbClr val="222A33"/>
-                </a:solidFill>
-                <a:latin typeface="微软雅黑"/>
-                <a:ea typeface="微软雅黑"/>
-                <a:cs typeface="微软雅黑"/>
-              </a:rPr>
-              <a:t>• 以“真政策 + 真资源”降低门槛、精准筛选高质量决策人。</a:t>
+              <a:t>价值点：为上游钢企打通进入长三角核心圈层的“通行证”，大幅降低拓展大客户的信任成本与沟通门槛。</a:t>
             </a:r>
           </a:p>
         </p:txBody>
@@ -13926,8 +17132,8 @@
         </p:nvSpPr>
         <p:spPr>
           <a:xfrm>
-            <a:off x="6217920" y="1463040"/>
-            <a:ext cx="5486400" cy="4480560"/>
+            <a:off x="4251960" y="1371600"/>
+            <a:ext cx="3657600" cy="4480560"/>
           </a:xfrm>
           <a:prstGeom prst="rect">
             <a:avLst/>
@@ -13972,14 +17178,14 @@
         </p:nvSpPr>
         <p:spPr>
           <a:xfrm>
-            <a:off x="6217920" y="1463040"/>
-            <a:ext cx="5486400" cy="685800"/>
+            <a:off x="4251960" y="1371600"/>
+            <a:ext cx="3657600" cy="914400"/>
           </a:xfrm>
           <a:prstGeom prst="rect">
             <a:avLst/>
           </a:prstGeom>
           <a:solidFill>
-            <a:srgbClr val="E88A1A"/>
+            <a:srgbClr val="1F4E79"/>
           </a:solidFill>
           <a:ln>
             <a:noFill/>
@@ -14016,8 +17222,8 @@
         </p:nvSpPr>
         <p:spPr>
           <a:xfrm>
-            <a:off x="6382512" y="1591056"/>
-            <a:ext cx="5157216" cy="548640"/>
+            <a:off x="4379976" y="1481328"/>
+            <a:ext cx="3401568" cy="822960"/>
           </a:xfrm>
           <a:prstGeom prst="rect">
             <a:avLst/>
@@ -14039,7 +17245,7 @@
               </a:spcAft>
             </a:pPr>
             <a:r>
-              <a:rPr sz="1500" b="1">
+              <a:rPr sz="1350" b="1">
                 <a:solidFill>
                   <a:srgbClr val="FFFFFF"/>
                 </a:solidFill>
@@ -14047,7 +17253,7 @@
                 <a:ea typeface="微软雅黑"/>
                 <a:cs typeface="微软雅黑"/>
               </a:rPr>
-              <a:t>阶段二 · 盈利期（模式跑通后，10 月起）</a:t>
+              <a:t>高净值需求端资源（渠道资产）</a:t>
             </a:r>
           </a:p>
         </p:txBody>
@@ -14060,8 +17266,8 @@
         </p:nvSpPr>
         <p:spPr>
           <a:xfrm>
-            <a:off x="6419088" y="2331720"/>
-            <a:ext cx="5084064" cy="3474720"/>
+            <a:off x="4398264" y="2423160"/>
+            <a:ext cx="3364992" cy="3291840"/>
           </a:xfrm>
           <a:prstGeom prst="rect">
             <a:avLst/>
@@ -14083,17 +17289,195 @@
               </a:spcAft>
             </a:pPr>
             <a:r>
-              <a:rPr sz="1300" b="0">
-                <a:solidFill>
-                  <a:srgbClr val="222A33"/>
+              <a:rPr sz="1200" b="1">
+                <a:solidFill>
+                  <a:srgbClr val="142B45"/>
                 </a:solidFill>
                 <a:latin typeface="微软雅黑"/>
                 <a:ea typeface="微软雅黑"/>
                 <a:cs typeface="微软雅黑"/>
               </a:rPr>
-              <a:t>• 一旦撮合 / 项目转化成功，按约定比例提取撮合服务费 / 项目服务费提成；</a:t>
-            </a:r>
-          </a:p>
+              <a:t>定向邀约不动产开发、城市更新、科技企业及新能源头部企业决策层</a:t>
+            </a:r>
+          </a:p>
+          <a:p>
+            <a:pPr algn="l">
+              <a:lnSpc>
+                <a:spcPct val="108000"/>
+              </a:lnSpc>
+              <a:spcAft>
+                <a:spcPts val="400"/>
+              </a:spcAft>
+            </a:pPr>
+            <a:r>
+              <a:rPr sz="1150" b="0">
+                <a:solidFill>
+                  <a:srgbClr val="222A33"/>
+                </a:solidFill>
+                <a:latin typeface="微软雅黑"/>
+                <a:ea typeface="微软雅黑"/>
+                <a:cs typeface="微软雅黑"/>
+              </a:rPr>
+              <a:t>价值点：上游产能渴望真实下游场景，我方掌握最稀缺的“买方 / 场景方”话语权——游学得以成立的根本前提。</a:t>
+            </a:r>
+          </a:p>
+        </p:txBody>
+      </p:sp>
+      <p:sp>
+        <p:nvSpPr>
+          <p:cNvPr id="14" name="Rectangle 13"/>
+          <p:cNvSpPr/>
+          <p:nvPr/>
+        </p:nvSpPr>
+        <p:spPr>
+          <a:xfrm>
+            <a:off x="8046720" y="1371600"/>
+            <a:ext cx="3657600" cy="4480560"/>
+          </a:xfrm>
+          <a:prstGeom prst="rect">
+            <a:avLst/>
+          </a:prstGeom>
+          <a:solidFill>
+            <a:srgbClr val="EEF3F8"/>
+          </a:solidFill>
+          <a:ln w="12700">
+            <a:solidFill>
+              <a:srgbClr val="D5DEE8"/>
+            </a:solidFill>
+          </a:ln>
+          <a:effectLst/>
+        </p:spPr>
+        <p:style>
+          <a:lnRef idx="1">
+            <a:schemeClr val="accent1"/>
+          </a:lnRef>
+          <a:fillRef idx="3">
+            <a:schemeClr val="accent1"/>
+          </a:fillRef>
+          <a:effectRef idx="2">
+            <a:schemeClr val="accent1"/>
+          </a:effectRef>
+          <a:fontRef idx="minor">
+            <a:schemeClr val="lt1"/>
+          </a:fontRef>
+        </p:style>
+        <p:txBody>
+          <a:bodyPr rtlCol="0" anchor="ctr"/>
+          <a:lstStyle/>
+          <a:p>
+            <a:pPr algn="ctr"/>
+          </a:p>
+        </p:txBody>
+      </p:sp>
+      <p:sp>
+        <p:nvSpPr>
+          <p:cNvPr id="15" name="Rectangle 14"/>
+          <p:cNvSpPr/>
+          <p:nvPr/>
+        </p:nvSpPr>
+        <p:spPr>
+          <a:xfrm>
+            <a:off x="8046720" y="1371600"/>
+            <a:ext cx="3657600" cy="914400"/>
+          </a:xfrm>
+          <a:prstGeom prst="rect">
+            <a:avLst/>
+          </a:prstGeom>
+          <a:solidFill>
+            <a:srgbClr val="1F4E79"/>
+          </a:solidFill>
+          <a:ln>
+            <a:noFill/>
+          </a:ln>
+          <a:effectLst/>
+        </p:spPr>
+        <p:style>
+          <a:lnRef idx="1">
+            <a:schemeClr val="accent1"/>
+          </a:lnRef>
+          <a:fillRef idx="3">
+            <a:schemeClr val="accent1"/>
+          </a:fillRef>
+          <a:effectRef idx="2">
+            <a:schemeClr val="accent1"/>
+          </a:effectRef>
+          <a:fontRef idx="minor">
+            <a:schemeClr val="lt1"/>
+          </a:fontRef>
+        </p:style>
+        <p:txBody>
+          <a:bodyPr rtlCol="0" anchor="ctr"/>
+          <a:lstStyle/>
+          <a:p>
+            <a:pPr algn="ctr"/>
+          </a:p>
+        </p:txBody>
+      </p:sp>
+      <p:sp>
+        <p:nvSpPr>
+          <p:cNvPr id="16" name="TextBox 15"/>
+          <p:cNvSpPr txBox="1"/>
+          <p:nvPr/>
+        </p:nvSpPr>
+        <p:spPr>
+          <a:xfrm>
+            <a:off x="8174736" y="1481328"/>
+            <a:ext cx="3401568" cy="822960"/>
+          </a:xfrm>
+          <a:prstGeom prst="rect">
+            <a:avLst/>
+          </a:prstGeom>
+          <a:noFill/>
+        </p:spPr>
+        <p:txBody>
+          <a:bodyPr wrap="square" anchor="t" lIns="50800" rIns="50800" tIns="25400" bIns="25400">
+            <a:spAutoFit/>
+          </a:bodyPr>
+          <a:lstStyle/>
+          <a:p>
+            <a:pPr algn="l">
+              <a:lnSpc>
+                <a:spcPct val="108000"/>
+              </a:lnSpc>
+              <a:spcAft>
+                <a:spcPts val="400"/>
+              </a:spcAft>
+            </a:pPr>
+            <a:r>
+              <a:rPr sz="1350" b="1">
+                <a:solidFill>
+                  <a:srgbClr val="FFFFFF"/>
+                </a:solidFill>
+                <a:latin typeface="微软雅黑"/>
+                <a:ea typeface="微软雅黑"/>
+                <a:cs typeface="微软雅黑"/>
+              </a:rPr>
+              <a:t>顶层战略视角与议程赋能（智力资产）</a:t>
+            </a:r>
+          </a:p>
+        </p:txBody>
+      </p:sp>
+      <p:sp>
+        <p:nvSpPr>
+          <p:cNvPr id="17" name="TextBox 16"/>
+          <p:cNvSpPr txBox="1"/>
+          <p:nvPr/>
+        </p:nvSpPr>
+        <p:spPr>
+          <a:xfrm>
+            <a:off x="8193024" y="2423160"/>
+            <a:ext cx="3364992" cy="3291840"/>
+          </a:xfrm>
+          <a:prstGeom prst="rect">
+            <a:avLst/>
+          </a:prstGeom>
+          <a:noFill/>
+        </p:spPr>
+        <p:txBody>
+          <a:bodyPr wrap="square" anchor="t" lIns="50800" rIns="50800" tIns="25400" bIns="25400">
+            <a:spAutoFit/>
+          </a:bodyPr>
+          <a:lstStyle/>
           <a:p>
             <a:pPr algn="l">
               <a:lnSpc>
@@ -14104,82 +17488,17 @@
               </a:spcAft>
             </a:pPr>
             <a:r>
-              <a:rPr sz="1300" b="0">
-                <a:solidFill>
-                  <a:srgbClr val="222A33"/>
+              <a:rPr sz="1200" b="1">
+                <a:solidFill>
+                  <a:srgbClr val="142B45"/>
                 </a:solidFill>
                 <a:latin typeface="微软雅黑"/>
                 <a:ea typeface="微软雅黑"/>
                 <a:cs typeface="微软雅黑"/>
               </a:rPr>
-              <a:t>• 以“产业咨询 / 项目服务费”名义，由复旦、杨浦联合会等正规主体开票；</a:t>
-            </a:r>
-          </a:p>
-          <a:p>
-            <a:pPr algn="l">
-              <a:lnSpc>
-                <a:spcPct val="108000"/>
-              </a:lnSpc>
-              <a:spcAft>
-                <a:spcPts val="1000"/>
-              </a:spcAft>
-            </a:pPr>
-            <a:r>
-              <a:rPr sz="1300" b="0">
-                <a:solidFill>
-                  <a:srgbClr val="222A33"/>
-                </a:solidFill>
-                <a:latin typeface="微软雅黑"/>
-                <a:ea typeface="微软雅黑"/>
-                <a:cs typeface="微软雅黑"/>
-              </a:rPr>
-              <a:t>• 不做按成交额的居间分成账务，规避变相居间与合规风险；</a:t>
-            </a:r>
-          </a:p>
-          <a:p>
-            <a:pPr algn="l">
-              <a:lnSpc>
-                <a:spcPct val="108000"/>
-              </a:lnSpc>
-              <a:spcAft>
-                <a:spcPts val="1000"/>
-              </a:spcAft>
-            </a:pPr>
-            <a:r>
-              <a:rPr sz="1300" b="0">
-                <a:solidFill>
-                  <a:srgbClr val="222A33"/>
-                </a:solidFill>
-                <a:latin typeface="微软雅黑"/>
-                <a:ea typeface="微软雅黑"/>
-                <a:cs typeface="微软雅黑"/>
-              </a:rPr>
-              <a:t>• 把“撮合位置”写进合作协议，服务费 / 项目费 / 会员制绑定，建立成交确认机制。</a:t>
-            </a:r>
-          </a:p>
-        </p:txBody>
-      </p:sp>
-      <p:sp>
-        <p:nvSpPr>
-          <p:cNvPr id="14" name="TextBox 13"/>
-          <p:cNvSpPr txBox="1"/>
-          <p:nvPr/>
-        </p:nvSpPr>
-        <p:spPr>
-          <a:xfrm>
-            <a:off x="457200" y="6446520"/>
-            <a:ext cx="8229600" cy="320040"/>
-          </a:xfrm>
-          <a:prstGeom prst="rect">
-            <a:avLst/>
-          </a:prstGeom>
-          <a:noFill/>
-        </p:spPr>
-        <p:txBody>
-          <a:bodyPr wrap="square" anchor="t" lIns="50800" rIns="50800" tIns="25400" bIns="25400">
-            <a:spAutoFit/>
-          </a:bodyPr>
-          <a:lstStyle/>
+              <a:t>空间资产运营、产业升级与科技赋能的深度洞察</a:t>
+            </a:r>
+          </a:p>
           <a:p>
             <a:pPr algn="l">
               <a:lnSpc>
@@ -14190,22 +17509,66 @@
               </a:spcAft>
             </a:pPr>
             <a:r>
-              <a:rPr sz="900" b="0">
-                <a:solidFill>
-                  <a:srgbClr val="5A636E"/>
+              <a:rPr sz="1150" b="0">
+                <a:solidFill>
+                  <a:srgbClr val="222A33"/>
                 </a:solidFill>
                 <a:latin typeface="微软雅黑"/>
                 <a:ea typeface="微软雅黑"/>
                 <a:cs typeface="微软雅黑"/>
               </a:rPr>
-              <a:t>钢铁 × 地产 × 产业园区 · 跨产业撮合与游学转化平台</a:t>
-            </a:r>
-          </a:p>
-        </p:txBody>
-      </p:sp>
-      <p:sp>
-        <p:nvSpPr>
-          <p:cNvPr id="15" name="TextBox 14"/>
+              <a:t>价值点：负责核心沙龙 / 闭门会的议题设置与主持，拉升整体活动的行业站位。</a:t>
+            </a:r>
+          </a:p>
+        </p:txBody>
+      </p:sp>
+      <p:sp>
+        <p:nvSpPr>
+          <p:cNvPr id="18" name="TextBox 17"/>
+          <p:cNvSpPr txBox="1"/>
+          <p:nvPr/>
+        </p:nvSpPr>
+        <p:spPr>
+          <a:xfrm>
+            <a:off x="457200" y="6446520"/>
+            <a:ext cx="8229600" cy="320040"/>
+          </a:xfrm>
+          <a:prstGeom prst="rect">
+            <a:avLst/>
+          </a:prstGeom>
+          <a:noFill/>
+        </p:spPr>
+        <p:txBody>
+          <a:bodyPr wrap="square" anchor="t" lIns="50800" rIns="50800" tIns="25400" bIns="25400">
+            <a:spAutoFit/>
+          </a:bodyPr>
+          <a:lstStyle/>
+          <a:p>
+            <a:pPr algn="l">
+              <a:lnSpc>
+                <a:spcPct val="108000"/>
+              </a:lnSpc>
+              <a:spcAft>
+                <a:spcPts val="400"/>
+              </a:spcAft>
+            </a:pPr>
+            <a:r>
+              <a:rPr sz="900" b="0">
+                <a:solidFill>
+                  <a:srgbClr val="5A636E"/>
+                </a:solidFill>
+                <a:latin typeface="微软雅黑"/>
+                <a:ea typeface="微软雅黑"/>
+                <a:cs typeface="微软雅黑"/>
+              </a:rPr>
+              <a:t>钢铁 × 不动产 × 产业园区 · 跨产业撮合与游学转化平台</a:t>
+            </a:r>
+          </a:p>
+        </p:txBody>
+      </p:sp>
+      <p:sp>
+        <p:nvSpPr>
+          <p:cNvPr id="19" name="TextBox 18"/>
           <p:cNvSpPr txBox="1"/>
           <p:nvPr/>
         </p:nvSpPr>
